--- a/exam-generator/sp025-exam-generator/c4/files.pptx
+++ b/exam-generator/sp025-exam-generator/c4/files.pptx
@@ -5,12 +5,18 @@
     <p:sldMasterId id="2147483648" r:id="rId1"/>
   </p:sldMasterIdLst>
   <p:notesMasterIdLst>
-    <p:notesMasterId r:id="rId5"/>
+    <p:notesMasterId r:id="rId11"/>
   </p:notesMasterIdLst>
   <p:sldIdLst>
     <p:sldId id="258" r:id="rId2"/>
     <p:sldId id="256" r:id="rId3"/>
     <p:sldId id="259" r:id="rId4"/>
+    <p:sldId id="260" r:id="rId5"/>
+    <p:sldId id="261" r:id="rId6"/>
+    <p:sldId id="262" r:id="rId7"/>
+    <p:sldId id="266" r:id="rId8"/>
+    <p:sldId id="267" r:id="rId9"/>
+    <p:sldId id="268" r:id="rId10"/>
   </p:sldIdLst>
   <p:sldSz cx="12192000" cy="6858000"/>
   <p:notesSz cx="6858000" cy="9144000"/>
@@ -109,6 +115,11 @@
       </a:defRPr>
     </a:lvl9pPr>
   </p:defaultTextStyle>
+  <p:extLst>
+    <p:ext uri="{EFAFB233-063F-42B5-8137-9DF3F51BA10A}">
+      <p15:sldGuideLst xmlns:p15="http://schemas.microsoft.com/office/powerpoint/2012/main"/>
+    </p:ext>
+  </p:extLst>
 </p:presentation>
 </file>
 
@@ -194,7 +205,7 @@
           <a:p>
             <a:fld id="{E930CEF5-4124-458A-8583-FB2A0D68282E}" type="datetimeFigureOut">
               <a:rPr lang="en-MY" smtClean="0"/>
-              <a:t>16/3/2026</a:t>
+              <a:t>16/4/2026</a:t>
             </a:fld>
             <a:endParaRPr lang="en-MY"/>
           </a:p>
@@ -602,8 +613,8 @@
         </p:nvSpPr>
         <p:spPr/>
       </p:sp>
-      <mc:AlternateContent xmlns:mc="http://schemas.openxmlformats.org/markup-compatibility/2006">
-        <mc:Choice xmlns:a14="http://schemas.microsoft.com/office/drawing/2010/main" Requires="a14">
+      <mc:AlternateContent xmlns:mc="http://schemas.openxmlformats.org/markup-compatibility/2006" xmlns:a14="http://schemas.microsoft.com/office/drawing/2010/main">
+        <mc:Choice Requires="a14">
           <p:sp>
             <p:nvSpPr>
               <p:cNvPr id="3" name="Notes Placeholder 2"/>
@@ -619,6 +630,7 @@
               <a:bodyPr/>
               <a:lstStyle/>
               <a:p>
+                <a:pPr/>
                 <a14:m>
                   <m:oMathPara xmlns:m="http://schemas.openxmlformats.org/officeDocument/2006/math">
                     <m:oMathParaPr>
@@ -651,7 +663,7 @@
             </p:txBody>
           </p:sp>
         </mc:Choice>
-        <mc:Fallback>
+        <mc:Fallback xmlns="">
           <p:sp>
             <p:nvSpPr>
               <p:cNvPr id="3" name="Notes Placeholder 2"/>
@@ -975,7 +987,7 @@
           <a:p>
             <a:fld id="{55736931-D21D-4CEE-8596-8652B0B9C773}" type="datetimeFigureOut">
               <a:rPr lang="en-MY" smtClean="0"/>
-              <a:t>16/3/2026</a:t>
+              <a:t>16/4/2026</a:t>
             </a:fld>
             <a:endParaRPr lang="en-MY"/>
           </a:p>
@@ -1175,7 +1187,7 @@
           <a:p>
             <a:fld id="{55736931-D21D-4CEE-8596-8652B0B9C773}" type="datetimeFigureOut">
               <a:rPr lang="en-MY" smtClean="0"/>
-              <a:t>16/3/2026</a:t>
+              <a:t>16/4/2026</a:t>
             </a:fld>
             <a:endParaRPr lang="en-MY"/>
           </a:p>
@@ -1385,7 +1397,7 @@
           <a:p>
             <a:fld id="{55736931-D21D-4CEE-8596-8652B0B9C773}" type="datetimeFigureOut">
               <a:rPr lang="en-MY" smtClean="0"/>
-              <a:t>16/3/2026</a:t>
+              <a:t>16/4/2026</a:t>
             </a:fld>
             <a:endParaRPr lang="en-MY"/>
           </a:p>
@@ -1585,7 +1597,7 @@
           <a:p>
             <a:fld id="{55736931-D21D-4CEE-8596-8652B0B9C773}" type="datetimeFigureOut">
               <a:rPr lang="en-MY" smtClean="0"/>
-              <a:t>16/3/2026</a:t>
+              <a:t>16/4/2026</a:t>
             </a:fld>
             <a:endParaRPr lang="en-MY"/>
           </a:p>
@@ -1861,7 +1873,7 @@
           <a:p>
             <a:fld id="{55736931-D21D-4CEE-8596-8652B0B9C773}" type="datetimeFigureOut">
               <a:rPr lang="en-MY" smtClean="0"/>
-              <a:t>16/3/2026</a:t>
+              <a:t>16/4/2026</a:t>
             </a:fld>
             <a:endParaRPr lang="en-MY"/>
           </a:p>
@@ -2129,7 +2141,7 @@
           <a:p>
             <a:fld id="{55736931-D21D-4CEE-8596-8652B0B9C773}" type="datetimeFigureOut">
               <a:rPr lang="en-MY" smtClean="0"/>
-              <a:t>16/3/2026</a:t>
+              <a:t>16/4/2026</a:t>
             </a:fld>
             <a:endParaRPr lang="en-MY"/>
           </a:p>
@@ -2544,7 +2556,7 @@
           <a:p>
             <a:fld id="{55736931-D21D-4CEE-8596-8652B0B9C773}" type="datetimeFigureOut">
               <a:rPr lang="en-MY" smtClean="0"/>
-              <a:t>16/3/2026</a:t>
+              <a:t>16/4/2026</a:t>
             </a:fld>
             <a:endParaRPr lang="en-MY"/>
           </a:p>
@@ -2686,7 +2698,7 @@
           <a:p>
             <a:fld id="{55736931-D21D-4CEE-8596-8652B0B9C773}" type="datetimeFigureOut">
               <a:rPr lang="en-MY" smtClean="0"/>
-              <a:t>16/3/2026</a:t>
+              <a:t>16/4/2026</a:t>
             </a:fld>
             <a:endParaRPr lang="en-MY"/>
           </a:p>
@@ -2799,7 +2811,7 @@
           <a:p>
             <a:fld id="{55736931-D21D-4CEE-8596-8652B0B9C773}" type="datetimeFigureOut">
               <a:rPr lang="en-MY" smtClean="0"/>
-              <a:t>16/3/2026</a:t>
+              <a:t>16/4/2026</a:t>
             </a:fld>
             <a:endParaRPr lang="en-MY"/>
           </a:p>
@@ -3112,7 +3124,7 @@
           <a:p>
             <a:fld id="{55736931-D21D-4CEE-8596-8652B0B9C773}" type="datetimeFigureOut">
               <a:rPr lang="en-MY" smtClean="0"/>
-              <a:t>16/3/2026</a:t>
+              <a:t>16/4/2026</a:t>
             </a:fld>
             <a:endParaRPr lang="en-MY"/>
           </a:p>
@@ -3401,7 +3413,7 @@
           <a:p>
             <a:fld id="{55736931-D21D-4CEE-8596-8652B0B9C773}" type="datetimeFigureOut">
               <a:rPr lang="en-MY" smtClean="0"/>
-              <a:t>16/3/2026</a:t>
+              <a:t>16/4/2026</a:t>
             </a:fld>
             <a:endParaRPr lang="en-MY"/>
           </a:p>
@@ -3644,7 +3656,7 @@
           <a:p>
             <a:fld id="{55736931-D21D-4CEE-8596-8652B0B9C773}" type="datetimeFigureOut">
               <a:rPr lang="en-MY" smtClean="0"/>
-              <a:t>16/3/2026</a:t>
+              <a:t>16/4/2026</a:t>
             </a:fld>
             <a:endParaRPr lang="en-MY"/>
           </a:p>
@@ -4194,8 +4206,8 @@
           </a:prstGeom>
         </p:spPr>
       </p:pic>
-      <mc:AlternateContent xmlns:mc="http://schemas.openxmlformats.org/markup-compatibility/2006">
-        <mc:Choice xmlns:a14="http://schemas.microsoft.com/office/drawing/2010/main" Requires="a14">
+      <mc:AlternateContent xmlns:mc="http://schemas.openxmlformats.org/markup-compatibility/2006" xmlns:a14="http://schemas.microsoft.com/office/drawing/2010/main">
+        <mc:Choice Requires="a14">
           <p:sp>
             <p:nvSpPr>
               <p:cNvPr id="23" name="TextBox 22">
@@ -4262,7 +4274,7 @@
             </p:txBody>
           </p:sp>
         </mc:Choice>
-        <mc:Fallback>
+        <mc:Fallback xmlns="">
           <p:sp>
             <p:nvSpPr>
               <p:cNvPr id="23" name="TextBox 22">
@@ -4447,6 +4459,4415 @@
     <p:extLst>
       <p:ext uri="{BB962C8B-B14F-4D97-AF65-F5344CB8AC3E}">
         <p14:creationId xmlns:p14="http://schemas.microsoft.com/office/powerpoint/2010/main" val="3487791714"/>
+      </p:ext>
+    </p:extLst>
+  </p:cSld>
+  <p:clrMapOvr>
+    <a:masterClrMapping/>
+  </p:clrMapOvr>
+</p:sld>
+</file>
+
+<file path=ppt/slides/slide4.xml><?xml version="1.0" encoding="utf-8"?>
+<p:sld xmlns:a="http://schemas.openxmlformats.org/drawingml/2006/main" xmlns:r="http://schemas.openxmlformats.org/officeDocument/2006/relationships" xmlns:p="http://schemas.openxmlformats.org/presentationml/2006/main">
+  <p:cSld>
+    <p:spTree>
+      <p:nvGrpSpPr>
+        <p:cNvPr id="1" name=""/>
+        <p:cNvGrpSpPr/>
+        <p:nvPr/>
+      </p:nvGrpSpPr>
+      <p:grpSpPr>
+        <a:xfrm>
+          <a:off x="0" y="0"/>
+          <a:ext cx="0" cy="0"/>
+          <a:chOff x="0" y="0"/>
+          <a:chExt cx="0" cy="0"/>
+        </a:xfrm>
+      </p:grpSpPr>
+      <p:sp>
+        <p:nvSpPr>
+          <p:cNvPr id="3" name="TextBox 2">
+            <a:extLst>
+              <a:ext uri="{FF2B5EF4-FFF2-40B4-BE49-F238E27FC236}">
+                <a16:creationId xmlns:a16="http://schemas.microsoft.com/office/drawing/2014/main" id="{105C962B-7CEA-A8C9-7CBE-40416847C814}"/>
+              </a:ext>
+            </a:extLst>
+          </p:cNvPr>
+          <p:cNvSpPr txBox="1"/>
+          <p:nvPr/>
+        </p:nvSpPr>
+        <p:spPr>
+          <a:xfrm>
+            <a:off x="486696" y="341442"/>
+            <a:ext cx="10530348" cy="1513363"/>
+          </a:xfrm>
+          <a:prstGeom prst="rect">
+            <a:avLst/>
+          </a:prstGeom>
+          <a:noFill/>
+        </p:spPr>
+        <p:txBody>
+          <a:bodyPr wrap="square">
+            <a:spAutoFit/>
+          </a:bodyPr>
+          <a:lstStyle/>
+          <a:p>
+            <a:pPr marR="628015" lvl="0">
+              <a:lnSpc>
+                <a:spcPct val="113000"/>
+              </a:lnSpc>
+              <a:spcBef>
+                <a:spcPts val="600"/>
+              </a:spcBef>
+              <a:tabLst>
+                <a:tab pos="650240" algn="l"/>
+                <a:tab pos="950595" algn="l"/>
+              </a:tabLst>
+            </a:pPr>
+            <a:r>
+              <a:rPr lang="ms-MY" spc="-20" dirty="0">
+                <a:latin typeface="Times New Roman" panose="02020603050405020304" pitchFamily="18" charset="0"/>
+                <a:ea typeface="Times New Roman" panose="02020603050405020304" pitchFamily="18" charset="0"/>
+              </a:rPr>
+              <a:t>4(a)   </a:t>
+            </a:r>
+            <a:r>
+              <a:rPr lang="ms-MY" spc="0" dirty="0">
+                <a:effectLst/>
+                <a:latin typeface="Times New Roman" panose="02020603050405020304" pitchFamily="18" charset="0"/>
+                <a:ea typeface="Times New Roman" panose="02020603050405020304" pitchFamily="18" charset="0"/>
+              </a:rPr>
+              <a:t>A</a:t>
+            </a:r>
+            <a:r>
+              <a:rPr lang="ms-MY" spc="-30" dirty="0">
+                <a:effectLst/>
+                <a:latin typeface="Times New Roman" panose="02020603050405020304" pitchFamily="18" charset="0"/>
+                <a:ea typeface="Times New Roman" panose="02020603050405020304" pitchFamily="18" charset="0"/>
+              </a:rPr>
+              <a:t> </a:t>
+            </a:r>
+            <a:r>
+              <a:rPr lang="ms-MY" spc="0" dirty="0">
+                <a:effectLst/>
+                <a:latin typeface="Times New Roman" panose="02020603050405020304" pitchFamily="18" charset="0"/>
+                <a:ea typeface="Times New Roman" panose="02020603050405020304" pitchFamily="18" charset="0"/>
+              </a:rPr>
+              <a:t>circular</a:t>
+            </a:r>
+            <a:r>
+              <a:rPr lang="ms-MY" spc="-30" dirty="0">
+                <a:effectLst/>
+                <a:latin typeface="Times New Roman" panose="02020603050405020304" pitchFamily="18" charset="0"/>
+                <a:ea typeface="Times New Roman" panose="02020603050405020304" pitchFamily="18" charset="0"/>
+              </a:rPr>
+              <a:t> </a:t>
+            </a:r>
+            <a:r>
+              <a:rPr lang="ms-MY" spc="0" dirty="0">
+                <a:effectLst/>
+                <a:latin typeface="Times New Roman" panose="02020603050405020304" pitchFamily="18" charset="0"/>
+                <a:ea typeface="Times New Roman" panose="02020603050405020304" pitchFamily="18" charset="0"/>
+              </a:rPr>
+              <a:t>coil</a:t>
+            </a:r>
+            <a:r>
+              <a:rPr lang="ms-MY" spc="-25" dirty="0">
+                <a:effectLst/>
+                <a:latin typeface="Times New Roman" panose="02020603050405020304" pitchFamily="18" charset="0"/>
+                <a:ea typeface="Times New Roman" panose="02020603050405020304" pitchFamily="18" charset="0"/>
+              </a:rPr>
+              <a:t> </a:t>
+            </a:r>
+            <a:r>
+              <a:rPr lang="ms-MY" spc="0" dirty="0">
+                <a:effectLst/>
+                <a:latin typeface="Times New Roman" panose="02020603050405020304" pitchFamily="18" charset="0"/>
+                <a:ea typeface="Times New Roman" panose="02020603050405020304" pitchFamily="18" charset="0"/>
+              </a:rPr>
+              <a:t>of</a:t>
+            </a:r>
+            <a:r>
+              <a:rPr lang="ms-MY" spc="-30" dirty="0">
+                <a:effectLst/>
+                <a:latin typeface="Times New Roman" panose="02020603050405020304" pitchFamily="18" charset="0"/>
+                <a:ea typeface="Times New Roman" panose="02020603050405020304" pitchFamily="18" charset="0"/>
+              </a:rPr>
+              <a:t> </a:t>
+            </a:r>
+            <a:r>
+              <a:rPr lang="ms-MY" spc="0" dirty="0">
+                <a:effectLst/>
+                <a:latin typeface="Times New Roman" panose="02020603050405020304" pitchFamily="18" charset="0"/>
+                <a:ea typeface="Times New Roman" panose="02020603050405020304" pitchFamily="18" charset="0"/>
+              </a:rPr>
+              <a:t>100</a:t>
+            </a:r>
+            <a:r>
+              <a:rPr lang="ms-MY" spc="-25" dirty="0">
+                <a:effectLst/>
+                <a:latin typeface="Times New Roman" panose="02020603050405020304" pitchFamily="18" charset="0"/>
+                <a:ea typeface="Times New Roman" panose="02020603050405020304" pitchFamily="18" charset="0"/>
+              </a:rPr>
+              <a:t> </a:t>
+            </a:r>
+            <a:r>
+              <a:rPr lang="ms-MY" spc="0" dirty="0">
+                <a:effectLst/>
+                <a:latin typeface="Times New Roman" panose="02020603050405020304" pitchFamily="18" charset="0"/>
+                <a:ea typeface="Times New Roman" panose="02020603050405020304" pitchFamily="18" charset="0"/>
+              </a:rPr>
+              <a:t>turns</a:t>
+            </a:r>
+            <a:r>
+              <a:rPr lang="ms-MY" spc="-25" dirty="0">
+                <a:effectLst/>
+                <a:latin typeface="Times New Roman" panose="02020603050405020304" pitchFamily="18" charset="0"/>
+                <a:ea typeface="Times New Roman" panose="02020603050405020304" pitchFamily="18" charset="0"/>
+              </a:rPr>
+              <a:t> </a:t>
+            </a:r>
+            <a:r>
+              <a:rPr lang="ms-MY" spc="0" dirty="0">
+                <a:effectLst/>
+                <a:latin typeface="Times New Roman" panose="02020603050405020304" pitchFamily="18" charset="0"/>
+                <a:ea typeface="Times New Roman" panose="02020603050405020304" pitchFamily="18" charset="0"/>
+              </a:rPr>
+              <a:t>with</a:t>
+            </a:r>
+            <a:r>
+              <a:rPr lang="ms-MY" spc="-25" dirty="0">
+                <a:effectLst/>
+                <a:latin typeface="Times New Roman" panose="02020603050405020304" pitchFamily="18" charset="0"/>
+                <a:ea typeface="Times New Roman" panose="02020603050405020304" pitchFamily="18" charset="0"/>
+              </a:rPr>
+              <a:t> </a:t>
+            </a:r>
+            <a:r>
+              <a:rPr lang="ms-MY" spc="0" dirty="0">
+                <a:effectLst/>
+                <a:latin typeface="Times New Roman" panose="02020603050405020304" pitchFamily="18" charset="0"/>
+                <a:ea typeface="Times New Roman" panose="02020603050405020304" pitchFamily="18" charset="0"/>
+              </a:rPr>
+              <a:t>a</a:t>
+            </a:r>
+            <a:r>
+              <a:rPr lang="ms-MY" spc="-30" dirty="0">
+                <a:effectLst/>
+                <a:latin typeface="Times New Roman" panose="02020603050405020304" pitchFamily="18" charset="0"/>
+                <a:ea typeface="Times New Roman" panose="02020603050405020304" pitchFamily="18" charset="0"/>
+              </a:rPr>
+              <a:t> </a:t>
+            </a:r>
+            <a:r>
+              <a:rPr lang="ms-MY" spc="0" dirty="0">
+                <a:effectLst/>
+                <a:latin typeface="Times New Roman" panose="02020603050405020304" pitchFamily="18" charset="0"/>
+                <a:ea typeface="Times New Roman" panose="02020603050405020304" pitchFamily="18" charset="0"/>
+              </a:rPr>
+              <a:t>plane</a:t>
+            </a:r>
+            <a:r>
+              <a:rPr lang="ms-MY" spc="-35" dirty="0">
+                <a:effectLst/>
+                <a:latin typeface="Times New Roman" panose="02020603050405020304" pitchFamily="18" charset="0"/>
+                <a:ea typeface="Times New Roman" panose="02020603050405020304" pitchFamily="18" charset="0"/>
+              </a:rPr>
+              <a:t> </a:t>
+            </a:r>
+            <a:r>
+              <a:rPr lang="ms-MY" spc="0" dirty="0">
+                <a:effectLst/>
+                <a:latin typeface="Times New Roman" panose="02020603050405020304" pitchFamily="18" charset="0"/>
+                <a:ea typeface="Times New Roman" panose="02020603050405020304" pitchFamily="18" charset="0"/>
+              </a:rPr>
+              <a:t>area</a:t>
+            </a:r>
+            <a:r>
+              <a:rPr lang="ms-MY" spc="-5" dirty="0">
+                <a:effectLst/>
+                <a:latin typeface="Times New Roman" panose="02020603050405020304" pitchFamily="18" charset="0"/>
+                <a:ea typeface="Times New Roman" panose="02020603050405020304" pitchFamily="18" charset="0"/>
+              </a:rPr>
+              <a:t> </a:t>
+            </a:r>
+            <a:r>
+              <a:rPr lang="ms-MY" spc="0" dirty="0">
+                <a:effectLst/>
+                <a:latin typeface="Cambria Math" panose="02040503050406030204" pitchFamily="18" charset="0"/>
+                <a:ea typeface="Times New Roman" panose="02020603050405020304" pitchFamily="18" charset="0"/>
+              </a:rPr>
+              <a:t>8.0</a:t>
+            </a:r>
+            <a:r>
+              <a:rPr lang="ms-MY" spc="-5" dirty="0">
+                <a:effectLst/>
+                <a:latin typeface="Cambria Math" panose="02040503050406030204" pitchFamily="18" charset="0"/>
+                <a:ea typeface="Times New Roman" panose="02020603050405020304" pitchFamily="18" charset="0"/>
+              </a:rPr>
+              <a:t> </a:t>
+            </a:r>
+            <a:r>
+              <a:rPr lang="ms-MY" spc="0" dirty="0">
+                <a:effectLst/>
+                <a:latin typeface="Cambria Math" panose="02040503050406030204" pitchFamily="18" charset="0"/>
+                <a:ea typeface="Times New Roman" panose="02020603050405020304" pitchFamily="18" charset="0"/>
+              </a:rPr>
+              <a:t>× 10</a:t>
+            </a:r>
+            <a:r>
+              <a:rPr lang="ms-MY" spc="0" baseline="30000" dirty="0">
+                <a:effectLst/>
+                <a:latin typeface="Cambria Math" panose="02040503050406030204" pitchFamily="18" charset="0"/>
+                <a:ea typeface="Times New Roman" panose="02020603050405020304" pitchFamily="18" charset="0"/>
+              </a:rPr>
+              <a:t>−3</a:t>
+            </a:r>
+            <a:r>
+              <a:rPr lang="ms-MY" spc="0" dirty="0">
+                <a:effectLst/>
+                <a:latin typeface="Cambria Math" panose="02040503050406030204" pitchFamily="18" charset="0"/>
+                <a:ea typeface="Times New Roman" panose="02020603050405020304" pitchFamily="18" charset="0"/>
+              </a:rPr>
+              <a:t> m</a:t>
+            </a:r>
+            <a:r>
+              <a:rPr lang="ms-MY" spc="0" baseline="30000" dirty="0">
+                <a:effectLst/>
+                <a:latin typeface="Cambria Math" panose="02040503050406030204" pitchFamily="18" charset="0"/>
+                <a:ea typeface="Times New Roman" panose="02020603050405020304" pitchFamily="18" charset="0"/>
+              </a:rPr>
+              <a:t>2</a:t>
+            </a:r>
+            <a:r>
+              <a:rPr lang="ms-MY" spc="0" dirty="0">
+                <a:effectLst/>
+                <a:latin typeface="Cambria Math" panose="02040503050406030204" pitchFamily="18" charset="0"/>
+                <a:ea typeface="Times New Roman" panose="02020603050405020304" pitchFamily="18" charset="0"/>
+              </a:rPr>
+              <a:t> </a:t>
+            </a:r>
+            <a:r>
+              <a:rPr lang="ms-MY" spc="0" dirty="0">
+                <a:effectLst/>
+                <a:latin typeface="Times New Roman" panose="02020603050405020304" pitchFamily="18" charset="0"/>
+                <a:ea typeface="Times New Roman" panose="02020603050405020304" pitchFamily="18" charset="0"/>
+              </a:rPr>
+              <a:t>is</a:t>
+            </a:r>
+            <a:r>
+              <a:rPr lang="ms-MY" spc="-25" dirty="0">
+                <a:effectLst/>
+                <a:latin typeface="Times New Roman" panose="02020603050405020304" pitchFamily="18" charset="0"/>
+                <a:ea typeface="Times New Roman" panose="02020603050405020304" pitchFamily="18" charset="0"/>
+              </a:rPr>
+              <a:t> </a:t>
+            </a:r>
+            <a:r>
+              <a:rPr lang="ms-MY" spc="0" dirty="0">
+                <a:effectLst/>
+                <a:latin typeface="Times New Roman" panose="02020603050405020304" pitchFamily="18" charset="0"/>
+                <a:ea typeface="Times New Roman" panose="02020603050405020304" pitchFamily="18" charset="0"/>
+              </a:rPr>
+              <a:t>placed</a:t>
+            </a:r>
+            <a:r>
+              <a:rPr lang="ms-MY" spc="-25" dirty="0">
+                <a:effectLst/>
+                <a:latin typeface="Times New Roman" panose="02020603050405020304" pitchFamily="18" charset="0"/>
+                <a:ea typeface="Times New Roman" panose="02020603050405020304" pitchFamily="18" charset="0"/>
+              </a:rPr>
+              <a:t> </a:t>
+            </a:r>
+            <a:r>
+              <a:rPr lang="ms-MY" spc="0" dirty="0">
+                <a:effectLst/>
+                <a:latin typeface="Times New Roman" panose="02020603050405020304" pitchFamily="18" charset="0"/>
+                <a:ea typeface="Times New Roman" panose="02020603050405020304" pitchFamily="18" charset="0"/>
+              </a:rPr>
+              <a:t>in</a:t>
+            </a:r>
+            <a:r>
+              <a:rPr lang="ms-MY" spc="-10" dirty="0">
+                <a:effectLst/>
+                <a:latin typeface="Times New Roman" panose="02020603050405020304" pitchFamily="18" charset="0"/>
+                <a:ea typeface="Times New Roman" panose="02020603050405020304" pitchFamily="18" charset="0"/>
+              </a:rPr>
+              <a:t> </a:t>
+            </a:r>
+            <a:r>
+              <a:rPr lang="ms-MY" spc="0" dirty="0">
+                <a:effectLst/>
+                <a:latin typeface="Times New Roman" panose="02020603050405020304" pitchFamily="18" charset="0"/>
+                <a:ea typeface="Times New Roman" panose="02020603050405020304" pitchFamily="18" charset="0"/>
+              </a:rPr>
+              <a:t>a</a:t>
+            </a:r>
+            <a:r>
+              <a:rPr lang="ms-MY" spc="-30" dirty="0">
+                <a:effectLst/>
+                <a:latin typeface="Times New Roman" panose="02020603050405020304" pitchFamily="18" charset="0"/>
+                <a:ea typeface="Times New Roman" panose="02020603050405020304" pitchFamily="18" charset="0"/>
+              </a:rPr>
+              <a:t> </a:t>
+            </a:r>
+            <a:r>
+              <a:rPr lang="ms-MY" spc="0" dirty="0">
+                <a:effectLst/>
+                <a:latin typeface="Times New Roman" panose="02020603050405020304" pitchFamily="18" charset="0"/>
+                <a:ea typeface="Times New Roman" panose="02020603050405020304" pitchFamily="18" charset="0"/>
+              </a:rPr>
+              <a:t>magnetic field of 0.2 T.</a:t>
+            </a:r>
+            <a:endParaRPr lang="en-MY" spc="0" dirty="0">
+              <a:effectLst/>
+              <a:latin typeface="Times New Roman" panose="02020603050405020304" pitchFamily="18" charset="0"/>
+              <a:ea typeface="Times New Roman" panose="02020603050405020304" pitchFamily="18" charset="0"/>
+            </a:endParaRPr>
+          </a:p>
+          <a:p>
+            <a:pPr lvl="1">
+              <a:spcBef>
+                <a:spcPts val="25"/>
+              </a:spcBef>
+              <a:buSzPts val="1200"/>
+              <a:tabLst>
+                <a:tab pos="1316355" algn="l"/>
+              </a:tabLst>
+            </a:pPr>
+            <a:r>
+              <a:rPr lang="ms-MY" dirty="0">
+                <a:latin typeface="Times New Roman" panose="02020603050405020304" pitchFamily="18" charset="0"/>
+                <a:ea typeface="Times New Roman" panose="02020603050405020304" pitchFamily="18" charset="0"/>
+              </a:rPr>
+              <a:t>(i)   </a:t>
+            </a:r>
+            <a:r>
+              <a:rPr lang="ms-MY" spc="0" dirty="0">
+                <a:effectLst/>
+                <a:latin typeface="Times New Roman" panose="02020603050405020304" pitchFamily="18" charset="0"/>
+                <a:ea typeface="Times New Roman" panose="02020603050405020304" pitchFamily="18" charset="0"/>
+              </a:rPr>
+              <a:t>Calculate</a:t>
+            </a:r>
+            <a:r>
+              <a:rPr lang="ms-MY" spc="-70" dirty="0">
+                <a:effectLst/>
+                <a:latin typeface="Times New Roman" panose="02020603050405020304" pitchFamily="18" charset="0"/>
+                <a:ea typeface="Times New Roman" panose="02020603050405020304" pitchFamily="18" charset="0"/>
+              </a:rPr>
+              <a:t> </a:t>
+            </a:r>
+            <a:r>
+              <a:rPr lang="ms-MY" spc="0" dirty="0">
+                <a:effectLst/>
+                <a:latin typeface="Times New Roman" panose="02020603050405020304" pitchFamily="18" charset="0"/>
+                <a:ea typeface="Times New Roman" panose="02020603050405020304" pitchFamily="18" charset="0"/>
+              </a:rPr>
+              <a:t>the</a:t>
+            </a:r>
+            <a:r>
+              <a:rPr lang="ms-MY" spc="-40" dirty="0">
+                <a:effectLst/>
+                <a:latin typeface="Times New Roman" panose="02020603050405020304" pitchFamily="18" charset="0"/>
+                <a:ea typeface="Times New Roman" panose="02020603050405020304" pitchFamily="18" charset="0"/>
+              </a:rPr>
+              <a:t> </a:t>
+            </a:r>
+            <a:r>
+              <a:rPr lang="ms-MY" spc="0" dirty="0">
+                <a:effectLst/>
+                <a:latin typeface="Times New Roman" panose="02020603050405020304" pitchFamily="18" charset="0"/>
+                <a:ea typeface="Times New Roman" panose="02020603050405020304" pitchFamily="18" charset="0"/>
+              </a:rPr>
+              <a:t>magnetic</a:t>
+            </a:r>
+            <a:r>
+              <a:rPr lang="ms-MY" spc="-50" dirty="0">
+                <a:effectLst/>
+                <a:latin typeface="Times New Roman" panose="02020603050405020304" pitchFamily="18" charset="0"/>
+                <a:ea typeface="Times New Roman" panose="02020603050405020304" pitchFamily="18" charset="0"/>
+              </a:rPr>
+              <a:t> </a:t>
+            </a:r>
+            <a:r>
+              <a:rPr lang="ms-MY" spc="0" dirty="0">
+                <a:effectLst/>
+                <a:latin typeface="Times New Roman" panose="02020603050405020304" pitchFamily="18" charset="0"/>
+                <a:ea typeface="Times New Roman" panose="02020603050405020304" pitchFamily="18" charset="0"/>
+              </a:rPr>
+              <a:t>flux</a:t>
+            </a:r>
+            <a:r>
+              <a:rPr lang="ms-MY" spc="-50" dirty="0">
+                <a:effectLst/>
+                <a:latin typeface="Times New Roman" panose="02020603050405020304" pitchFamily="18" charset="0"/>
+                <a:ea typeface="Times New Roman" panose="02020603050405020304" pitchFamily="18" charset="0"/>
+              </a:rPr>
+              <a:t> </a:t>
+            </a:r>
+            <a:r>
+              <a:rPr lang="ms-MY" spc="0" dirty="0">
+                <a:effectLst/>
+                <a:latin typeface="Times New Roman" panose="02020603050405020304" pitchFamily="18" charset="0"/>
+                <a:ea typeface="Times New Roman" panose="02020603050405020304" pitchFamily="18" charset="0"/>
+              </a:rPr>
+              <a:t>linkage</a:t>
+            </a:r>
+            <a:r>
+              <a:rPr lang="ms-MY" spc="-55" dirty="0">
+                <a:effectLst/>
+                <a:latin typeface="Times New Roman" panose="02020603050405020304" pitchFamily="18" charset="0"/>
+                <a:ea typeface="Times New Roman" panose="02020603050405020304" pitchFamily="18" charset="0"/>
+              </a:rPr>
+              <a:t> </a:t>
+            </a:r>
+            <a:r>
+              <a:rPr lang="ms-MY" spc="0" dirty="0">
+                <a:effectLst/>
+                <a:latin typeface="Times New Roman" panose="02020603050405020304" pitchFamily="18" charset="0"/>
+                <a:ea typeface="Times New Roman" panose="02020603050405020304" pitchFamily="18" charset="0"/>
+              </a:rPr>
+              <a:t>through</a:t>
+            </a:r>
+            <a:r>
+              <a:rPr lang="ms-MY" spc="-45" dirty="0">
+                <a:effectLst/>
+                <a:latin typeface="Times New Roman" panose="02020603050405020304" pitchFamily="18" charset="0"/>
+                <a:ea typeface="Times New Roman" panose="02020603050405020304" pitchFamily="18" charset="0"/>
+              </a:rPr>
+              <a:t> </a:t>
+            </a:r>
+            <a:r>
+              <a:rPr lang="ms-MY" spc="0" dirty="0">
+                <a:effectLst/>
+                <a:latin typeface="Times New Roman" panose="02020603050405020304" pitchFamily="18" charset="0"/>
+                <a:ea typeface="Times New Roman" panose="02020603050405020304" pitchFamily="18" charset="0"/>
+              </a:rPr>
+              <a:t>the</a:t>
+            </a:r>
+            <a:r>
+              <a:rPr lang="ms-MY" spc="-40" dirty="0">
+                <a:effectLst/>
+                <a:latin typeface="Times New Roman" panose="02020603050405020304" pitchFamily="18" charset="0"/>
+                <a:ea typeface="Times New Roman" panose="02020603050405020304" pitchFamily="18" charset="0"/>
+              </a:rPr>
+              <a:t> </a:t>
+            </a:r>
+            <a:r>
+              <a:rPr lang="ms-MY" spc="0" dirty="0">
+                <a:effectLst/>
+                <a:latin typeface="Times New Roman" panose="02020603050405020304" pitchFamily="18" charset="0"/>
+                <a:ea typeface="Times New Roman" panose="02020603050405020304" pitchFamily="18" charset="0"/>
+              </a:rPr>
+              <a:t>coil</a:t>
+            </a:r>
+            <a:r>
+              <a:rPr lang="ms-MY" spc="-50" dirty="0">
+                <a:effectLst/>
+                <a:latin typeface="Times New Roman" panose="02020603050405020304" pitchFamily="18" charset="0"/>
+                <a:ea typeface="Times New Roman" panose="02020603050405020304" pitchFamily="18" charset="0"/>
+              </a:rPr>
+              <a:t> </a:t>
+            </a:r>
+            <a:r>
+              <a:rPr lang="ms-MY" spc="0" dirty="0">
+                <a:effectLst/>
+                <a:latin typeface="Times New Roman" panose="02020603050405020304" pitchFamily="18" charset="0"/>
+                <a:ea typeface="Times New Roman" panose="02020603050405020304" pitchFamily="18" charset="0"/>
+              </a:rPr>
+              <a:t>when</a:t>
+            </a:r>
+            <a:r>
+              <a:rPr lang="ms-MY" spc="-50" dirty="0">
+                <a:effectLst/>
+                <a:latin typeface="Times New Roman" panose="02020603050405020304" pitchFamily="18" charset="0"/>
+                <a:ea typeface="Times New Roman" panose="02020603050405020304" pitchFamily="18" charset="0"/>
+              </a:rPr>
+              <a:t> </a:t>
+            </a:r>
+            <a:r>
+              <a:rPr lang="ms-MY" spc="0" dirty="0">
+                <a:effectLst/>
+                <a:latin typeface="Times New Roman" panose="02020603050405020304" pitchFamily="18" charset="0"/>
+                <a:ea typeface="Times New Roman" panose="02020603050405020304" pitchFamily="18" charset="0"/>
+              </a:rPr>
+              <a:t>the</a:t>
+            </a:r>
+            <a:r>
+              <a:rPr lang="ms-MY" spc="-40" dirty="0">
+                <a:effectLst/>
+                <a:latin typeface="Times New Roman" panose="02020603050405020304" pitchFamily="18" charset="0"/>
+                <a:ea typeface="Times New Roman" panose="02020603050405020304" pitchFamily="18" charset="0"/>
+              </a:rPr>
+              <a:t> </a:t>
+            </a:r>
+            <a:r>
+              <a:rPr lang="ms-MY" spc="0" dirty="0">
+                <a:effectLst/>
+                <a:latin typeface="Times New Roman" panose="02020603050405020304" pitchFamily="18" charset="0"/>
+                <a:ea typeface="Times New Roman" panose="02020603050405020304" pitchFamily="18" charset="0"/>
+              </a:rPr>
+              <a:t>plane</a:t>
+            </a:r>
+            <a:r>
+              <a:rPr lang="ms-MY" spc="-50" dirty="0">
+                <a:effectLst/>
+                <a:latin typeface="Times New Roman" panose="02020603050405020304" pitchFamily="18" charset="0"/>
+                <a:ea typeface="Times New Roman" panose="02020603050405020304" pitchFamily="18" charset="0"/>
+              </a:rPr>
+              <a:t> </a:t>
+            </a:r>
+            <a:r>
+              <a:rPr lang="ms-MY" spc="0" dirty="0">
+                <a:effectLst/>
+                <a:latin typeface="Times New Roman" panose="02020603050405020304" pitchFamily="18" charset="0"/>
+                <a:ea typeface="Times New Roman" panose="02020603050405020304" pitchFamily="18" charset="0"/>
+              </a:rPr>
+              <a:t>of</a:t>
+            </a:r>
+            <a:r>
+              <a:rPr lang="ms-MY" spc="-55" dirty="0">
+                <a:effectLst/>
+                <a:latin typeface="Times New Roman" panose="02020603050405020304" pitchFamily="18" charset="0"/>
+                <a:ea typeface="Times New Roman" panose="02020603050405020304" pitchFamily="18" charset="0"/>
+              </a:rPr>
+              <a:t> </a:t>
+            </a:r>
+            <a:r>
+              <a:rPr lang="ms-MY" spc="0" dirty="0">
+                <a:effectLst/>
+                <a:latin typeface="Times New Roman" panose="02020603050405020304" pitchFamily="18" charset="0"/>
+                <a:ea typeface="Times New Roman" panose="02020603050405020304" pitchFamily="18" charset="0"/>
+              </a:rPr>
+              <a:t>the</a:t>
+            </a:r>
+            <a:r>
+              <a:rPr lang="ms-MY" spc="-40" dirty="0">
+                <a:effectLst/>
+                <a:latin typeface="Times New Roman" panose="02020603050405020304" pitchFamily="18" charset="0"/>
+                <a:ea typeface="Times New Roman" panose="02020603050405020304" pitchFamily="18" charset="0"/>
+              </a:rPr>
+              <a:t> </a:t>
+            </a:r>
+            <a:r>
+              <a:rPr lang="ms-MY" spc="-20" dirty="0">
+                <a:effectLst/>
+                <a:latin typeface="Times New Roman" panose="02020603050405020304" pitchFamily="18" charset="0"/>
+                <a:ea typeface="Times New Roman" panose="02020603050405020304" pitchFamily="18" charset="0"/>
+              </a:rPr>
+              <a:t>coil </a:t>
+            </a:r>
+            <a:r>
+              <a:rPr lang="ms-MY" dirty="0">
+                <a:effectLst/>
+                <a:latin typeface="Times New Roman" panose="02020603050405020304" pitchFamily="18" charset="0"/>
+                <a:ea typeface="Times New Roman" panose="02020603050405020304" pitchFamily="18" charset="0"/>
+              </a:rPr>
+              <a:t>makes</a:t>
+            </a:r>
+            <a:r>
+              <a:rPr lang="ms-MY" spc="-15" dirty="0">
+                <a:effectLst/>
+                <a:latin typeface="Times New Roman" panose="02020603050405020304" pitchFamily="18" charset="0"/>
+                <a:ea typeface="Times New Roman" panose="02020603050405020304" pitchFamily="18" charset="0"/>
+              </a:rPr>
+              <a:t> </a:t>
+            </a:r>
+            <a:r>
+              <a:rPr lang="ms-MY" dirty="0">
+                <a:effectLst/>
+                <a:latin typeface="Times New Roman" panose="02020603050405020304" pitchFamily="18" charset="0"/>
+                <a:ea typeface="Times New Roman" panose="02020603050405020304" pitchFamily="18" charset="0"/>
+              </a:rPr>
+              <a:t>an angle</a:t>
+            </a:r>
+            <a:r>
+              <a:rPr lang="ms-MY" spc="-5" dirty="0">
+                <a:effectLst/>
+                <a:latin typeface="Times New Roman" panose="02020603050405020304" pitchFamily="18" charset="0"/>
+                <a:ea typeface="Times New Roman" panose="02020603050405020304" pitchFamily="18" charset="0"/>
+              </a:rPr>
+              <a:t> </a:t>
+            </a:r>
+            <a:r>
+              <a:rPr lang="ms-MY" dirty="0">
+                <a:effectLst/>
+                <a:latin typeface="Times New Roman" panose="02020603050405020304" pitchFamily="18" charset="0"/>
+                <a:ea typeface="Times New Roman" panose="02020603050405020304" pitchFamily="18" charset="0"/>
+              </a:rPr>
+              <a:t>of 30°</a:t>
+            </a:r>
+            <a:r>
+              <a:rPr lang="ms-MY" spc="-20" dirty="0">
+                <a:effectLst/>
+                <a:latin typeface="Times New Roman" panose="02020603050405020304" pitchFamily="18" charset="0"/>
+                <a:ea typeface="Times New Roman" panose="02020603050405020304" pitchFamily="18" charset="0"/>
+              </a:rPr>
+              <a:t> </a:t>
+            </a:r>
+            <a:r>
+              <a:rPr lang="ms-MY" dirty="0">
+                <a:effectLst/>
+                <a:latin typeface="Times New Roman" panose="02020603050405020304" pitchFamily="18" charset="0"/>
+                <a:ea typeface="Times New Roman" panose="02020603050405020304" pitchFamily="18" charset="0"/>
+              </a:rPr>
+              <a:t>to</a:t>
+            </a:r>
+            <a:r>
+              <a:rPr lang="ms-MY" spc="10" dirty="0">
+                <a:effectLst/>
+                <a:latin typeface="Times New Roman" panose="02020603050405020304" pitchFamily="18" charset="0"/>
+                <a:ea typeface="Times New Roman" panose="02020603050405020304" pitchFamily="18" charset="0"/>
+              </a:rPr>
+              <a:t> </a:t>
+            </a:r>
+            <a:r>
+              <a:rPr lang="ms-MY" dirty="0">
+                <a:effectLst/>
+                <a:latin typeface="Times New Roman" panose="02020603050405020304" pitchFamily="18" charset="0"/>
+                <a:ea typeface="Times New Roman" panose="02020603050405020304" pitchFamily="18" charset="0"/>
+              </a:rPr>
+              <a:t>the</a:t>
+            </a:r>
+            <a:r>
+              <a:rPr lang="ms-MY" spc="-5" dirty="0">
+                <a:effectLst/>
+                <a:latin typeface="Times New Roman" panose="02020603050405020304" pitchFamily="18" charset="0"/>
+                <a:ea typeface="Times New Roman" panose="02020603050405020304" pitchFamily="18" charset="0"/>
+              </a:rPr>
+              <a:t> </a:t>
+            </a:r>
+            <a:r>
+              <a:rPr lang="ms-MY" dirty="0">
+                <a:effectLst/>
+                <a:latin typeface="Times New Roman" panose="02020603050405020304" pitchFamily="18" charset="0"/>
+                <a:ea typeface="Times New Roman" panose="02020603050405020304" pitchFamily="18" charset="0"/>
+              </a:rPr>
+              <a:t>magnetic</a:t>
+            </a:r>
+            <a:r>
+              <a:rPr lang="ms-MY" spc="-5" dirty="0">
+                <a:effectLst/>
+                <a:latin typeface="Times New Roman" panose="02020603050405020304" pitchFamily="18" charset="0"/>
+                <a:ea typeface="Times New Roman" panose="02020603050405020304" pitchFamily="18" charset="0"/>
+              </a:rPr>
+              <a:t> </a:t>
+            </a:r>
+            <a:r>
+              <a:rPr lang="ms-MY" spc="-10" dirty="0">
+                <a:effectLst/>
+                <a:latin typeface="Times New Roman" panose="02020603050405020304" pitchFamily="18" charset="0"/>
+                <a:ea typeface="Times New Roman" panose="02020603050405020304" pitchFamily="18" charset="0"/>
+              </a:rPr>
+              <a:t>field. 								</a:t>
+            </a:r>
+            <a:r>
+              <a:rPr lang="ms-MY" dirty="0">
+                <a:effectLst/>
+                <a:latin typeface="Times New Roman" panose="02020603050405020304" pitchFamily="18" charset="0"/>
+                <a:ea typeface="Times New Roman" panose="02020603050405020304" pitchFamily="18" charset="0"/>
+              </a:rPr>
+              <a:t>[2 </a:t>
+            </a:r>
+            <a:r>
+              <a:rPr lang="ms-MY" i="1" spc="-10" dirty="0">
+                <a:effectLst/>
+                <a:latin typeface="Times New Roman" panose="02020603050405020304" pitchFamily="18" charset="0"/>
+                <a:ea typeface="Times New Roman" panose="02020603050405020304" pitchFamily="18" charset="0"/>
+              </a:rPr>
+              <a:t>marks</a:t>
+            </a:r>
+            <a:r>
+              <a:rPr lang="ms-MY" spc="-10" dirty="0">
+                <a:effectLst/>
+                <a:latin typeface="Times New Roman" panose="02020603050405020304" pitchFamily="18" charset="0"/>
+                <a:ea typeface="Times New Roman" panose="02020603050405020304" pitchFamily="18" charset="0"/>
+              </a:rPr>
+              <a:t>]</a:t>
+            </a:r>
+            <a:endParaRPr lang="en-MY" dirty="0">
+              <a:effectLst/>
+              <a:latin typeface="Times New Roman" panose="02020603050405020304" pitchFamily="18" charset="0"/>
+              <a:ea typeface="Times New Roman" panose="02020603050405020304" pitchFamily="18" charset="0"/>
+            </a:endParaRPr>
+          </a:p>
+          <a:p>
+            <a:pPr>
+              <a:buNone/>
+            </a:pPr>
+            <a:r>
+              <a:rPr lang="ms-MY" dirty="0">
+                <a:latin typeface="Times New Roman" panose="02020603050405020304" pitchFamily="18" charset="0"/>
+                <a:ea typeface="Times New Roman" panose="02020603050405020304" pitchFamily="18" charset="0"/>
+              </a:rPr>
+              <a:t>        </a:t>
+            </a:r>
+            <a:r>
+              <a:rPr lang="ms-MY" spc="0" dirty="0">
+                <a:latin typeface="Times New Roman" panose="02020603050405020304" pitchFamily="18" charset="0"/>
+                <a:ea typeface="Times New Roman" panose="02020603050405020304" pitchFamily="18" charset="0"/>
+              </a:rPr>
+              <a:t>(ii)   </a:t>
+            </a:r>
+            <a:r>
+              <a:rPr lang="ms-MY" spc="0" dirty="0">
+                <a:effectLst/>
+                <a:latin typeface="Times New Roman" panose="02020603050405020304" pitchFamily="18" charset="0"/>
+                <a:ea typeface="Times New Roman" panose="02020603050405020304" pitchFamily="18" charset="0"/>
+              </a:rPr>
+              <a:t>The</a:t>
+            </a:r>
+            <a:r>
+              <a:rPr lang="ms-MY" spc="-25" dirty="0">
+                <a:effectLst/>
+                <a:latin typeface="Times New Roman" panose="02020603050405020304" pitchFamily="18" charset="0"/>
+                <a:ea typeface="Times New Roman" panose="02020603050405020304" pitchFamily="18" charset="0"/>
+              </a:rPr>
+              <a:t> </a:t>
+            </a:r>
+            <a:r>
+              <a:rPr lang="ms-MY" spc="0" dirty="0">
+                <a:effectLst/>
+                <a:latin typeface="Times New Roman" panose="02020603050405020304" pitchFamily="18" charset="0"/>
+                <a:ea typeface="Times New Roman" panose="02020603050405020304" pitchFamily="18" charset="0"/>
+              </a:rPr>
+              <a:t>coil</a:t>
+            </a:r>
+            <a:r>
+              <a:rPr lang="ms-MY" spc="-15" dirty="0">
+                <a:effectLst/>
+                <a:latin typeface="Times New Roman" panose="02020603050405020304" pitchFamily="18" charset="0"/>
+                <a:ea typeface="Times New Roman" panose="02020603050405020304" pitchFamily="18" charset="0"/>
+              </a:rPr>
+              <a:t> </a:t>
+            </a:r>
+            <a:r>
+              <a:rPr lang="ms-MY" spc="0" dirty="0">
+                <a:effectLst/>
+                <a:latin typeface="Times New Roman" panose="02020603050405020304" pitchFamily="18" charset="0"/>
+                <a:ea typeface="Times New Roman" panose="02020603050405020304" pitchFamily="18" charset="0"/>
+              </a:rPr>
+              <a:t>is</a:t>
+            </a:r>
+            <a:r>
+              <a:rPr lang="ms-MY" spc="-15" dirty="0">
+                <a:effectLst/>
+                <a:latin typeface="Times New Roman" panose="02020603050405020304" pitchFamily="18" charset="0"/>
+                <a:ea typeface="Times New Roman" panose="02020603050405020304" pitchFamily="18" charset="0"/>
+              </a:rPr>
+              <a:t> </a:t>
+            </a:r>
+            <a:r>
+              <a:rPr lang="ms-MY" spc="0" dirty="0">
+                <a:effectLst/>
+                <a:latin typeface="Times New Roman" panose="02020603050405020304" pitchFamily="18" charset="0"/>
+                <a:ea typeface="Times New Roman" panose="02020603050405020304" pitchFamily="18" charset="0"/>
+              </a:rPr>
+              <a:t>then</a:t>
+            </a:r>
+            <a:r>
+              <a:rPr lang="ms-MY" spc="-5" dirty="0">
+                <a:effectLst/>
+                <a:latin typeface="Times New Roman" panose="02020603050405020304" pitchFamily="18" charset="0"/>
+                <a:ea typeface="Times New Roman" panose="02020603050405020304" pitchFamily="18" charset="0"/>
+              </a:rPr>
+              <a:t> </a:t>
+            </a:r>
+            <a:r>
+              <a:rPr lang="ms-MY" spc="0" dirty="0">
+                <a:effectLst/>
+                <a:latin typeface="Times New Roman" panose="02020603050405020304" pitchFamily="18" charset="0"/>
+                <a:ea typeface="Times New Roman" panose="02020603050405020304" pitchFamily="18" charset="0"/>
+              </a:rPr>
+              <a:t>rotated</a:t>
+            </a:r>
+            <a:r>
+              <a:rPr lang="ms-MY" spc="-10" dirty="0">
+                <a:effectLst/>
+                <a:latin typeface="Times New Roman" panose="02020603050405020304" pitchFamily="18" charset="0"/>
+                <a:ea typeface="Times New Roman" panose="02020603050405020304" pitchFamily="18" charset="0"/>
+              </a:rPr>
+              <a:t> </a:t>
+            </a:r>
+            <a:r>
+              <a:rPr lang="ms-MY" spc="0" dirty="0">
+                <a:effectLst/>
+                <a:latin typeface="Times New Roman" panose="02020603050405020304" pitchFamily="18" charset="0"/>
+                <a:ea typeface="Times New Roman" panose="02020603050405020304" pitchFamily="18" charset="0"/>
+              </a:rPr>
+              <a:t>about</a:t>
+            </a:r>
+            <a:r>
+              <a:rPr lang="ms-MY" spc="-15" dirty="0">
+                <a:effectLst/>
+                <a:latin typeface="Times New Roman" panose="02020603050405020304" pitchFamily="18" charset="0"/>
+                <a:ea typeface="Times New Roman" panose="02020603050405020304" pitchFamily="18" charset="0"/>
+              </a:rPr>
+              <a:t> </a:t>
+            </a:r>
+            <a:r>
+              <a:rPr lang="ms-MY" spc="0" dirty="0">
+                <a:effectLst/>
+                <a:latin typeface="Times New Roman" panose="02020603050405020304" pitchFamily="18" charset="0"/>
+                <a:ea typeface="Times New Roman" panose="02020603050405020304" pitchFamily="18" charset="0"/>
+              </a:rPr>
+              <a:t>an</a:t>
+            </a:r>
+            <a:r>
+              <a:rPr lang="ms-MY" spc="-15" dirty="0">
+                <a:effectLst/>
+                <a:latin typeface="Times New Roman" panose="02020603050405020304" pitchFamily="18" charset="0"/>
+                <a:ea typeface="Times New Roman" panose="02020603050405020304" pitchFamily="18" charset="0"/>
+              </a:rPr>
+              <a:t> </a:t>
+            </a:r>
+            <a:r>
+              <a:rPr lang="ms-MY" spc="0" dirty="0">
+                <a:effectLst/>
+                <a:latin typeface="Times New Roman" panose="02020603050405020304" pitchFamily="18" charset="0"/>
+                <a:ea typeface="Times New Roman" panose="02020603050405020304" pitchFamily="18" charset="0"/>
+              </a:rPr>
+              <a:t>axis</a:t>
+            </a:r>
+            <a:r>
+              <a:rPr lang="ms-MY" spc="-15" dirty="0">
+                <a:effectLst/>
+                <a:latin typeface="Times New Roman" panose="02020603050405020304" pitchFamily="18" charset="0"/>
+                <a:ea typeface="Times New Roman" panose="02020603050405020304" pitchFamily="18" charset="0"/>
+              </a:rPr>
+              <a:t> </a:t>
+            </a:r>
+            <a:r>
+              <a:rPr lang="ms-MY" spc="0" dirty="0">
+                <a:effectLst/>
+                <a:latin typeface="Times New Roman" panose="02020603050405020304" pitchFamily="18" charset="0"/>
+                <a:ea typeface="Times New Roman" panose="02020603050405020304" pitchFamily="18" charset="0"/>
+              </a:rPr>
+              <a:t>of</a:t>
+            </a:r>
+            <a:r>
+              <a:rPr lang="ms-MY" spc="-5" dirty="0">
+                <a:effectLst/>
+                <a:latin typeface="Times New Roman" panose="02020603050405020304" pitchFamily="18" charset="0"/>
+                <a:ea typeface="Times New Roman" panose="02020603050405020304" pitchFamily="18" charset="0"/>
+              </a:rPr>
+              <a:t> </a:t>
+            </a:r>
+            <a:r>
+              <a:rPr lang="ms-MY" spc="0" dirty="0">
+                <a:effectLst/>
+                <a:latin typeface="Times New Roman" panose="02020603050405020304" pitchFamily="18" charset="0"/>
+                <a:ea typeface="Times New Roman" panose="02020603050405020304" pitchFamily="18" charset="0"/>
+              </a:rPr>
+              <a:t>rotation</a:t>
+            </a:r>
+            <a:r>
+              <a:rPr lang="ms-MY" spc="-15" dirty="0">
+                <a:effectLst/>
+                <a:latin typeface="Times New Roman" panose="02020603050405020304" pitchFamily="18" charset="0"/>
+                <a:ea typeface="Times New Roman" panose="02020603050405020304" pitchFamily="18" charset="0"/>
+              </a:rPr>
+              <a:t> </a:t>
+            </a:r>
+            <a:r>
+              <a:rPr lang="ms-MY" spc="0" dirty="0">
+                <a:effectLst/>
+                <a:latin typeface="Times New Roman" panose="02020603050405020304" pitchFamily="18" charset="0"/>
+                <a:ea typeface="Times New Roman" panose="02020603050405020304" pitchFamily="18" charset="0"/>
+              </a:rPr>
+              <a:t>perpendicular</a:t>
+            </a:r>
+            <a:r>
+              <a:rPr lang="ms-MY" spc="-15" dirty="0">
+                <a:effectLst/>
+                <a:latin typeface="Times New Roman" panose="02020603050405020304" pitchFamily="18" charset="0"/>
+                <a:ea typeface="Times New Roman" panose="02020603050405020304" pitchFamily="18" charset="0"/>
+              </a:rPr>
+              <a:t> </a:t>
+            </a:r>
+            <a:r>
+              <a:rPr lang="ms-MY" spc="0" dirty="0">
+                <a:effectLst/>
+                <a:latin typeface="Times New Roman" panose="02020603050405020304" pitchFamily="18" charset="0"/>
+                <a:ea typeface="Times New Roman" panose="02020603050405020304" pitchFamily="18" charset="0"/>
+              </a:rPr>
+              <a:t>to</a:t>
+            </a:r>
+            <a:r>
+              <a:rPr lang="ms-MY" spc="-15" dirty="0">
+                <a:effectLst/>
+                <a:latin typeface="Times New Roman" panose="02020603050405020304" pitchFamily="18" charset="0"/>
+                <a:ea typeface="Times New Roman" panose="02020603050405020304" pitchFamily="18" charset="0"/>
+              </a:rPr>
+              <a:t> </a:t>
+            </a:r>
+            <a:r>
+              <a:rPr lang="ms-MY" spc="0" dirty="0">
+                <a:effectLst/>
+                <a:latin typeface="Times New Roman" panose="02020603050405020304" pitchFamily="18" charset="0"/>
+                <a:ea typeface="Times New Roman" panose="02020603050405020304" pitchFamily="18" charset="0"/>
+              </a:rPr>
+              <a:t>the</a:t>
+            </a:r>
+            <a:r>
+              <a:rPr lang="ms-MY" spc="-20" dirty="0">
+                <a:effectLst/>
+                <a:latin typeface="Times New Roman" panose="02020603050405020304" pitchFamily="18" charset="0"/>
+                <a:ea typeface="Times New Roman" panose="02020603050405020304" pitchFamily="18" charset="0"/>
+              </a:rPr>
+              <a:t> </a:t>
+            </a:r>
+            <a:r>
+              <a:rPr lang="ms-MY" spc="0" dirty="0">
+                <a:effectLst/>
+                <a:latin typeface="Times New Roman" panose="02020603050405020304" pitchFamily="18" charset="0"/>
+                <a:ea typeface="Times New Roman" panose="02020603050405020304" pitchFamily="18" charset="0"/>
+              </a:rPr>
+              <a:t>uniform magnetic field at a constant speed of 10.0 revolutions per second. Calculate </a:t>
+            </a:r>
+            <a:r>
+              <a:rPr lang="ms-MY" dirty="0">
+                <a:effectLst/>
+                <a:latin typeface="Times New Roman" panose="02020603050405020304" pitchFamily="18" charset="0"/>
+                <a:ea typeface="Times New Roman" panose="02020603050405020304" pitchFamily="18" charset="0"/>
+              </a:rPr>
+              <a:t>the</a:t>
+            </a:r>
+            <a:r>
+              <a:rPr lang="ms-MY" spc="-5" dirty="0">
+                <a:effectLst/>
+                <a:latin typeface="Times New Roman" panose="02020603050405020304" pitchFamily="18" charset="0"/>
+                <a:ea typeface="Times New Roman" panose="02020603050405020304" pitchFamily="18" charset="0"/>
+              </a:rPr>
+              <a:t> </a:t>
+            </a:r>
+            <a:r>
+              <a:rPr lang="ms-MY" dirty="0">
+                <a:effectLst/>
+                <a:latin typeface="Times New Roman" panose="02020603050405020304" pitchFamily="18" charset="0"/>
+                <a:ea typeface="Times New Roman" panose="02020603050405020304" pitchFamily="18" charset="0"/>
+              </a:rPr>
+              <a:t>maximum value</a:t>
+            </a:r>
+            <a:r>
+              <a:rPr lang="ms-MY" spc="-5" dirty="0">
+                <a:effectLst/>
+                <a:latin typeface="Times New Roman" panose="02020603050405020304" pitchFamily="18" charset="0"/>
+                <a:ea typeface="Times New Roman" panose="02020603050405020304" pitchFamily="18" charset="0"/>
+              </a:rPr>
+              <a:t> </a:t>
+            </a:r>
+            <a:r>
+              <a:rPr lang="ms-MY" dirty="0">
+                <a:effectLst/>
+                <a:latin typeface="Times New Roman" panose="02020603050405020304" pitchFamily="18" charset="0"/>
+                <a:ea typeface="Times New Roman" panose="02020603050405020304" pitchFamily="18" charset="0"/>
+              </a:rPr>
+              <a:t>of</a:t>
+            </a:r>
+            <a:r>
+              <a:rPr lang="ms-MY" spc="-5" dirty="0">
+                <a:effectLst/>
+                <a:latin typeface="Times New Roman" panose="02020603050405020304" pitchFamily="18" charset="0"/>
+                <a:ea typeface="Times New Roman" panose="02020603050405020304" pitchFamily="18" charset="0"/>
+              </a:rPr>
+              <a:t> </a:t>
+            </a:r>
+            <a:r>
+              <a:rPr lang="ms-MY" dirty="0">
+                <a:effectLst/>
+                <a:latin typeface="Times New Roman" panose="02020603050405020304" pitchFamily="18" charset="0"/>
+                <a:ea typeface="Times New Roman" panose="02020603050405020304" pitchFamily="18" charset="0"/>
+              </a:rPr>
+              <a:t>the</a:t>
+            </a:r>
+            <a:r>
+              <a:rPr lang="ms-MY" spc="-10" dirty="0">
+                <a:effectLst/>
+                <a:latin typeface="Times New Roman" panose="02020603050405020304" pitchFamily="18" charset="0"/>
+                <a:ea typeface="Times New Roman" panose="02020603050405020304" pitchFamily="18" charset="0"/>
+              </a:rPr>
+              <a:t> </a:t>
+            </a:r>
+            <a:r>
+              <a:rPr lang="ms-MY" dirty="0">
+                <a:effectLst/>
+                <a:latin typeface="Times New Roman" panose="02020603050405020304" pitchFamily="18" charset="0"/>
+                <a:ea typeface="Times New Roman" panose="02020603050405020304" pitchFamily="18" charset="0"/>
+              </a:rPr>
+              <a:t>emf </a:t>
+            </a:r>
+            <a:r>
+              <a:rPr lang="ms-MY" spc="-10" dirty="0">
+                <a:effectLst/>
+                <a:latin typeface="Times New Roman" panose="02020603050405020304" pitchFamily="18" charset="0"/>
+                <a:ea typeface="Times New Roman" panose="02020603050405020304" pitchFamily="18" charset="0"/>
+              </a:rPr>
+              <a:t>induced.	</a:t>
+            </a:r>
+            <a:r>
+              <a:rPr lang="ms-MY" dirty="0">
+                <a:effectLst/>
+                <a:latin typeface="Times New Roman" panose="02020603050405020304" pitchFamily="18" charset="0"/>
+                <a:ea typeface="Times New Roman" panose="02020603050405020304" pitchFamily="18" charset="0"/>
+              </a:rPr>
+              <a:t>[3 </a:t>
+            </a:r>
+            <a:r>
+              <a:rPr lang="ms-MY" i="1" spc="-10" dirty="0">
+                <a:effectLst/>
+                <a:latin typeface="Times New Roman" panose="02020603050405020304" pitchFamily="18" charset="0"/>
+                <a:ea typeface="Times New Roman" panose="02020603050405020304" pitchFamily="18" charset="0"/>
+              </a:rPr>
+              <a:t>marks</a:t>
+            </a:r>
+            <a:r>
+              <a:rPr lang="ms-MY" spc="-10" dirty="0">
+                <a:effectLst/>
+                <a:latin typeface="Times New Roman" panose="02020603050405020304" pitchFamily="18" charset="0"/>
+                <a:ea typeface="Times New Roman" panose="02020603050405020304" pitchFamily="18" charset="0"/>
+              </a:rPr>
+              <a:t>]</a:t>
+            </a:r>
+            <a:endParaRPr lang="en-MY" dirty="0">
+              <a:effectLst/>
+              <a:latin typeface="Times New Roman" panose="02020603050405020304" pitchFamily="18" charset="0"/>
+              <a:ea typeface="Times New Roman" panose="02020603050405020304" pitchFamily="18" charset="0"/>
+            </a:endParaRPr>
+          </a:p>
+        </p:txBody>
+      </p:sp>
+      <p:sp>
+        <p:nvSpPr>
+          <p:cNvPr id="5" name="TextBox 4">
+            <a:extLst>
+              <a:ext uri="{FF2B5EF4-FFF2-40B4-BE49-F238E27FC236}">
+                <a16:creationId xmlns:a16="http://schemas.microsoft.com/office/drawing/2014/main" id="{D213A244-8FC1-696E-3135-B2EF484C62AD}"/>
+              </a:ext>
+            </a:extLst>
+          </p:cNvPr>
+          <p:cNvSpPr txBox="1"/>
+          <p:nvPr/>
+        </p:nvSpPr>
+        <p:spPr>
+          <a:xfrm>
+            <a:off x="486696" y="2070977"/>
+            <a:ext cx="10781072" cy="1656864"/>
+          </a:xfrm>
+          <a:prstGeom prst="rect">
+            <a:avLst/>
+          </a:prstGeom>
+          <a:noFill/>
+        </p:spPr>
+        <p:txBody>
+          <a:bodyPr wrap="square">
+            <a:spAutoFit/>
+          </a:bodyPr>
+          <a:lstStyle/>
+          <a:p>
+            <a:pPr lvl="0">
+              <a:spcBef>
+                <a:spcPts val="905"/>
+              </a:spcBef>
+              <a:buSzPts val="1100"/>
+              <a:tabLst>
+                <a:tab pos="950595" algn="l"/>
+              </a:tabLst>
+            </a:pPr>
+            <a:r>
+              <a:rPr lang="ms-MY" sz="1800" spc="0" dirty="0">
+                <a:effectLst/>
+                <a:latin typeface="Times New Roman" panose="02020603050405020304" pitchFamily="18" charset="0"/>
+                <a:ea typeface="Times New Roman" panose="02020603050405020304" pitchFamily="18" charset="0"/>
+              </a:rPr>
+              <a:t>(b)   A</a:t>
+            </a:r>
+            <a:r>
+              <a:rPr lang="ms-MY" sz="1800" spc="-30" dirty="0">
+                <a:effectLst/>
+                <a:latin typeface="Times New Roman" panose="02020603050405020304" pitchFamily="18" charset="0"/>
+                <a:ea typeface="Times New Roman" panose="02020603050405020304" pitchFamily="18" charset="0"/>
+              </a:rPr>
+              <a:t> </a:t>
+            </a:r>
+            <a:r>
+              <a:rPr lang="ms-MY" sz="1800" spc="0" dirty="0">
+                <a:effectLst/>
+                <a:latin typeface="Times New Roman" panose="02020603050405020304" pitchFamily="18" charset="0"/>
+                <a:ea typeface="Times New Roman" panose="02020603050405020304" pitchFamily="18" charset="0"/>
+              </a:rPr>
+              <a:t>600</a:t>
+            </a:r>
+            <a:r>
+              <a:rPr lang="ms-MY" sz="1800" spc="-20" dirty="0">
+                <a:effectLst/>
+                <a:latin typeface="Times New Roman" panose="02020603050405020304" pitchFamily="18" charset="0"/>
+                <a:ea typeface="Times New Roman" panose="02020603050405020304" pitchFamily="18" charset="0"/>
+              </a:rPr>
+              <a:t> </a:t>
+            </a:r>
+            <a:r>
+              <a:rPr lang="ms-MY" sz="1800" spc="0" dirty="0">
+                <a:effectLst/>
+                <a:latin typeface="Times New Roman" panose="02020603050405020304" pitchFamily="18" charset="0"/>
+                <a:ea typeface="Times New Roman" panose="02020603050405020304" pitchFamily="18" charset="0"/>
+              </a:rPr>
+              <a:t>turns</a:t>
+            </a:r>
+            <a:r>
+              <a:rPr lang="ms-MY" sz="1800" spc="-20" dirty="0">
+                <a:effectLst/>
+                <a:latin typeface="Times New Roman" panose="02020603050405020304" pitchFamily="18" charset="0"/>
+                <a:ea typeface="Times New Roman" panose="02020603050405020304" pitchFamily="18" charset="0"/>
+              </a:rPr>
+              <a:t> </a:t>
+            </a:r>
+            <a:r>
+              <a:rPr lang="ms-MY" sz="1800" spc="0" dirty="0">
+                <a:effectLst/>
+                <a:latin typeface="Times New Roman" panose="02020603050405020304" pitchFamily="18" charset="0"/>
+                <a:ea typeface="Times New Roman" panose="02020603050405020304" pitchFamily="18" charset="0"/>
+              </a:rPr>
+              <a:t>solenoid</a:t>
+            </a:r>
+            <a:r>
+              <a:rPr lang="ms-MY" sz="1800" spc="-30" dirty="0">
+                <a:effectLst/>
+                <a:latin typeface="Times New Roman" panose="02020603050405020304" pitchFamily="18" charset="0"/>
+                <a:ea typeface="Times New Roman" panose="02020603050405020304" pitchFamily="18" charset="0"/>
+              </a:rPr>
+              <a:t> </a:t>
+            </a:r>
+            <a:r>
+              <a:rPr lang="ms-MY" sz="1800" spc="0" dirty="0">
+                <a:effectLst/>
+                <a:latin typeface="Times New Roman" panose="02020603050405020304" pitchFamily="18" charset="0"/>
+                <a:ea typeface="Times New Roman" panose="02020603050405020304" pitchFamily="18" charset="0"/>
+              </a:rPr>
+              <a:t>is</a:t>
+            </a:r>
+            <a:r>
+              <a:rPr lang="ms-MY" sz="1800" spc="-30" dirty="0">
+                <a:effectLst/>
+                <a:latin typeface="Times New Roman" panose="02020603050405020304" pitchFamily="18" charset="0"/>
+                <a:ea typeface="Times New Roman" panose="02020603050405020304" pitchFamily="18" charset="0"/>
+              </a:rPr>
+              <a:t> </a:t>
+            </a:r>
+            <a:r>
+              <a:rPr lang="ms-MY" sz="1800" spc="0" dirty="0">
+                <a:effectLst/>
+                <a:latin typeface="Times New Roman" panose="02020603050405020304" pitchFamily="18" charset="0"/>
+                <a:ea typeface="Times New Roman" panose="02020603050405020304" pitchFamily="18" charset="0"/>
+              </a:rPr>
+              <a:t>0.01</a:t>
+            </a:r>
+            <a:r>
+              <a:rPr lang="ms-MY" sz="1800" spc="-20" dirty="0">
+                <a:effectLst/>
+                <a:latin typeface="Times New Roman" panose="02020603050405020304" pitchFamily="18" charset="0"/>
+                <a:ea typeface="Times New Roman" panose="02020603050405020304" pitchFamily="18" charset="0"/>
+              </a:rPr>
+              <a:t> </a:t>
+            </a:r>
+            <a:r>
+              <a:rPr lang="ms-MY" sz="1800" spc="0" dirty="0">
+                <a:effectLst/>
+                <a:latin typeface="Times New Roman" panose="02020603050405020304" pitchFamily="18" charset="0"/>
+                <a:ea typeface="Times New Roman" panose="02020603050405020304" pitchFamily="18" charset="0"/>
+              </a:rPr>
+              <a:t>m</a:t>
+            </a:r>
+            <a:r>
+              <a:rPr lang="ms-MY" sz="1800" spc="-15" dirty="0">
+                <a:effectLst/>
+                <a:latin typeface="Times New Roman" panose="02020603050405020304" pitchFamily="18" charset="0"/>
+                <a:ea typeface="Times New Roman" panose="02020603050405020304" pitchFamily="18" charset="0"/>
+              </a:rPr>
+              <a:t> </a:t>
+            </a:r>
+            <a:r>
+              <a:rPr lang="ms-MY" sz="1800" spc="0" dirty="0">
+                <a:effectLst/>
+                <a:latin typeface="Times New Roman" panose="02020603050405020304" pitchFamily="18" charset="0"/>
+                <a:ea typeface="Times New Roman" panose="02020603050405020304" pitchFamily="18" charset="0"/>
+              </a:rPr>
+              <a:t>long.</a:t>
+            </a:r>
+            <a:r>
+              <a:rPr lang="ms-MY" sz="1800" spc="-30" dirty="0">
+                <a:effectLst/>
+                <a:latin typeface="Times New Roman" panose="02020603050405020304" pitchFamily="18" charset="0"/>
+                <a:ea typeface="Times New Roman" panose="02020603050405020304" pitchFamily="18" charset="0"/>
+              </a:rPr>
+              <a:t> </a:t>
+            </a:r>
+            <a:r>
+              <a:rPr lang="ms-MY" sz="1800" spc="0" dirty="0">
+                <a:effectLst/>
+                <a:latin typeface="Times New Roman" panose="02020603050405020304" pitchFamily="18" charset="0"/>
+                <a:ea typeface="Times New Roman" panose="02020603050405020304" pitchFamily="18" charset="0"/>
+              </a:rPr>
+              <a:t>When</a:t>
+            </a:r>
+            <a:r>
+              <a:rPr lang="ms-MY" sz="1800" spc="-20" dirty="0">
+                <a:effectLst/>
+                <a:latin typeface="Times New Roman" panose="02020603050405020304" pitchFamily="18" charset="0"/>
+                <a:ea typeface="Times New Roman" panose="02020603050405020304" pitchFamily="18" charset="0"/>
+              </a:rPr>
+              <a:t> </a:t>
+            </a:r>
+            <a:r>
+              <a:rPr lang="ms-MY" sz="1800" spc="0" dirty="0">
+                <a:effectLst/>
+                <a:latin typeface="Times New Roman" panose="02020603050405020304" pitchFamily="18" charset="0"/>
+                <a:ea typeface="Times New Roman" panose="02020603050405020304" pitchFamily="18" charset="0"/>
+              </a:rPr>
+              <a:t>the</a:t>
+            </a:r>
+            <a:r>
+              <a:rPr lang="ms-MY" sz="1800" spc="-20" dirty="0">
+                <a:effectLst/>
+                <a:latin typeface="Times New Roman" panose="02020603050405020304" pitchFamily="18" charset="0"/>
+                <a:ea typeface="Times New Roman" panose="02020603050405020304" pitchFamily="18" charset="0"/>
+              </a:rPr>
+              <a:t> </a:t>
+            </a:r>
+            <a:r>
+              <a:rPr lang="ms-MY" sz="1800" spc="0" dirty="0">
+                <a:effectLst/>
+                <a:latin typeface="Times New Roman" panose="02020603050405020304" pitchFamily="18" charset="0"/>
+                <a:ea typeface="Times New Roman" panose="02020603050405020304" pitchFamily="18" charset="0"/>
+              </a:rPr>
+              <a:t>current</a:t>
+            </a:r>
+            <a:r>
+              <a:rPr lang="ms-MY" sz="1800" spc="-15" dirty="0">
+                <a:effectLst/>
+                <a:latin typeface="Times New Roman" panose="02020603050405020304" pitchFamily="18" charset="0"/>
+                <a:ea typeface="Times New Roman" panose="02020603050405020304" pitchFamily="18" charset="0"/>
+              </a:rPr>
+              <a:t> </a:t>
+            </a:r>
+            <a:r>
+              <a:rPr lang="ms-MY" sz="1800" spc="0" dirty="0">
+                <a:effectLst/>
+                <a:latin typeface="Times New Roman" panose="02020603050405020304" pitchFamily="18" charset="0"/>
+                <a:ea typeface="Times New Roman" panose="02020603050405020304" pitchFamily="18" charset="0"/>
+              </a:rPr>
+              <a:t>is</a:t>
+            </a:r>
+            <a:r>
+              <a:rPr lang="ms-MY" sz="1800" spc="-15" dirty="0">
+                <a:effectLst/>
+                <a:latin typeface="Times New Roman" panose="02020603050405020304" pitchFamily="18" charset="0"/>
+                <a:ea typeface="Times New Roman" panose="02020603050405020304" pitchFamily="18" charset="0"/>
+              </a:rPr>
+              <a:t> </a:t>
+            </a:r>
+            <a:r>
+              <a:rPr lang="ms-MY" sz="1800" spc="0" dirty="0">
+                <a:effectLst/>
+                <a:latin typeface="Times New Roman" panose="02020603050405020304" pitchFamily="18" charset="0"/>
+                <a:ea typeface="Times New Roman" panose="02020603050405020304" pitchFamily="18" charset="0"/>
+              </a:rPr>
+              <a:t>decreased</a:t>
+            </a:r>
+            <a:r>
+              <a:rPr lang="ms-MY" sz="1800" spc="-20" dirty="0">
+                <a:effectLst/>
+                <a:latin typeface="Times New Roman" panose="02020603050405020304" pitchFamily="18" charset="0"/>
+                <a:ea typeface="Times New Roman" panose="02020603050405020304" pitchFamily="18" charset="0"/>
+              </a:rPr>
+              <a:t> </a:t>
+            </a:r>
+            <a:r>
+              <a:rPr lang="ms-MY" sz="1800" spc="0" dirty="0">
+                <a:effectLst/>
+                <a:latin typeface="Times New Roman" panose="02020603050405020304" pitchFamily="18" charset="0"/>
+                <a:ea typeface="Times New Roman" panose="02020603050405020304" pitchFamily="18" charset="0"/>
+              </a:rPr>
+              <a:t>from</a:t>
+            </a:r>
+            <a:r>
+              <a:rPr lang="ms-MY" sz="1800" spc="-15" dirty="0">
+                <a:effectLst/>
+                <a:latin typeface="Times New Roman" panose="02020603050405020304" pitchFamily="18" charset="0"/>
+                <a:ea typeface="Times New Roman" panose="02020603050405020304" pitchFamily="18" charset="0"/>
+              </a:rPr>
+              <a:t> </a:t>
+            </a:r>
+            <a:r>
+              <a:rPr lang="ms-MY" sz="1800" spc="0" dirty="0">
+                <a:effectLst/>
+                <a:latin typeface="Times New Roman" panose="02020603050405020304" pitchFamily="18" charset="0"/>
+                <a:ea typeface="Times New Roman" panose="02020603050405020304" pitchFamily="18" charset="0"/>
+              </a:rPr>
+              <a:t>3</a:t>
+            </a:r>
+            <a:r>
+              <a:rPr lang="ms-MY" sz="1800" spc="-20" dirty="0">
+                <a:effectLst/>
+                <a:latin typeface="Times New Roman" panose="02020603050405020304" pitchFamily="18" charset="0"/>
+                <a:ea typeface="Times New Roman" panose="02020603050405020304" pitchFamily="18" charset="0"/>
+              </a:rPr>
+              <a:t> </a:t>
+            </a:r>
+            <a:r>
+              <a:rPr lang="ms-MY" sz="1800" spc="0" dirty="0">
+                <a:effectLst/>
+                <a:latin typeface="Times New Roman" panose="02020603050405020304" pitchFamily="18" charset="0"/>
+                <a:ea typeface="Times New Roman" panose="02020603050405020304" pitchFamily="18" charset="0"/>
+              </a:rPr>
+              <a:t>to</a:t>
+            </a:r>
+            <a:r>
+              <a:rPr lang="ms-MY" sz="1800" spc="-15" dirty="0">
+                <a:effectLst/>
+                <a:latin typeface="Times New Roman" panose="02020603050405020304" pitchFamily="18" charset="0"/>
+                <a:ea typeface="Times New Roman" panose="02020603050405020304" pitchFamily="18" charset="0"/>
+              </a:rPr>
+              <a:t> </a:t>
+            </a:r>
+            <a:r>
+              <a:rPr lang="ms-MY" sz="1800" spc="0" dirty="0">
+                <a:effectLst/>
+                <a:latin typeface="Times New Roman" panose="02020603050405020304" pitchFamily="18" charset="0"/>
+                <a:ea typeface="Times New Roman" panose="02020603050405020304" pitchFamily="18" charset="0"/>
+              </a:rPr>
+              <a:t>0</a:t>
+            </a:r>
+            <a:r>
+              <a:rPr lang="ms-MY" sz="1800" spc="-20" dirty="0">
+                <a:effectLst/>
+                <a:latin typeface="Times New Roman" panose="02020603050405020304" pitchFamily="18" charset="0"/>
+                <a:ea typeface="Times New Roman" panose="02020603050405020304" pitchFamily="18" charset="0"/>
+              </a:rPr>
+              <a:t> </a:t>
+            </a:r>
+            <a:r>
+              <a:rPr lang="ms-MY" sz="1800" spc="0" dirty="0">
+                <a:effectLst/>
+                <a:latin typeface="Times New Roman" panose="02020603050405020304" pitchFamily="18" charset="0"/>
+                <a:ea typeface="Times New Roman" panose="02020603050405020304" pitchFamily="18" charset="0"/>
+              </a:rPr>
+              <a:t>A</a:t>
+            </a:r>
+            <a:r>
+              <a:rPr lang="ms-MY" sz="1800" spc="-15" dirty="0">
+                <a:effectLst/>
+                <a:latin typeface="Times New Roman" panose="02020603050405020304" pitchFamily="18" charset="0"/>
+                <a:ea typeface="Times New Roman" panose="02020603050405020304" pitchFamily="18" charset="0"/>
+              </a:rPr>
+              <a:t> </a:t>
+            </a:r>
+            <a:r>
+              <a:rPr lang="ms-MY" sz="1800" spc="-25" dirty="0">
+                <a:effectLst/>
+                <a:latin typeface="Times New Roman" panose="02020603050405020304" pitchFamily="18" charset="0"/>
+                <a:ea typeface="Times New Roman" panose="02020603050405020304" pitchFamily="18" charset="0"/>
+              </a:rPr>
+              <a:t>in </a:t>
+            </a:r>
+            <a:r>
+              <a:rPr lang="ms-MY" sz="1800" dirty="0">
+                <a:effectLst/>
+                <a:latin typeface="Times New Roman" panose="02020603050405020304" pitchFamily="18" charset="0"/>
+                <a:ea typeface="Times New Roman" panose="02020603050405020304" pitchFamily="18" charset="0"/>
+              </a:rPr>
+              <a:t>0.4</a:t>
+            </a:r>
+            <a:r>
+              <a:rPr lang="ms-MY" sz="1800" spc="-5" dirty="0">
+                <a:effectLst/>
+                <a:latin typeface="Times New Roman" panose="02020603050405020304" pitchFamily="18" charset="0"/>
+                <a:ea typeface="Times New Roman" panose="02020603050405020304" pitchFamily="18" charset="0"/>
+              </a:rPr>
+              <a:t> </a:t>
+            </a:r>
+            <a:r>
+              <a:rPr lang="ms-MY" sz="1800" dirty="0">
+                <a:effectLst/>
+                <a:latin typeface="Times New Roman" panose="02020603050405020304" pitchFamily="18" charset="0"/>
+                <a:ea typeface="Times New Roman" panose="02020603050405020304" pitchFamily="18" charset="0"/>
+              </a:rPr>
+              <a:t>s,</a:t>
+            </a:r>
+            <a:r>
+              <a:rPr lang="ms-MY" sz="1800" spc="-5" dirty="0">
+                <a:effectLst/>
+                <a:latin typeface="Times New Roman" panose="02020603050405020304" pitchFamily="18" charset="0"/>
+                <a:ea typeface="Times New Roman" panose="02020603050405020304" pitchFamily="18" charset="0"/>
+              </a:rPr>
+              <a:t> </a:t>
+            </a:r>
+            <a:r>
+              <a:rPr lang="ms-MY" sz="1800" dirty="0">
+                <a:effectLst/>
+                <a:latin typeface="Times New Roman" panose="02020603050405020304" pitchFamily="18" charset="0"/>
+                <a:ea typeface="Times New Roman" panose="02020603050405020304" pitchFamily="18" charset="0"/>
+              </a:rPr>
+              <a:t>the</a:t>
+            </a:r>
+            <a:r>
+              <a:rPr lang="ms-MY" sz="1800" spc="-5" dirty="0">
+                <a:effectLst/>
+                <a:latin typeface="Times New Roman" panose="02020603050405020304" pitchFamily="18" charset="0"/>
+                <a:ea typeface="Times New Roman" panose="02020603050405020304" pitchFamily="18" charset="0"/>
+              </a:rPr>
+              <a:t> </a:t>
+            </a:r>
+            <a:r>
+              <a:rPr lang="ms-MY" sz="1800" dirty="0">
+                <a:effectLst/>
+                <a:latin typeface="Times New Roman" panose="02020603050405020304" pitchFamily="18" charset="0"/>
+                <a:ea typeface="Times New Roman" panose="02020603050405020304" pitchFamily="18" charset="0"/>
+              </a:rPr>
+              <a:t>induced</a:t>
+            </a:r>
+            <a:r>
+              <a:rPr lang="ms-MY" sz="1800" spc="-5" dirty="0">
+                <a:effectLst/>
+                <a:latin typeface="Times New Roman" panose="02020603050405020304" pitchFamily="18" charset="0"/>
+                <a:ea typeface="Times New Roman" panose="02020603050405020304" pitchFamily="18" charset="0"/>
+              </a:rPr>
+              <a:t> </a:t>
+            </a:r>
+            <a:r>
+              <a:rPr lang="ms-MY" sz="1800" dirty="0">
+                <a:effectLst/>
+                <a:latin typeface="Times New Roman" panose="02020603050405020304" pitchFamily="18" charset="0"/>
+                <a:ea typeface="Times New Roman" panose="02020603050405020304" pitchFamily="18" charset="0"/>
+              </a:rPr>
+              <a:t>emf is</a:t>
+            </a:r>
+            <a:r>
+              <a:rPr lang="ms-MY" sz="1800" spc="5" dirty="0">
+                <a:effectLst/>
+                <a:latin typeface="Times New Roman" panose="02020603050405020304" pitchFamily="18" charset="0"/>
+                <a:ea typeface="Times New Roman" panose="02020603050405020304" pitchFamily="18" charset="0"/>
+              </a:rPr>
+              <a:t> </a:t>
+            </a:r>
+            <a:r>
+              <a:rPr lang="ms-MY" sz="1800" dirty="0">
+                <a:effectLst/>
+                <a:latin typeface="Times New Roman" panose="02020603050405020304" pitchFamily="18" charset="0"/>
+                <a:ea typeface="Times New Roman" panose="02020603050405020304" pitchFamily="18" charset="0"/>
+              </a:rPr>
+              <a:t>0.015 V.</a:t>
+            </a:r>
+            <a:r>
+              <a:rPr lang="ms-MY" sz="1800" spc="-5" dirty="0">
+                <a:effectLst/>
+                <a:latin typeface="Times New Roman" panose="02020603050405020304" pitchFamily="18" charset="0"/>
+                <a:ea typeface="Times New Roman" panose="02020603050405020304" pitchFamily="18" charset="0"/>
+              </a:rPr>
+              <a:t> </a:t>
+            </a:r>
+            <a:r>
+              <a:rPr lang="ms-MY" sz="1800" dirty="0">
+                <a:effectLst/>
+                <a:latin typeface="Times New Roman" panose="02020603050405020304" pitchFamily="18" charset="0"/>
+                <a:ea typeface="Times New Roman" panose="02020603050405020304" pitchFamily="18" charset="0"/>
+              </a:rPr>
+              <a:t>Calculate </a:t>
+            </a:r>
+            <a:r>
+              <a:rPr lang="ms-MY" sz="1800" spc="-25" dirty="0">
+                <a:effectLst/>
+                <a:latin typeface="Times New Roman" panose="02020603050405020304" pitchFamily="18" charset="0"/>
+                <a:ea typeface="Times New Roman" panose="02020603050405020304" pitchFamily="18" charset="0"/>
+              </a:rPr>
+              <a:t>the </a:t>
+            </a:r>
+            <a:endParaRPr lang="en-MY" dirty="0">
+              <a:effectLst/>
+            </a:endParaRPr>
+          </a:p>
+          <a:p>
+            <a:pPr>
+              <a:spcBef>
+                <a:spcPts val="200"/>
+              </a:spcBef>
+              <a:buSzPts val="1200"/>
+              <a:tabLst>
+                <a:tab pos="1316355" algn="l"/>
+              </a:tabLst>
+            </a:pPr>
+            <a:r>
+              <a:rPr lang="ms-MY" sz="1800" spc="-10" dirty="0">
+                <a:effectLst/>
+                <a:latin typeface="Times New Roman" panose="02020603050405020304" pitchFamily="18" charset="0"/>
+                <a:ea typeface="Times New Roman" panose="02020603050405020304" pitchFamily="18" charset="0"/>
+              </a:rPr>
+              <a:t>(i)   self-inductance.									</a:t>
+            </a:r>
+            <a:r>
+              <a:rPr lang="ms-MY" sz="1600" dirty="0">
+                <a:effectLst/>
+                <a:latin typeface="Times New Roman" panose="02020603050405020304" pitchFamily="18" charset="0"/>
+                <a:ea typeface="Times New Roman" panose="02020603050405020304" pitchFamily="18" charset="0"/>
+              </a:rPr>
+              <a:t>[2 </a:t>
+            </a:r>
+            <a:r>
+              <a:rPr lang="ms-MY" sz="1600" i="1" spc="-10" dirty="0">
+                <a:effectLst/>
+                <a:latin typeface="Times New Roman" panose="02020603050405020304" pitchFamily="18" charset="0"/>
+                <a:ea typeface="Times New Roman" panose="02020603050405020304" pitchFamily="18" charset="0"/>
+              </a:rPr>
+              <a:t>marks</a:t>
+            </a:r>
+            <a:r>
+              <a:rPr lang="ms-MY" sz="1600" spc="-10" dirty="0">
+                <a:effectLst/>
+                <a:latin typeface="Times New Roman" panose="02020603050405020304" pitchFamily="18" charset="0"/>
+                <a:ea typeface="Times New Roman" panose="02020603050405020304" pitchFamily="18" charset="0"/>
+              </a:rPr>
+              <a:t>]</a:t>
+            </a:r>
+            <a:endParaRPr lang="en-MY" sz="1600" spc="0" dirty="0">
+              <a:effectLst/>
+              <a:latin typeface="Times New Roman" panose="02020603050405020304" pitchFamily="18" charset="0"/>
+              <a:ea typeface="Times New Roman" panose="02020603050405020304" pitchFamily="18" charset="0"/>
+            </a:endParaRPr>
+          </a:p>
+          <a:p>
+            <a:pPr>
+              <a:spcBef>
+                <a:spcPts val="600"/>
+              </a:spcBef>
+              <a:buSzPts val="1200"/>
+              <a:tabLst>
+                <a:tab pos="1316355" algn="l"/>
+              </a:tabLst>
+            </a:pPr>
+            <a:r>
+              <a:rPr lang="ms-MY" sz="1800" spc="0" dirty="0">
+                <a:effectLst/>
+                <a:latin typeface="Times New Roman" panose="02020603050405020304" pitchFamily="18" charset="0"/>
+                <a:ea typeface="Times New Roman" panose="02020603050405020304" pitchFamily="18" charset="0"/>
+              </a:rPr>
+              <a:t>(ii)  cross-sectional</a:t>
+            </a:r>
+            <a:r>
+              <a:rPr lang="ms-MY" sz="1800" spc="-15" dirty="0">
+                <a:effectLst/>
+                <a:latin typeface="Times New Roman" panose="02020603050405020304" pitchFamily="18" charset="0"/>
+                <a:ea typeface="Times New Roman" panose="02020603050405020304" pitchFamily="18" charset="0"/>
+              </a:rPr>
+              <a:t> </a:t>
+            </a:r>
+            <a:r>
+              <a:rPr lang="ms-MY" sz="1800" spc="0" dirty="0">
+                <a:effectLst/>
+                <a:latin typeface="Times New Roman" panose="02020603050405020304" pitchFamily="18" charset="0"/>
+                <a:ea typeface="Times New Roman" panose="02020603050405020304" pitchFamily="18" charset="0"/>
+              </a:rPr>
+              <a:t>area</a:t>
+            </a:r>
+            <a:r>
+              <a:rPr lang="ms-MY" sz="1800" spc="-10" dirty="0">
+                <a:effectLst/>
+                <a:latin typeface="Times New Roman" panose="02020603050405020304" pitchFamily="18" charset="0"/>
+                <a:ea typeface="Times New Roman" panose="02020603050405020304" pitchFamily="18" charset="0"/>
+              </a:rPr>
+              <a:t> </a:t>
+            </a:r>
+            <a:r>
+              <a:rPr lang="ms-MY" sz="1800" spc="0" dirty="0">
+                <a:effectLst/>
+                <a:latin typeface="Times New Roman" panose="02020603050405020304" pitchFamily="18" charset="0"/>
+                <a:ea typeface="Times New Roman" panose="02020603050405020304" pitchFamily="18" charset="0"/>
+              </a:rPr>
+              <a:t>of</a:t>
+            </a:r>
+            <a:r>
+              <a:rPr lang="ms-MY" sz="1800" spc="-5" dirty="0">
+                <a:effectLst/>
+                <a:latin typeface="Times New Roman" panose="02020603050405020304" pitchFamily="18" charset="0"/>
+                <a:ea typeface="Times New Roman" panose="02020603050405020304" pitchFamily="18" charset="0"/>
+              </a:rPr>
+              <a:t> </a:t>
+            </a:r>
+            <a:r>
+              <a:rPr lang="ms-MY" sz="1800" spc="0" dirty="0">
+                <a:effectLst/>
+                <a:latin typeface="Times New Roman" panose="02020603050405020304" pitchFamily="18" charset="0"/>
+                <a:ea typeface="Times New Roman" panose="02020603050405020304" pitchFamily="18" charset="0"/>
+              </a:rPr>
+              <a:t>the</a:t>
+            </a:r>
+            <a:r>
+              <a:rPr lang="ms-MY" sz="1800" spc="-5" dirty="0">
+                <a:effectLst/>
+                <a:latin typeface="Times New Roman" panose="02020603050405020304" pitchFamily="18" charset="0"/>
+                <a:ea typeface="Times New Roman" panose="02020603050405020304" pitchFamily="18" charset="0"/>
+              </a:rPr>
+              <a:t> </a:t>
+            </a:r>
+            <a:r>
+              <a:rPr lang="ms-MY" sz="1800" spc="-10" dirty="0">
+                <a:effectLst/>
+                <a:latin typeface="Times New Roman" panose="02020603050405020304" pitchFamily="18" charset="0"/>
+                <a:ea typeface="Times New Roman" panose="02020603050405020304" pitchFamily="18" charset="0"/>
+              </a:rPr>
+              <a:t>solenoid.							</a:t>
+            </a:r>
+            <a:r>
+              <a:rPr lang="ms-MY" sz="1600" dirty="0">
+                <a:effectLst/>
+                <a:latin typeface="Times New Roman" panose="02020603050405020304" pitchFamily="18" charset="0"/>
+                <a:ea typeface="Times New Roman" panose="02020603050405020304" pitchFamily="18" charset="0"/>
+              </a:rPr>
+              <a:t>[2 </a:t>
+            </a:r>
+            <a:r>
+              <a:rPr lang="ms-MY" sz="1600" i="1" spc="-10" dirty="0">
+                <a:effectLst/>
+                <a:latin typeface="Times New Roman" panose="02020603050405020304" pitchFamily="18" charset="0"/>
+                <a:ea typeface="Times New Roman" panose="02020603050405020304" pitchFamily="18" charset="0"/>
+              </a:rPr>
+              <a:t>marks</a:t>
+            </a:r>
+            <a:r>
+              <a:rPr lang="ms-MY" sz="1600" spc="-10" dirty="0">
+                <a:effectLst/>
+                <a:latin typeface="Times New Roman" panose="02020603050405020304" pitchFamily="18" charset="0"/>
+                <a:ea typeface="Times New Roman" panose="02020603050405020304" pitchFamily="18" charset="0"/>
+              </a:rPr>
+              <a:t>]</a:t>
+            </a:r>
+            <a:endParaRPr lang="en-MY" sz="1600" spc="0" dirty="0">
+              <a:effectLst/>
+              <a:latin typeface="Times New Roman" panose="02020603050405020304" pitchFamily="18" charset="0"/>
+              <a:ea typeface="Times New Roman" panose="02020603050405020304" pitchFamily="18" charset="0"/>
+            </a:endParaRPr>
+          </a:p>
+          <a:p>
+            <a:pPr>
+              <a:spcBef>
+                <a:spcPts val="600"/>
+              </a:spcBef>
+              <a:buSzPts val="1200"/>
+              <a:tabLst>
+                <a:tab pos="1316355" algn="l"/>
+              </a:tabLst>
+            </a:pPr>
+            <a:r>
+              <a:rPr lang="ms-MY" dirty="0">
+                <a:latin typeface="Times New Roman" panose="02020603050405020304" pitchFamily="18" charset="0"/>
+                <a:ea typeface="Times New Roman" panose="02020603050405020304" pitchFamily="18" charset="0"/>
+              </a:rPr>
+              <a:t>(iii) </a:t>
+            </a:r>
+            <a:r>
+              <a:rPr lang="ms-MY" sz="1800" spc="0" dirty="0">
+                <a:effectLst/>
+                <a:latin typeface="Times New Roman" panose="02020603050405020304" pitchFamily="18" charset="0"/>
+                <a:ea typeface="Times New Roman" panose="02020603050405020304" pitchFamily="18" charset="0"/>
+              </a:rPr>
+              <a:t>magnetic</a:t>
+            </a:r>
+            <a:r>
+              <a:rPr lang="ms-MY" sz="1800" spc="-10" dirty="0">
+                <a:effectLst/>
+                <a:latin typeface="Times New Roman" panose="02020603050405020304" pitchFamily="18" charset="0"/>
+                <a:ea typeface="Times New Roman" panose="02020603050405020304" pitchFamily="18" charset="0"/>
+              </a:rPr>
+              <a:t> </a:t>
+            </a:r>
+            <a:r>
+              <a:rPr lang="ms-MY" sz="1800" spc="0" dirty="0">
+                <a:effectLst/>
+                <a:latin typeface="Times New Roman" panose="02020603050405020304" pitchFamily="18" charset="0"/>
+                <a:ea typeface="Times New Roman" panose="02020603050405020304" pitchFamily="18" charset="0"/>
+              </a:rPr>
+              <a:t>flux linkage passing</a:t>
+            </a:r>
+            <a:r>
+              <a:rPr lang="ms-MY" sz="1800" spc="-5" dirty="0">
+                <a:effectLst/>
+                <a:latin typeface="Times New Roman" panose="02020603050405020304" pitchFamily="18" charset="0"/>
+                <a:ea typeface="Times New Roman" panose="02020603050405020304" pitchFamily="18" charset="0"/>
+              </a:rPr>
+              <a:t> </a:t>
+            </a:r>
+            <a:r>
+              <a:rPr lang="ms-MY" sz="1800" spc="0" dirty="0">
+                <a:effectLst/>
+                <a:latin typeface="Times New Roman" panose="02020603050405020304" pitchFamily="18" charset="0"/>
+                <a:ea typeface="Times New Roman" panose="02020603050405020304" pitchFamily="18" charset="0"/>
+              </a:rPr>
+              <a:t>through the</a:t>
+            </a:r>
+            <a:r>
+              <a:rPr lang="ms-MY" sz="1800" spc="-5" dirty="0">
+                <a:effectLst/>
+                <a:latin typeface="Times New Roman" panose="02020603050405020304" pitchFamily="18" charset="0"/>
+                <a:ea typeface="Times New Roman" panose="02020603050405020304" pitchFamily="18" charset="0"/>
+              </a:rPr>
+              <a:t> </a:t>
+            </a:r>
+            <a:r>
+              <a:rPr lang="ms-MY" sz="1800" spc="-10" dirty="0">
+                <a:effectLst/>
+                <a:latin typeface="Times New Roman" panose="02020603050405020304" pitchFamily="18" charset="0"/>
+                <a:ea typeface="Times New Roman" panose="02020603050405020304" pitchFamily="18" charset="0"/>
+              </a:rPr>
+              <a:t>solenoid when the current is 3A.			</a:t>
+            </a:r>
+            <a:r>
+              <a:rPr lang="ms-MY" sz="1600" dirty="0">
+                <a:effectLst/>
+                <a:latin typeface="Times New Roman" panose="02020603050405020304" pitchFamily="18" charset="0"/>
+                <a:ea typeface="Times New Roman" panose="02020603050405020304" pitchFamily="18" charset="0"/>
+              </a:rPr>
+              <a:t>[1 </a:t>
+            </a:r>
+            <a:r>
+              <a:rPr lang="ms-MY" sz="1600" i="1" spc="-10" dirty="0">
+                <a:effectLst/>
+                <a:latin typeface="Times New Roman" panose="02020603050405020304" pitchFamily="18" charset="0"/>
+                <a:ea typeface="Times New Roman" panose="02020603050405020304" pitchFamily="18" charset="0"/>
+              </a:rPr>
+              <a:t>marks</a:t>
+            </a:r>
+            <a:r>
+              <a:rPr lang="ms-MY" sz="1600" spc="-10" dirty="0">
+                <a:effectLst/>
+                <a:latin typeface="Times New Roman" panose="02020603050405020304" pitchFamily="18" charset="0"/>
+                <a:ea typeface="Times New Roman" panose="02020603050405020304" pitchFamily="18" charset="0"/>
+              </a:rPr>
+              <a:t>]</a:t>
+            </a:r>
+            <a:endParaRPr lang="en-MY" sz="1600" spc="0" dirty="0">
+              <a:effectLst/>
+              <a:latin typeface="Times New Roman" panose="02020603050405020304" pitchFamily="18" charset="0"/>
+              <a:ea typeface="Times New Roman" panose="02020603050405020304" pitchFamily="18" charset="0"/>
+            </a:endParaRPr>
+          </a:p>
+        </p:txBody>
+      </p:sp>
+      <p:pic>
+        <p:nvPicPr>
+          <p:cNvPr id="7" name="Picture 6">
+            <a:extLst>
+              <a:ext uri="{FF2B5EF4-FFF2-40B4-BE49-F238E27FC236}">
+                <a16:creationId xmlns:a16="http://schemas.microsoft.com/office/drawing/2014/main" id="{A277D542-AD5B-DADF-0519-DE1CD62A762D}"/>
+              </a:ext>
+            </a:extLst>
+          </p:cNvPr>
+          <p:cNvPicPr>
+            <a:picLocks noChangeAspect="1"/>
+          </p:cNvPicPr>
+          <p:nvPr/>
+        </p:nvPicPr>
+        <p:blipFill>
+          <a:blip r:embed="rId2"/>
+          <a:stretch>
+            <a:fillRect/>
+          </a:stretch>
+        </p:blipFill>
+        <p:spPr>
+          <a:xfrm>
+            <a:off x="8760788" y="5287547"/>
+            <a:ext cx="3077004" cy="1181265"/>
+          </a:xfrm>
+          <a:prstGeom prst="rect">
+            <a:avLst/>
+          </a:prstGeom>
+        </p:spPr>
+      </p:pic>
+    </p:spTree>
+    <p:extLst>
+      <p:ext uri="{BB962C8B-B14F-4D97-AF65-F5344CB8AC3E}">
+        <p14:creationId xmlns:p14="http://schemas.microsoft.com/office/powerpoint/2010/main" val="2787381884"/>
+      </p:ext>
+    </p:extLst>
+  </p:cSld>
+  <p:clrMapOvr>
+    <a:masterClrMapping/>
+  </p:clrMapOvr>
+</p:sld>
+</file>
+
+<file path=ppt/slides/slide5.xml><?xml version="1.0" encoding="utf-8"?>
+<p:sld xmlns:a="http://schemas.openxmlformats.org/drawingml/2006/main" xmlns:r="http://schemas.openxmlformats.org/officeDocument/2006/relationships" xmlns:p="http://schemas.openxmlformats.org/presentationml/2006/main">
+  <p:cSld>
+    <p:spTree>
+      <p:nvGrpSpPr>
+        <p:cNvPr id="1" name=""/>
+        <p:cNvGrpSpPr/>
+        <p:nvPr/>
+      </p:nvGrpSpPr>
+      <p:grpSpPr>
+        <a:xfrm>
+          <a:off x="0" y="0"/>
+          <a:ext cx="0" cy="0"/>
+          <a:chOff x="0" y="0"/>
+          <a:chExt cx="0" cy="0"/>
+        </a:xfrm>
+      </p:grpSpPr>
+      <p:sp>
+        <p:nvSpPr>
+          <p:cNvPr id="3" name="TextBox 2">
+            <a:extLst>
+              <a:ext uri="{FF2B5EF4-FFF2-40B4-BE49-F238E27FC236}">
+                <a16:creationId xmlns:a16="http://schemas.microsoft.com/office/drawing/2014/main" id="{66776691-198A-4219-6C06-0E96023B5258}"/>
+              </a:ext>
+            </a:extLst>
+          </p:cNvPr>
+          <p:cNvSpPr txBox="1"/>
+          <p:nvPr/>
+        </p:nvSpPr>
+        <p:spPr>
+          <a:xfrm>
+            <a:off x="522027" y="219460"/>
+            <a:ext cx="10696434" cy="1200329"/>
+          </a:xfrm>
+          <a:prstGeom prst="rect">
+            <a:avLst/>
+          </a:prstGeom>
+          <a:noFill/>
+        </p:spPr>
+        <p:txBody>
+          <a:bodyPr wrap="square">
+            <a:spAutoFit/>
+          </a:bodyPr>
+          <a:lstStyle/>
+          <a:p>
+            <a:pPr>
+              <a:buNone/>
+            </a:pPr>
+            <a:r>
+              <a:rPr lang="en-MY" sz="1800" b="1" dirty="0">
+                <a:solidFill>
+                  <a:srgbClr val="000000"/>
+                </a:solidFill>
+                <a:effectLst/>
+                <a:latin typeface="Times New Roman" panose="02020603050405020304" pitchFamily="18" charset="0"/>
+                <a:ea typeface="Aptos" panose="020B0004020202020204" pitchFamily="34" charset="0"/>
+              </a:rPr>
+              <a:t>4</a:t>
+            </a:r>
+            <a:r>
+              <a:rPr lang="en-MY" sz="1800" dirty="0">
+                <a:solidFill>
+                  <a:srgbClr val="000000"/>
+                </a:solidFill>
+                <a:effectLst/>
+                <a:latin typeface="Times New Roman" panose="02020603050405020304" pitchFamily="18" charset="0"/>
+                <a:ea typeface="Aptos" panose="020B0004020202020204" pitchFamily="34" charset="0"/>
+              </a:rPr>
+              <a:t> (a) A square coil of sides 15 cm and 300 turns has a resistance of 3.0 Ω. A uniform magnetic field is applied perpendicular to the plane of the coil. The magnitude of this field is increased uniformly from zero to 0.8 Wb m</a:t>
+            </a:r>
+            <a:r>
+              <a:rPr lang="en-MY" sz="1800" baseline="30000" dirty="0">
+                <a:solidFill>
+                  <a:srgbClr val="000000"/>
+                </a:solidFill>
+                <a:effectLst/>
+                <a:latin typeface="Times New Roman" panose="02020603050405020304" pitchFamily="18" charset="0"/>
+                <a:ea typeface="Aptos" panose="020B0004020202020204" pitchFamily="34" charset="0"/>
+              </a:rPr>
+              <a:t>-2</a:t>
+            </a:r>
+            <a:r>
+              <a:rPr lang="en-MY" sz="1800" dirty="0">
+                <a:solidFill>
+                  <a:srgbClr val="000000"/>
+                </a:solidFill>
+                <a:effectLst/>
+                <a:latin typeface="Times New Roman" panose="02020603050405020304" pitchFamily="18" charset="0"/>
+                <a:ea typeface="Aptos" panose="020B0004020202020204" pitchFamily="34" charset="0"/>
+              </a:rPr>
+              <a:t>  in a time of 0.8 s. Determine the magnitude of the induced emf and current in the coil. 													[4 </a:t>
+            </a:r>
+            <a:r>
+              <a:rPr lang="en-MY" sz="1800" i="1" dirty="0">
+                <a:solidFill>
+                  <a:srgbClr val="000000"/>
+                </a:solidFill>
+                <a:effectLst/>
+                <a:latin typeface="Times New Roman" panose="02020603050405020304" pitchFamily="18" charset="0"/>
+                <a:ea typeface="Aptos" panose="020B0004020202020204" pitchFamily="34" charset="0"/>
+              </a:rPr>
+              <a:t>marks</a:t>
+            </a:r>
+            <a:r>
+              <a:rPr lang="en-MY" sz="1800" dirty="0">
+                <a:solidFill>
+                  <a:srgbClr val="000000"/>
+                </a:solidFill>
+                <a:effectLst/>
+                <a:latin typeface="Times New Roman" panose="02020603050405020304" pitchFamily="18" charset="0"/>
+                <a:ea typeface="Aptos" panose="020B0004020202020204" pitchFamily="34" charset="0"/>
+              </a:rPr>
+              <a:t>] </a:t>
+            </a:r>
+            <a:endParaRPr lang="en-MY" sz="2000" dirty="0">
+              <a:solidFill>
+                <a:srgbClr val="000000"/>
+              </a:solidFill>
+              <a:effectLst/>
+              <a:latin typeface="Times New Roman" panose="02020603050405020304" pitchFamily="18" charset="0"/>
+              <a:ea typeface="Aptos" panose="020B0004020202020204" pitchFamily="34" charset="0"/>
+            </a:endParaRPr>
+          </a:p>
+        </p:txBody>
+      </p:sp>
+      <p:sp>
+        <p:nvSpPr>
+          <p:cNvPr id="5" name="TextBox 4">
+            <a:extLst>
+              <a:ext uri="{FF2B5EF4-FFF2-40B4-BE49-F238E27FC236}">
+                <a16:creationId xmlns:a16="http://schemas.microsoft.com/office/drawing/2014/main" id="{97FADDAB-2CD2-C238-C0B2-4F316D9AE826}"/>
+              </a:ext>
+            </a:extLst>
+          </p:cNvPr>
+          <p:cNvSpPr txBox="1"/>
+          <p:nvPr/>
+        </p:nvSpPr>
+        <p:spPr>
+          <a:xfrm>
+            <a:off x="522027" y="1666123"/>
+            <a:ext cx="10696434" cy="1477328"/>
+          </a:xfrm>
+          <a:prstGeom prst="rect">
+            <a:avLst/>
+          </a:prstGeom>
+          <a:noFill/>
+        </p:spPr>
+        <p:txBody>
+          <a:bodyPr wrap="square">
+            <a:spAutoFit/>
+          </a:bodyPr>
+          <a:lstStyle/>
+          <a:p>
+            <a:pPr>
+              <a:buNone/>
+            </a:pPr>
+            <a:r>
+              <a:rPr lang="en-MY" sz="1800" dirty="0">
+                <a:solidFill>
+                  <a:srgbClr val="000000"/>
+                </a:solidFill>
+                <a:effectLst/>
+                <a:latin typeface="Times New Roman" panose="02020603050405020304" pitchFamily="18" charset="0"/>
+                <a:ea typeface="Aptos" panose="020B0004020202020204" pitchFamily="34" charset="0"/>
+              </a:rPr>
+              <a:t>(b) A steady current of 2 A in a coil of 400 turns causes a flux linkage of 10</a:t>
+            </a:r>
+            <a:r>
+              <a:rPr lang="en-MY" sz="1800" baseline="30000" dirty="0">
+                <a:solidFill>
+                  <a:srgbClr val="000000"/>
+                </a:solidFill>
+                <a:effectLst/>
+                <a:latin typeface="Times New Roman" panose="02020603050405020304" pitchFamily="18" charset="0"/>
+                <a:ea typeface="Aptos" panose="020B0004020202020204" pitchFamily="34" charset="0"/>
+              </a:rPr>
+              <a:t>-4</a:t>
+            </a:r>
+            <a:r>
+              <a:rPr lang="en-MY" sz="1800" dirty="0">
+                <a:solidFill>
+                  <a:srgbClr val="000000"/>
+                </a:solidFill>
+                <a:effectLst/>
+                <a:latin typeface="Times New Roman" panose="02020603050405020304" pitchFamily="18" charset="0"/>
+                <a:ea typeface="Aptos" panose="020B0004020202020204" pitchFamily="34" charset="0"/>
+              </a:rPr>
+              <a:t> Wb. Calculate the </a:t>
+            </a:r>
+            <a:endParaRPr lang="en-MY" sz="2000" dirty="0">
+              <a:solidFill>
+                <a:srgbClr val="000000"/>
+              </a:solidFill>
+              <a:effectLst/>
+              <a:latin typeface="Times New Roman" panose="02020603050405020304" pitchFamily="18" charset="0"/>
+              <a:ea typeface="Aptos" panose="020B0004020202020204" pitchFamily="34" charset="0"/>
+            </a:endParaRPr>
+          </a:p>
+          <a:p>
+            <a:pPr marL="342900" lvl="0" indent="-342900">
+              <a:buFont typeface="+mj-lt"/>
+              <a:buAutoNum type="romanLcPeriod"/>
+            </a:pPr>
+            <a:r>
+              <a:rPr lang="en-MY" sz="1800" dirty="0">
+                <a:solidFill>
+                  <a:srgbClr val="000000"/>
+                </a:solidFill>
+                <a:effectLst/>
+                <a:latin typeface="Times New Roman" panose="02020603050405020304" pitchFamily="18" charset="0"/>
+                <a:ea typeface="Aptos" panose="020B0004020202020204" pitchFamily="34" charset="0"/>
+              </a:rPr>
+              <a:t>inductance of the coil. </a:t>
+            </a:r>
+            <a:endParaRPr lang="en-MY" sz="2000" dirty="0">
+              <a:solidFill>
+                <a:srgbClr val="000000"/>
+              </a:solidFill>
+              <a:effectLst/>
+              <a:latin typeface="Times New Roman" panose="02020603050405020304" pitchFamily="18" charset="0"/>
+              <a:ea typeface="Aptos" panose="020B0004020202020204" pitchFamily="34" charset="0"/>
+            </a:endParaRPr>
+          </a:p>
+          <a:p>
+            <a:pPr marL="342900" lvl="0" indent="-342900">
+              <a:buFont typeface="+mj-lt"/>
+              <a:buAutoNum type="romanLcPeriod"/>
+            </a:pPr>
+            <a:r>
+              <a:rPr lang="en-MY" sz="1800" dirty="0">
+                <a:solidFill>
+                  <a:srgbClr val="000000"/>
+                </a:solidFill>
+                <a:effectLst/>
+                <a:latin typeface="Times New Roman" panose="02020603050405020304" pitchFamily="18" charset="0"/>
+                <a:ea typeface="Aptos" panose="020B0004020202020204" pitchFamily="34" charset="0"/>
+              </a:rPr>
+              <a:t>average induced emf in the coil if the current reduces to zero in 0.08 s. </a:t>
+            </a:r>
+            <a:endParaRPr lang="en-MY" sz="2000" dirty="0">
+              <a:solidFill>
+                <a:srgbClr val="000000"/>
+              </a:solidFill>
+              <a:effectLst/>
+              <a:latin typeface="Times New Roman" panose="02020603050405020304" pitchFamily="18" charset="0"/>
+              <a:ea typeface="Aptos" panose="020B0004020202020204" pitchFamily="34" charset="0"/>
+            </a:endParaRPr>
+          </a:p>
+          <a:p>
+            <a:pPr marL="342900" lvl="0" indent="-342900">
+              <a:buFont typeface="+mj-lt"/>
+              <a:buAutoNum type="romanLcPeriod"/>
+            </a:pPr>
+            <a:r>
+              <a:rPr lang="en-MY" sz="1800" dirty="0">
+                <a:solidFill>
+                  <a:srgbClr val="000000"/>
+                </a:solidFill>
+                <a:effectLst/>
+                <a:latin typeface="Times New Roman" panose="02020603050405020304" pitchFamily="18" charset="0"/>
+                <a:ea typeface="Aptos" panose="020B0004020202020204" pitchFamily="34" charset="0"/>
+              </a:rPr>
+              <a:t>energy stored in the coil. 						</a:t>
+            </a:r>
+          </a:p>
+          <a:p>
+            <a:pPr lvl="0"/>
+            <a:r>
+              <a:rPr lang="en-MY" sz="1800" dirty="0">
+                <a:solidFill>
+                  <a:srgbClr val="000000"/>
+                </a:solidFill>
+                <a:effectLst/>
+                <a:latin typeface="Times New Roman" panose="02020603050405020304" pitchFamily="18" charset="0"/>
+                <a:ea typeface="Aptos" panose="020B0004020202020204" pitchFamily="34" charset="0"/>
+              </a:rPr>
+              <a:t>										[6 </a:t>
+            </a:r>
+            <a:r>
+              <a:rPr lang="en-MY" sz="1800" i="1" dirty="0">
+                <a:solidFill>
+                  <a:srgbClr val="000000"/>
+                </a:solidFill>
+                <a:effectLst/>
+                <a:latin typeface="Times New Roman" panose="02020603050405020304" pitchFamily="18" charset="0"/>
+                <a:ea typeface="Aptos" panose="020B0004020202020204" pitchFamily="34" charset="0"/>
+              </a:rPr>
+              <a:t>marks</a:t>
+            </a:r>
+            <a:r>
+              <a:rPr lang="en-MY" sz="1800" dirty="0">
+                <a:solidFill>
+                  <a:srgbClr val="000000"/>
+                </a:solidFill>
+                <a:effectLst/>
+                <a:latin typeface="Times New Roman" panose="02020603050405020304" pitchFamily="18" charset="0"/>
+                <a:ea typeface="Aptos" panose="020B0004020202020204" pitchFamily="34" charset="0"/>
+              </a:rPr>
+              <a:t>] </a:t>
+            </a:r>
+            <a:endParaRPr lang="en-MY" sz="2000" dirty="0">
+              <a:solidFill>
+                <a:srgbClr val="000000"/>
+              </a:solidFill>
+              <a:effectLst/>
+              <a:latin typeface="Times New Roman" panose="02020603050405020304" pitchFamily="18" charset="0"/>
+              <a:ea typeface="Aptos" panose="020B0004020202020204" pitchFamily="34" charset="0"/>
+            </a:endParaRPr>
+          </a:p>
+        </p:txBody>
+      </p:sp>
+      <p:pic>
+        <p:nvPicPr>
+          <p:cNvPr id="9" name="Picture 8">
+            <a:extLst>
+              <a:ext uri="{FF2B5EF4-FFF2-40B4-BE49-F238E27FC236}">
+                <a16:creationId xmlns:a16="http://schemas.microsoft.com/office/drawing/2014/main" id="{45F8C10F-CF63-3202-5C94-589B3BA78DF3}"/>
+              </a:ext>
+            </a:extLst>
+          </p:cNvPr>
+          <p:cNvPicPr>
+            <a:picLocks noChangeAspect="1"/>
+          </p:cNvPicPr>
+          <p:nvPr/>
+        </p:nvPicPr>
+        <p:blipFill>
+          <a:blip r:embed="rId2"/>
+          <a:stretch>
+            <a:fillRect/>
+          </a:stretch>
+        </p:blipFill>
+        <p:spPr>
+          <a:xfrm>
+            <a:off x="8698704" y="5436988"/>
+            <a:ext cx="2829320" cy="990738"/>
+          </a:xfrm>
+          <a:prstGeom prst="rect">
+            <a:avLst/>
+          </a:prstGeom>
+        </p:spPr>
+      </p:pic>
+    </p:spTree>
+    <p:extLst>
+      <p:ext uri="{BB962C8B-B14F-4D97-AF65-F5344CB8AC3E}">
+        <p14:creationId xmlns:p14="http://schemas.microsoft.com/office/powerpoint/2010/main" val="1655008434"/>
+      </p:ext>
+    </p:extLst>
+  </p:cSld>
+  <p:clrMapOvr>
+    <a:masterClrMapping/>
+  </p:clrMapOvr>
+</p:sld>
+</file>
+
+<file path=ppt/slides/slide6.xml><?xml version="1.0" encoding="utf-8"?>
+<p:sld xmlns:a="http://schemas.openxmlformats.org/drawingml/2006/main" xmlns:r="http://schemas.openxmlformats.org/officeDocument/2006/relationships" xmlns:p="http://schemas.openxmlformats.org/presentationml/2006/main">
+  <p:cSld>
+    <p:spTree>
+      <p:nvGrpSpPr>
+        <p:cNvPr id="1" name=""/>
+        <p:cNvGrpSpPr/>
+        <p:nvPr/>
+      </p:nvGrpSpPr>
+      <p:grpSpPr>
+        <a:xfrm>
+          <a:off x="0" y="0"/>
+          <a:ext cx="0" cy="0"/>
+          <a:chOff x="0" y="0"/>
+          <a:chExt cx="0" cy="0"/>
+        </a:xfrm>
+      </p:grpSpPr>
+      <p:sp>
+        <p:nvSpPr>
+          <p:cNvPr id="3" name="TextBox 2">
+            <a:extLst>
+              <a:ext uri="{FF2B5EF4-FFF2-40B4-BE49-F238E27FC236}">
+                <a16:creationId xmlns:a16="http://schemas.microsoft.com/office/drawing/2014/main" id="{9229AC3A-486E-F2C8-8E47-022C6E40774E}"/>
+              </a:ext>
+            </a:extLst>
+          </p:cNvPr>
+          <p:cNvSpPr txBox="1"/>
+          <p:nvPr/>
+        </p:nvSpPr>
+        <p:spPr>
+          <a:xfrm>
+            <a:off x="704234" y="423604"/>
+            <a:ext cx="10887997" cy="3000821"/>
+          </a:xfrm>
+          <a:prstGeom prst="rect">
+            <a:avLst/>
+          </a:prstGeom>
+          <a:noFill/>
+        </p:spPr>
+        <p:txBody>
+          <a:bodyPr wrap="square">
+            <a:spAutoFit/>
+          </a:bodyPr>
+          <a:lstStyle/>
+          <a:p>
+            <a:pPr marR="33020" lvl="0" algn="just">
+              <a:lnSpc>
+                <a:spcPct val="150000"/>
+              </a:lnSpc>
+              <a:spcBef>
+                <a:spcPts val="500"/>
+              </a:spcBef>
+              <a:tabLst>
+                <a:tab pos="464185" algn="l"/>
+                <a:tab pos="1003935" algn="l"/>
+              </a:tabLst>
+            </a:pPr>
+            <a:r>
+              <a:rPr lang="en-US" spc="0" dirty="0">
+                <a:effectLst/>
+                <a:latin typeface="Times New Roman" panose="02020603050405020304" pitchFamily="18" charset="0"/>
+                <a:ea typeface="Times New Roman" panose="02020603050405020304" pitchFamily="18" charset="0"/>
+              </a:rPr>
+              <a:t>4(a) A</a:t>
+            </a:r>
+            <a:r>
+              <a:rPr lang="en-US" spc="-15" dirty="0">
+                <a:effectLst/>
+                <a:latin typeface="Times New Roman" panose="02020603050405020304" pitchFamily="18" charset="0"/>
+                <a:ea typeface="Times New Roman" panose="02020603050405020304" pitchFamily="18" charset="0"/>
+              </a:rPr>
+              <a:t> </a:t>
+            </a:r>
+            <a:r>
+              <a:rPr lang="en-US" spc="0" dirty="0">
+                <a:effectLst/>
+                <a:latin typeface="Times New Roman" panose="02020603050405020304" pitchFamily="18" charset="0"/>
+                <a:ea typeface="Times New Roman" panose="02020603050405020304" pitchFamily="18" charset="0"/>
+              </a:rPr>
+              <a:t>20</a:t>
+            </a:r>
+            <a:r>
+              <a:rPr lang="en-US" spc="-10" dirty="0">
+                <a:effectLst/>
+                <a:latin typeface="Times New Roman" panose="02020603050405020304" pitchFamily="18" charset="0"/>
+                <a:ea typeface="Times New Roman" panose="02020603050405020304" pitchFamily="18" charset="0"/>
+              </a:rPr>
+              <a:t> </a:t>
+            </a:r>
+            <a:r>
+              <a:rPr lang="en-US" spc="0" dirty="0">
+                <a:effectLst/>
+                <a:latin typeface="Times New Roman" panose="02020603050405020304" pitchFamily="18" charset="0"/>
+                <a:ea typeface="Times New Roman" panose="02020603050405020304" pitchFamily="18" charset="0"/>
+              </a:rPr>
+              <a:t>turns</a:t>
+            </a:r>
+            <a:r>
+              <a:rPr lang="en-US" spc="-10" dirty="0">
+                <a:effectLst/>
+                <a:latin typeface="Times New Roman" panose="02020603050405020304" pitchFamily="18" charset="0"/>
+                <a:ea typeface="Times New Roman" panose="02020603050405020304" pitchFamily="18" charset="0"/>
+              </a:rPr>
+              <a:t> </a:t>
+            </a:r>
+            <a:r>
+              <a:rPr lang="en-US" spc="0" dirty="0">
+                <a:effectLst/>
+                <a:latin typeface="Times New Roman" panose="02020603050405020304" pitchFamily="18" charset="0"/>
+                <a:ea typeface="Times New Roman" panose="02020603050405020304" pitchFamily="18" charset="0"/>
+              </a:rPr>
+              <a:t>coil</a:t>
+            </a:r>
+            <a:r>
+              <a:rPr lang="en-US" spc="-10" dirty="0">
+                <a:effectLst/>
+                <a:latin typeface="Times New Roman" panose="02020603050405020304" pitchFamily="18" charset="0"/>
+                <a:ea typeface="Times New Roman" panose="02020603050405020304" pitchFamily="18" charset="0"/>
+              </a:rPr>
+              <a:t> </a:t>
+            </a:r>
+            <a:r>
+              <a:rPr lang="en-US" spc="0" dirty="0">
+                <a:effectLst/>
+                <a:latin typeface="Times New Roman" panose="02020603050405020304" pitchFamily="18" charset="0"/>
+                <a:ea typeface="Times New Roman" panose="02020603050405020304" pitchFamily="18" charset="0"/>
+              </a:rPr>
+              <a:t>with</a:t>
+            </a:r>
+            <a:r>
+              <a:rPr lang="en-US" spc="-10" dirty="0">
+                <a:effectLst/>
+                <a:latin typeface="Times New Roman" panose="02020603050405020304" pitchFamily="18" charset="0"/>
+                <a:ea typeface="Times New Roman" panose="02020603050405020304" pitchFamily="18" charset="0"/>
+              </a:rPr>
+              <a:t> </a:t>
+            </a:r>
+            <a:r>
+              <a:rPr lang="en-US" spc="0" dirty="0">
+                <a:effectLst/>
+                <a:latin typeface="Times New Roman" panose="02020603050405020304" pitchFamily="18" charset="0"/>
+                <a:ea typeface="Times New Roman" panose="02020603050405020304" pitchFamily="18" charset="0"/>
+              </a:rPr>
+              <a:t>cross-sectional</a:t>
+            </a:r>
+            <a:r>
+              <a:rPr lang="en-US" spc="-10" dirty="0">
+                <a:effectLst/>
+                <a:latin typeface="Times New Roman" panose="02020603050405020304" pitchFamily="18" charset="0"/>
+                <a:ea typeface="Times New Roman" panose="02020603050405020304" pitchFamily="18" charset="0"/>
+              </a:rPr>
+              <a:t> </a:t>
+            </a:r>
+            <a:r>
+              <a:rPr lang="en-US" spc="0" dirty="0">
+                <a:effectLst/>
+                <a:latin typeface="Times New Roman" panose="02020603050405020304" pitchFamily="18" charset="0"/>
+                <a:ea typeface="Times New Roman" panose="02020603050405020304" pitchFamily="18" charset="0"/>
+              </a:rPr>
+              <a:t>area</a:t>
+            </a:r>
+            <a:r>
+              <a:rPr lang="en-US" spc="-15" dirty="0">
+                <a:effectLst/>
+                <a:latin typeface="Times New Roman" panose="02020603050405020304" pitchFamily="18" charset="0"/>
+                <a:ea typeface="Times New Roman" panose="02020603050405020304" pitchFamily="18" charset="0"/>
+              </a:rPr>
+              <a:t> </a:t>
+            </a:r>
+            <a:r>
+              <a:rPr lang="en-US" spc="0" dirty="0">
+                <a:effectLst/>
+                <a:latin typeface="Times New Roman" panose="02020603050405020304" pitchFamily="18" charset="0"/>
+                <a:ea typeface="Times New Roman" panose="02020603050405020304" pitchFamily="18" charset="0"/>
+              </a:rPr>
+              <a:t>of</a:t>
+            </a:r>
+            <a:r>
+              <a:rPr lang="en-US" spc="-10" dirty="0">
+                <a:effectLst/>
+                <a:latin typeface="Times New Roman" panose="02020603050405020304" pitchFamily="18" charset="0"/>
+                <a:ea typeface="Times New Roman" panose="02020603050405020304" pitchFamily="18" charset="0"/>
+              </a:rPr>
+              <a:t> </a:t>
+            </a:r>
+            <a:r>
+              <a:rPr lang="en-US" spc="0" dirty="0">
+                <a:effectLst/>
+                <a:latin typeface="Times New Roman" panose="02020603050405020304" pitchFamily="18" charset="0"/>
+                <a:ea typeface="Times New Roman" panose="02020603050405020304" pitchFamily="18" charset="0"/>
+              </a:rPr>
+              <a:t>5.8</a:t>
+            </a:r>
+            <a:r>
+              <a:rPr lang="en-US" spc="-10" dirty="0">
+                <a:effectLst/>
+                <a:latin typeface="Times New Roman" panose="02020603050405020304" pitchFamily="18" charset="0"/>
+                <a:ea typeface="Times New Roman" panose="02020603050405020304" pitchFamily="18" charset="0"/>
+              </a:rPr>
+              <a:t> </a:t>
+            </a:r>
+            <a:r>
+              <a:rPr lang="en-US" spc="0" dirty="0">
+                <a:effectLst/>
+                <a:latin typeface="Times New Roman" panose="02020603050405020304" pitchFamily="18" charset="0"/>
+                <a:ea typeface="Times New Roman" panose="02020603050405020304" pitchFamily="18" charset="0"/>
+              </a:rPr>
+              <a:t>x 10</a:t>
+            </a:r>
+            <a:r>
+              <a:rPr lang="en-US" spc="0" baseline="30000" dirty="0">
+                <a:effectLst/>
+                <a:latin typeface="Times New Roman" panose="02020603050405020304" pitchFamily="18" charset="0"/>
+                <a:ea typeface="Times New Roman" panose="02020603050405020304" pitchFamily="18" charset="0"/>
+              </a:rPr>
+              <a:t>-2</a:t>
+            </a:r>
+            <a:r>
+              <a:rPr lang="en-US" spc="-5" dirty="0">
+                <a:effectLst/>
+                <a:latin typeface="Times New Roman" panose="02020603050405020304" pitchFamily="18" charset="0"/>
+                <a:ea typeface="Times New Roman" panose="02020603050405020304" pitchFamily="18" charset="0"/>
+              </a:rPr>
+              <a:t> </a:t>
+            </a:r>
+            <a:r>
+              <a:rPr lang="en-US" spc="0" dirty="0">
+                <a:effectLst/>
+                <a:latin typeface="Times New Roman" panose="02020603050405020304" pitchFamily="18" charset="0"/>
+                <a:ea typeface="Times New Roman" panose="02020603050405020304" pitchFamily="18" charset="0"/>
+              </a:rPr>
+              <a:t>m</a:t>
+            </a:r>
+            <a:r>
+              <a:rPr lang="en-US" spc="0" baseline="30000" dirty="0">
+                <a:effectLst/>
+                <a:latin typeface="Times New Roman" panose="02020603050405020304" pitchFamily="18" charset="0"/>
+                <a:ea typeface="Times New Roman" panose="02020603050405020304" pitchFamily="18" charset="0"/>
+              </a:rPr>
+              <a:t>2</a:t>
+            </a:r>
+            <a:r>
+              <a:rPr lang="en-US" spc="-15" dirty="0">
+                <a:effectLst/>
+                <a:latin typeface="Times New Roman" panose="02020603050405020304" pitchFamily="18" charset="0"/>
+                <a:ea typeface="Times New Roman" panose="02020603050405020304" pitchFamily="18" charset="0"/>
+              </a:rPr>
+              <a:t> </a:t>
+            </a:r>
+            <a:r>
+              <a:rPr lang="en-US" spc="0" dirty="0">
+                <a:effectLst/>
+                <a:latin typeface="Times New Roman" panose="02020603050405020304" pitchFamily="18" charset="0"/>
+                <a:ea typeface="Times New Roman" panose="02020603050405020304" pitchFamily="18" charset="0"/>
+              </a:rPr>
+              <a:t>is</a:t>
+            </a:r>
+            <a:r>
+              <a:rPr lang="en-US" spc="-10" dirty="0">
+                <a:effectLst/>
+                <a:latin typeface="Times New Roman" panose="02020603050405020304" pitchFamily="18" charset="0"/>
+                <a:ea typeface="Times New Roman" panose="02020603050405020304" pitchFamily="18" charset="0"/>
+              </a:rPr>
+              <a:t> </a:t>
+            </a:r>
+            <a:r>
+              <a:rPr lang="en-US" spc="0" dirty="0">
+                <a:effectLst/>
+                <a:latin typeface="Times New Roman" panose="02020603050405020304" pitchFamily="18" charset="0"/>
+                <a:ea typeface="Times New Roman" panose="02020603050405020304" pitchFamily="18" charset="0"/>
+              </a:rPr>
+              <a:t>placed</a:t>
+            </a:r>
+            <a:r>
+              <a:rPr lang="en-US" spc="-10" dirty="0">
+                <a:effectLst/>
+                <a:latin typeface="Times New Roman" panose="02020603050405020304" pitchFamily="18" charset="0"/>
+                <a:ea typeface="Times New Roman" panose="02020603050405020304" pitchFamily="18" charset="0"/>
+              </a:rPr>
+              <a:t> </a:t>
+            </a:r>
+            <a:r>
+              <a:rPr lang="en-US" spc="0" dirty="0">
+                <a:effectLst/>
+                <a:latin typeface="Times New Roman" panose="02020603050405020304" pitchFamily="18" charset="0"/>
+                <a:ea typeface="Times New Roman" panose="02020603050405020304" pitchFamily="18" charset="0"/>
+              </a:rPr>
+              <a:t>in</a:t>
+            </a:r>
+            <a:r>
+              <a:rPr lang="en-US" spc="-10" dirty="0">
+                <a:effectLst/>
+                <a:latin typeface="Times New Roman" panose="02020603050405020304" pitchFamily="18" charset="0"/>
+                <a:ea typeface="Times New Roman" panose="02020603050405020304" pitchFamily="18" charset="0"/>
+              </a:rPr>
+              <a:t> </a:t>
+            </a:r>
+            <a:r>
+              <a:rPr lang="en-US" spc="0" dirty="0">
+                <a:effectLst/>
+                <a:latin typeface="Times New Roman" panose="02020603050405020304" pitchFamily="18" charset="0"/>
+                <a:ea typeface="Times New Roman" panose="02020603050405020304" pitchFamily="18" charset="0"/>
+              </a:rPr>
+              <a:t>a</a:t>
+            </a:r>
+            <a:r>
+              <a:rPr lang="en-US" spc="-10" dirty="0">
+                <a:effectLst/>
+                <a:latin typeface="Times New Roman" panose="02020603050405020304" pitchFamily="18" charset="0"/>
+                <a:ea typeface="Times New Roman" panose="02020603050405020304" pitchFamily="18" charset="0"/>
+              </a:rPr>
+              <a:t> </a:t>
+            </a:r>
+            <a:r>
+              <a:rPr lang="en-US" spc="0" dirty="0">
+                <a:effectLst/>
+                <a:latin typeface="Times New Roman" panose="02020603050405020304" pitchFamily="18" charset="0"/>
+                <a:ea typeface="Times New Roman" panose="02020603050405020304" pitchFamily="18" charset="0"/>
+              </a:rPr>
+              <a:t>uniform magnetic field of 1.8 T.</a:t>
+            </a:r>
+            <a:endParaRPr lang="en-MY" spc="0" dirty="0">
+              <a:effectLst/>
+              <a:latin typeface="Times New Roman" panose="02020603050405020304" pitchFamily="18" charset="0"/>
+              <a:ea typeface="Times New Roman" panose="02020603050405020304" pitchFamily="18" charset="0"/>
+            </a:endParaRPr>
+          </a:p>
+          <a:p>
+            <a:pPr marL="742950" marR="11430" lvl="1" indent="-285750" algn="just">
+              <a:lnSpc>
+                <a:spcPct val="150000"/>
+              </a:lnSpc>
+              <a:buFont typeface="+mj-lt"/>
+              <a:buAutoNum type="alphaLcPeriod"/>
+              <a:tabLst>
+                <a:tab pos="1477010" algn="l"/>
+              </a:tabLst>
+            </a:pPr>
+            <a:r>
+              <a:rPr lang="en-US" dirty="0">
+                <a:effectLst/>
+                <a:latin typeface="Times New Roman" panose="02020603050405020304" pitchFamily="18" charset="0"/>
+                <a:ea typeface="Times New Roman" panose="02020603050405020304" pitchFamily="18" charset="0"/>
+              </a:rPr>
+              <a:t>Calculate</a:t>
+            </a:r>
+            <a:r>
+              <a:rPr lang="en-US" spc="-55" dirty="0">
+                <a:effectLst/>
+                <a:latin typeface="Times New Roman" panose="02020603050405020304" pitchFamily="18" charset="0"/>
+                <a:ea typeface="Times New Roman" panose="02020603050405020304" pitchFamily="18" charset="0"/>
+              </a:rPr>
+              <a:t> </a:t>
+            </a:r>
+            <a:r>
+              <a:rPr lang="en-US" dirty="0">
+                <a:effectLst/>
+                <a:latin typeface="Times New Roman" panose="02020603050405020304" pitchFamily="18" charset="0"/>
+                <a:ea typeface="Times New Roman" panose="02020603050405020304" pitchFamily="18" charset="0"/>
+              </a:rPr>
+              <a:t>the</a:t>
+            </a:r>
+            <a:r>
+              <a:rPr lang="en-US" spc="-55" dirty="0">
+                <a:effectLst/>
+                <a:latin typeface="Times New Roman" panose="02020603050405020304" pitchFamily="18" charset="0"/>
+                <a:ea typeface="Times New Roman" panose="02020603050405020304" pitchFamily="18" charset="0"/>
+              </a:rPr>
+              <a:t> </a:t>
+            </a:r>
+            <a:r>
+              <a:rPr lang="en-US" dirty="0">
+                <a:effectLst/>
+                <a:latin typeface="Times New Roman" panose="02020603050405020304" pitchFamily="18" charset="0"/>
+                <a:ea typeface="Times New Roman" panose="02020603050405020304" pitchFamily="18" charset="0"/>
+              </a:rPr>
+              <a:t>magnetic</a:t>
+            </a:r>
+            <a:r>
+              <a:rPr lang="en-US" spc="-60" dirty="0">
+                <a:effectLst/>
+                <a:latin typeface="Times New Roman" panose="02020603050405020304" pitchFamily="18" charset="0"/>
+                <a:ea typeface="Times New Roman" panose="02020603050405020304" pitchFamily="18" charset="0"/>
+              </a:rPr>
+              <a:t> </a:t>
+            </a:r>
+            <a:r>
+              <a:rPr lang="en-US" dirty="0">
+                <a:effectLst/>
+                <a:latin typeface="Times New Roman" panose="02020603050405020304" pitchFamily="18" charset="0"/>
+                <a:ea typeface="Times New Roman" panose="02020603050405020304" pitchFamily="18" charset="0"/>
+              </a:rPr>
+              <a:t>flux</a:t>
+            </a:r>
+            <a:r>
+              <a:rPr lang="en-US" spc="-50" dirty="0">
+                <a:effectLst/>
+                <a:latin typeface="Times New Roman" panose="02020603050405020304" pitchFamily="18" charset="0"/>
+                <a:ea typeface="Times New Roman" panose="02020603050405020304" pitchFamily="18" charset="0"/>
+              </a:rPr>
+              <a:t> </a:t>
+            </a:r>
+            <a:r>
+              <a:rPr lang="en-US" dirty="0">
+                <a:effectLst/>
+                <a:latin typeface="Times New Roman" panose="02020603050405020304" pitchFamily="18" charset="0"/>
+                <a:ea typeface="Times New Roman" panose="02020603050405020304" pitchFamily="18" charset="0"/>
+              </a:rPr>
+              <a:t>linkage</a:t>
+            </a:r>
+            <a:r>
+              <a:rPr lang="en-US" spc="-60" dirty="0">
+                <a:effectLst/>
+                <a:latin typeface="Times New Roman" panose="02020603050405020304" pitchFamily="18" charset="0"/>
+                <a:ea typeface="Times New Roman" panose="02020603050405020304" pitchFamily="18" charset="0"/>
+              </a:rPr>
+              <a:t> </a:t>
+            </a:r>
+            <a:r>
+              <a:rPr lang="en-US" dirty="0">
+                <a:effectLst/>
+                <a:latin typeface="Times New Roman" panose="02020603050405020304" pitchFamily="18" charset="0"/>
+                <a:ea typeface="Times New Roman" panose="02020603050405020304" pitchFamily="18" charset="0"/>
+              </a:rPr>
+              <a:t>in</a:t>
+            </a:r>
+            <a:r>
+              <a:rPr lang="en-US" spc="-50" dirty="0">
+                <a:effectLst/>
+                <a:latin typeface="Times New Roman" panose="02020603050405020304" pitchFamily="18" charset="0"/>
+                <a:ea typeface="Times New Roman" panose="02020603050405020304" pitchFamily="18" charset="0"/>
+              </a:rPr>
+              <a:t> </a:t>
+            </a:r>
+            <a:r>
+              <a:rPr lang="en-US" dirty="0">
+                <a:effectLst/>
+                <a:latin typeface="Times New Roman" panose="02020603050405020304" pitchFamily="18" charset="0"/>
+                <a:ea typeface="Times New Roman" panose="02020603050405020304" pitchFamily="18" charset="0"/>
+              </a:rPr>
+              <a:t>the</a:t>
+            </a:r>
+            <a:r>
+              <a:rPr lang="en-US" spc="-70" dirty="0">
+                <a:effectLst/>
+                <a:latin typeface="Times New Roman" panose="02020603050405020304" pitchFamily="18" charset="0"/>
+                <a:ea typeface="Times New Roman" panose="02020603050405020304" pitchFamily="18" charset="0"/>
+              </a:rPr>
+              <a:t> </a:t>
+            </a:r>
+            <a:r>
+              <a:rPr lang="en-US" dirty="0">
+                <a:effectLst/>
+                <a:latin typeface="Times New Roman" panose="02020603050405020304" pitchFamily="18" charset="0"/>
+                <a:ea typeface="Times New Roman" panose="02020603050405020304" pitchFamily="18" charset="0"/>
+              </a:rPr>
+              <a:t>coil</a:t>
+            </a:r>
+            <a:r>
+              <a:rPr lang="en-US" spc="-50" dirty="0">
+                <a:effectLst/>
+                <a:latin typeface="Times New Roman" panose="02020603050405020304" pitchFamily="18" charset="0"/>
+                <a:ea typeface="Times New Roman" panose="02020603050405020304" pitchFamily="18" charset="0"/>
+              </a:rPr>
+              <a:t> </a:t>
+            </a:r>
+            <a:r>
+              <a:rPr lang="en-US" dirty="0">
+                <a:effectLst/>
+                <a:latin typeface="Times New Roman" panose="02020603050405020304" pitchFamily="18" charset="0"/>
+                <a:ea typeface="Times New Roman" panose="02020603050405020304" pitchFamily="18" charset="0"/>
+              </a:rPr>
+              <a:t>when</a:t>
+            </a:r>
+            <a:r>
+              <a:rPr lang="en-US" spc="-55" dirty="0">
+                <a:effectLst/>
+                <a:latin typeface="Times New Roman" panose="02020603050405020304" pitchFamily="18" charset="0"/>
+                <a:ea typeface="Times New Roman" panose="02020603050405020304" pitchFamily="18" charset="0"/>
+              </a:rPr>
+              <a:t> </a:t>
+            </a:r>
+            <a:r>
+              <a:rPr lang="en-US" dirty="0">
+                <a:effectLst/>
+                <a:latin typeface="Times New Roman" panose="02020603050405020304" pitchFamily="18" charset="0"/>
+                <a:ea typeface="Times New Roman" panose="02020603050405020304" pitchFamily="18" charset="0"/>
+              </a:rPr>
+              <a:t>the</a:t>
+            </a:r>
+            <a:r>
+              <a:rPr lang="en-US" spc="-55" dirty="0">
+                <a:effectLst/>
+                <a:latin typeface="Times New Roman" panose="02020603050405020304" pitchFamily="18" charset="0"/>
+                <a:ea typeface="Times New Roman" panose="02020603050405020304" pitchFamily="18" charset="0"/>
+              </a:rPr>
+              <a:t> </a:t>
+            </a:r>
+            <a:r>
+              <a:rPr lang="en-US" dirty="0">
+                <a:effectLst/>
+                <a:latin typeface="Times New Roman" panose="02020603050405020304" pitchFamily="18" charset="0"/>
+                <a:ea typeface="Times New Roman" panose="02020603050405020304" pitchFamily="18" charset="0"/>
+              </a:rPr>
+              <a:t>plane</a:t>
+            </a:r>
+            <a:r>
+              <a:rPr lang="en-US" spc="-60" dirty="0">
+                <a:effectLst/>
+                <a:latin typeface="Times New Roman" panose="02020603050405020304" pitchFamily="18" charset="0"/>
+                <a:ea typeface="Times New Roman" panose="02020603050405020304" pitchFamily="18" charset="0"/>
+              </a:rPr>
+              <a:t> </a:t>
+            </a:r>
+            <a:r>
+              <a:rPr lang="en-US" dirty="0">
+                <a:effectLst/>
+                <a:latin typeface="Times New Roman" panose="02020603050405020304" pitchFamily="18" charset="0"/>
+                <a:ea typeface="Times New Roman" panose="02020603050405020304" pitchFamily="18" charset="0"/>
+              </a:rPr>
+              <a:t>of</a:t>
+            </a:r>
+            <a:r>
+              <a:rPr lang="en-US" spc="-55" dirty="0">
+                <a:effectLst/>
+                <a:latin typeface="Times New Roman" panose="02020603050405020304" pitchFamily="18" charset="0"/>
+                <a:ea typeface="Times New Roman" panose="02020603050405020304" pitchFamily="18" charset="0"/>
+              </a:rPr>
+              <a:t> </a:t>
+            </a:r>
+            <a:r>
+              <a:rPr lang="en-US" dirty="0">
+                <a:effectLst/>
+                <a:latin typeface="Times New Roman" panose="02020603050405020304" pitchFamily="18" charset="0"/>
+                <a:ea typeface="Times New Roman" panose="02020603050405020304" pitchFamily="18" charset="0"/>
+              </a:rPr>
+              <a:t>the</a:t>
+            </a:r>
+            <a:r>
+              <a:rPr lang="en-US" spc="-55" dirty="0">
+                <a:effectLst/>
+                <a:latin typeface="Times New Roman" panose="02020603050405020304" pitchFamily="18" charset="0"/>
+                <a:ea typeface="Times New Roman" panose="02020603050405020304" pitchFamily="18" charset="0"/>
+              </a:rPr>
+              <a:t> </a:t>
+            </a:r>
+            <a:r>
+              <a:rPr lang="en-US" dirty="0">
+                <a:effectLst/>
+                <a:latin typeface="Times New Roman" panose="02020603050405020304" pitchFamily="18" charset="0"/>
+                <a:ea typeface="Times New Roman" panose="02020603050405020304" pitchFamily="18" charset="0"/>
+              </a:rPr>
+              <a:t>coil makes an angle of 60° to the magnetic field.</a:t>
+            </a:r>
+            <a:endParaRPr lang="en-MY" dirty="0">
+              <a:effectLst/>
+              <a:latin typeface="Times New Roman" panose="02020603050405020304" pitchFamily="18" charset="0"/>
+              <a:ea typeface="Times New Roman" panose="02020603050405020304" pitchFamily="18" charset="0"/>
+            </a:endParaRPr>
+          </a:p>
+          <a:p>
+            <a:pPr marL="742950" marR="15875" lvl="1" indent="-285750" algn="just">
+              <a:lnSpc>
+                <a:spcPct val="150000"/>
+              </a:lnSpc>
+              <a:buFont typeface="+mj-lt"/>
+              <a:buAutoNum type="alphaLcPeriod"/>
+              <a:tabLst>
+                <a:tab pos="1477010" algn="l"/>
+              </a:tabLst>
+            </a:pPr>
+            <a:r>
+              <a:rPr lang="en-US" dirty="0">
+                <a:effectLst/>
+                <a:latin typeface="Times New Roman" panose="02020603050405020304" pitchFamily="18" charset="0"/>
+                <a:ea typeface="Times New Roman" panose="02020603050405020304" pitchFamily="18" charset="0"/>
+              </a:rPr>
+              <a:t>If the coil rotates about an axis perpendicular to the uniform magnetic field at a constant angular velocity of 20 revolutions per second, calculate the maximum induced </a:t>
+            </a:r>
+            <a:r>
+              <a:rPr lang="en-US" dirty="0" err="1">
+                <a:effectLst/>
+                <a:latin typeface="Times New Roman" panose="02020603050405020304" pitchFamily="18" charset="0"/>
+                <a:ea typeface="Times New Roman" panose="02020603050405020304" pitchFamily="18" charset="0"/>
+              </a:rPr>
+              <a:t>e.m.f.</a:t>
+            </a:r>
+            <a:r>
+              <a:rPr lang="en-US" dirty="0">
+                <a:effectLst/>
+                <a:latin typeface="Times New Roman" panose="02020603050405020304" pitchFamily="18" charset="0"/>
+                <a:ea typeface="Times New Roman" panose="02020603050405020304" pitchFamily="18" charset="0"/>
+              </a:rPr>
+              <a:t> in the coil.</a:t>
+            </a:r>
+            <a:endParaRPr lang="en-MY" dirty="0">
+              <a:effectLst/>
+              <a:latin typeface="Times New Roman" panose="02020603050405020304" pitchFamily="18" charset="0"/>
+              <a:ea typeface="Times New Roman" panose="02020603050405020304" pitchFamily="18" charset="0"/>
+            </a:endParaRPr>
+          </a:p>
+          <a:p>
+            <a:pPr algn="r">
+              <a:buNone/>
+            </a:pPr>
+            <a:r>
+              <a:rPr lang="en-US" dirty="0">
+                <a:effectLst/>
+                <a:latin typeface="Times New Roman" panose="02020603050405020304" pitchFamily="18" charset="0"/>
+                <a:ea typeface="Times New Roman" panose="02020603050405020304" pitchFamily="18" charset="0"/>
+              </a:rPr>
+              <a:t>[5</a:t>
+            </a:r>
+            <a:r>
+              <a:rPr lang="en-US" spc="-5" dirty="0">
+                <a:effectLst/>
+                <a:latin typeface="Times New Roman" panose="02020603050405020304" pitchFamily="18" charset="0"/>
+                <a:ea typeface="Times New Roman" panose="02020603050405020304" pitchFamily="18" charset="0"/>
+              </a:rPr>
+              <a:t> </a:t>
+            </a:r>
+            <a:r>
+              <a:rPr lang="en-US" i="1" spc="-10" dirty="0">
+                <a:effectLst/>
+                <a:latin typeface="Times New Roman" panose="02020603050405020304" pitchFamily="18" charset="0"/>
+                <a:ea typeface="Times New Roman" panose="02020603050405020304" pitchFamily="18" charset="0"/>
+              </a:rPr>
+              <a:t>marks</a:t>
+            </a:r>
+            <a:r>
+              <a:rPr lang="en-US" spc="-10" dirty="0">
+                <a:effectLst/>
+                <a:latin typeface="Times New Roman" panose="02020603050405020304" pitchFamily="18" charset="0"/>
+                <a:ea typeface="Times New Roman" panose="02020603050405020304" pitchFamily="18" charset="0"/>
+              </a:rPr>
+              <a:t>]</a:t>
+            </a:r>
+            <a:endParaRPr lang="en-MY" dirty="0">
+              <a:effectLst/>
+              <a:latin typeface="Times New Roman" panose="02020603050405020304" pitchFamily="18" charset="0"/>
+              <a:ea typeface="Times New Roman" panose="02020603050405020304" pitchFamily="18" charset="0"/>
+            </a:endParaRPr>
+          </a:p>
+          <a:p>
+            <a:pPr>
+              <a:buNone/>
+            </a:pPr>
+            <a:br>
+              <a:rPr lang="en-US" dirty="0">
+                <a:effectLst/>
+                <a:latin typeface="Times New Roman" panose="02020603050405020304" pitchFamily="18" charset="0"/>
+                <a:ea typeface="Times New Roman" panose="02020603050405020304" pitchFamily="18" charset="0"/>
+              </a:rPr>
+            </a:br>
+            <a:endParaRPr lang="en-MY" dirty="0"/>
+          </a:p>
+        </p:txBody>
+      </p:sp>
+      <p:pic>
+        <p:nvPicPr>
+          <p:cNvPr id="4" name="Picture 3">
+            <a:extLst>
+              <a:ext uri="{FF2B5EF4-FFF2-40B4-BE49-F238E27FC236}">
+                <a16:creationId xmlns:a16="http://schemas.microsoft.com/office/drawing/2014/main" id="{53F75AAB-BDDE-EC9C-2EF2-9EFDF0FB5C1E}"/>
+              </a:ext>
+            </a:extLst>
+          </p:cNvPr>
+          <p:cNvPicPr>
+            <a:picLocks noChangeAspect="1"/>
+          </p:cNvPicPr>
+          <p:nvPr/>
+        </p:nvPicPr>
+        <p:blipFill>
+          <a:blip r:embed="rId2">
+            <a:extLst>
+              <a:ext uri="{28A0092B-C50C-407E-A947-70E740481C1C}">
+                <a14:useLocalDpi xmlns:a14="http://schemas.microsoft.com/office/drawing/2010/main" val="0"/>
+              </a:ext>
+            </a:extLst>
+          </a:blip>
+          <a:stretch>
+            <a:fillRect/>
+          </a:stretch>
+        </p:blipFill>
+        <p:spPr>
+          <a:xfrm>
+            <a:off x="363199" y="2724240"/>
+            <a:ext cx="2970530" cy="2371725"/>
+          </a:xfrm>
+          <a:prstGeom prst="rect">
+            <a:avLst/>
+          </a:prstGeom>
+        </p:spPr>
+      </p:pic>
+      <p:sp>
+        <p:nvSpPr>
+          <p:cNvPr id="5" name="Rectangle 2">
+            <a:extLst>
+              <a:ext uri="{FF2B5EF4-FFF2-40B4-BE49-F238E27FC236}">
+                <a16:creationId xmlns:a16="http://schemas.microsoft.com/office/drawing/2014/main" id="{709CBF43-5F78-6A69-AE8C-A624618DCB26}"/>
+              </a:ext>
+            </a:extLst>
+          </p:cNvPr>
+          <p:cNvSpPr>
+            <a:spLocks noChangeArrowheads="1"/>
+          </p:cNvSpPr>
+          <p:nvPr/>
+        </p:nvSpPr>
+        <p:spPr bwMode="auto">
+          <a:xfrm>
+            <a:off x="152400" y="3226194"/>
+            <a:ext cx="12192000" cy="457200"/>
+          </a:xfrm>
+          <a:prstGeom prst="rect">
+            <a:avLst/>
+          </a:prstGeom>
+          <a:noFill/>
+          <a:ln>
+            <a:noFill/>
+          </a:ln>
+          <a:effectLst/>
+          <a:extLst>
+            <a:ext uri="{909E8E84-426E-40DD-AFC4-6F175D3DCCD1}">
+              <a14:hiddenFill xmlns:a14="http://schemas.microsoft.com/office/drawing/2010/main">
+                <a:solidFill>
+                  <a:schemeClr val="accent1"/>
+                </a:solidFill>
+              </a14:hiddenFill>
+            </a:ext>
+            <a:ext uri="{91240B29-F687-4F45-9708-019B960494DF}">
+              <a14:hiddenLine xmlns:a14="http://schemas.microsoft.com/office/drawing/2010/main" w="9525">
+                <a:solidFill>
+                  <a:schemeClr val="tx1"/>
+                </a:solidFill>
+                <a:miter lim="800000"/>
+                <a:headEnd/>
+                <a:tailEnd/>
+              </a14:hiddenLine>
+            </a:ext>
+            <a:ext uri="{AF507438-7753-43E0-B8FC-AC1667EBCBE1}">
+              <a14:hiddenEffects xmlns:a14="http://schemas.microsoft.com/office/drawing/2010/main">
+                <a:effectLst>
+                  <a:outerShdw dist="35921" dir="2700000" algn="ctr" rotWithShape="0">
+                    <a:schemeClr val="bg2"/>
+                  </a:outerShdw>
+                </a:effectLst>
+              </a14:hiddenEffects>
+            </a:ext>
+          </a:extLst>
+        </p:spPr>
+        <p:txBody>
+          <a:bodyPr vert="horz" wrap="none" lIns="91440" tIns="45720" rIns="91440" bIns="45720" numCol="1" anchor="ctr" anchorCtr="0" compatLnSpc="1">
+            <a:prstTxWarp prst="textNoShape">
+              <a:avLst/>
+            </a:prstTxWarp>
+            <a:spAutoFit/>
+          </a:bodyPr>
+          <a:lstStyle/>
+          <a:p>
+            <a:endParaRPr lang="en-MY"/>
+          </a:p>
+        </p:txBody>
+      </p:sp>
+      <p:sp>
+        <p:nvSpPr>
+          <p:cNvPr id="6" name="Rectangle 3">
+            <a:extLst>
+              <a:ext uri="{FF2B5EF4-FFF2-40B4-BE49-F238E27FC236}">
+                <a16:creationId xmlns:a16="http://schemas.microsoft.com/office/drawing/2014/main" id="{6F0A314D-BE84-9F8C-04DE-8ED254CE684E}"/>
+              </a:ext>
+            </a:extLst>
+          </p:cNvPr>
+          <p:cNvSpPr>
+            <a:spLocks noChangeArrowheads="1"/>
+          </p:cNvSpPr>
+          <p:nvPr/>
+        </p:nvSpPr>
+        <p:spPr bwMode="auto">
+          <a:xfrm>
+            <a:off x="3889149" y="3054298"/>
+            <a:ext cx="6832927" cy="2862322"/>
+          </a:xfrm>
+          <a:prstGeom prst="rect">
+            <a:avLst/>
+          </a:prstGeom>
+          <a:noFill/>
+          <a:ln>
+            <a:noFill/>
+          </a:ln>
+          <a:effectLst/>
+          <a:extLst>
+            <a:ext uri="{909E8E84-426E-40DD-AFC4-6F175D3DCCD1}">
+              <a14:hiddenFill xmlns:a14="http://schemas.microsoft.com/office/drawing/2010/main">
+                <a:solidFill>
+                  <a:schemeClr val="accent1"/>
+                </a:solidFill>
+              </a14:hiddenFill>
+            </a:ext>
+            <a:ext uri="{91240B29-F687-4F45-9708-019B960494DF}">
+              <a14:hiddenLine xmlns:a14="http://schemas.microsoft.com/office/drawing/2010/main" w="9525">
+                <a:solidFill>
+                  <a:schemeClr val="tx1"/>
+                </a:solidFill>
+                <a:miter lim="800000"/>
+                <a:headEnd/>
+                <a:tailEnd/>
+              </a14:hiddenLine>
+            </a:ext>
+            <a:ext uri="{AF507438-7753-43E0-B8FC-AC1667EBCBE1}">
+              <a14:hiddenEffects xmlns:a14="http://schemas.microsoft.com/office/drawing/2010/main">
+                <a:effectLst>
+                  <a:outerShdw dist="35921" dir="2700000" algn="ctr" rotWithShape="0">
+                    <a:schemeClr val="bg2"/>
+                  </a:outerShdw>
+                </a:effectLst>
+              </a14:hiddenEffects>
+            </a:ext>
+          </a:extLst>
+        </p:spPr>
+        <p:txBody>
+          <a:bodyPr vert="horz" wrap="square" lIns="91440" tIns="45720" rIns="91440" bIns="45720" numCol="1" anchor="ctr" anchorCtr="0" compatLnSpc="1">
+            <a:prstTxWarp prst="textNoShape">
+              <a:avLst/>
+            </a:prstTxWarp>
+            <a:spAutoFit/>
+          </a:bodyPr>
+          <a:lstStyle>
+            <a:lvl1pPr eaLnBrk="0" fontAlgn="base" hangingPunct="0">
+              <a:spcBef>
+                <a:spcPct val="0"/>
+              </a:spcBef>
+              <a:spcAft>
+                <a:spcPct val="0"/>
+              </a:spcAft>
+              <a:tabLst>
+                <a:tab pos="1476375" algn="l"/>
+              </a:tabLst>
+              <a:defRPr>
+                <a:solidFill>
+                  <a:schemeClr val="tx1"/>
+                </a:solidFill>
+                <a:latin typeface="Arial" panose="020B0604020202020204" pitchFamily="34" charset="0"/>
+              </a:defRPr>
+            </a:lvl1pPr>
+            <a:lvl2pPr eaLnBrk="0" fontAlgn="base" hangingPunct="0">
+              <a:spcBef>
+                <a:spcPct val="0"/>
+              </a:spcBef>
+              <a:spcAft>
+                <a:spcPct val="0"/>
+              </a:spcAft>
+              <a:tabLst>
+                <a:tab pos="1476375" algn="l"/>
+              </a:tabLst>
+              <a:defRPr>
+                <a:solidFill>
+                  <a:schemeClr val="tx1"/>
+                </a:solidFill>
+                <a:latin typeface="Arial" panose="020B0604020202020204" pitchFamily="34" charset="0"/>
+              </a:defRPr>
+            </a:lvl2pPr>
+            <a:lvl3pPr eaLnBrk="0" fontAlgn="base" hangingPunct="0">
+              <a:spcBef>
+                <a:spcPct val="0"/>
+              </a:spcBef>
+              <a:spcAft>
+                <a:spcPct val="0"/>
+              </a:spcAft>
+              <a:tabLst>
+                <a:tab pos="1476375" algn="l"/>
+              </a:tabLst>
+              <a:defRPr>
+                <a:solidFill>
+                  <a:schemeClr val="tx1"/>
+                </a:solidFill>
+                <a:latin typeface="Arial" panose="020B0604020202020204" pitchFamily="34" charset="0"/>
+              </a:defRPr>
+            </a:lvl3pPr>
+            <a:lvl4pPr eaLnBrk="0" fontAlgn="base" hangingPunct="0">
+              <a:spcBef>
+                <a:spcPct val="0"/>
+              </a:spcBef>
+              <a:spcAft>
+                <a:spcPct val="0"/>
+              </a:spcAft>
+              <a:tabLst>
+                <a:tab pos="1476375" algn="l"/>
+              </a:tabLst>
+              <a:defRPr>
+                <a:solidFill>
+                  <a:schemeClr val="tx1"/>
+                </a:solidFill>
+                <a:latin typeface="Arial" panose="020B0604020202020204" pitchFamily="34" charset="0"/>
+              </a:defRPr>
+            </a:lvl4pPr>
+            <a:lvl5pPr eaLnBrk="0" fontAlgn="base" hangingPunct="0">
+              <a:spcBef>
+                <a:spcPct val="0"/>
+              </a:spcBef>
+              <a:spcAft>
+                <a:spcPct val="0"/>
+              </a:spcAft>
+              <a:tabLst>
+                <a:tab pos="1476375" algn="l"/>
+              </a:tabLst>
+              <a:defRPr>
+                <a:solidFill>
+                  <a:schemeClr val="tx1"/>
+                </a:solidFill>
+                <a:latin typeface="Arial" panose="020B0604020202020204" pitchFamily="34" charset="0"/>
+              </a:defRPr>
+            </a:lvl5pPr>
+            <a:lvl6pPr eaLnBrk="0" fontAlgn="base" hangingPunct="0">
+              <a:spcBef>
+                <a:spcPct val="0"/>
+              </a:spcBef>
+              <a:spcAft>
+                <a:spcPct val="0"/>
+              </a:spcAft>
+              <a:tabLst>
+                <a:tab pos="1476375" algn="l"/>
+              </a:tabLst>
+              <a:defRPr>
+                <a:solidFill>
+                  <a:schemeClr val="tx1"/>
+                </a:solidFill>
+                <a:latin typeface="Arial" panose="020B0604020202020204" pitchFamily="34" charset="0"/>
+              </a:defRPr>
+            </a:lvl6pPr>
+            <a:lvl7pPr eaLnBrk="0" fontAlgn="base" hangingPunct="0">
+              <a:spcBef>
+                <a:spcPct val="0"/>
+              </a:spcBef>
+              <a:spcAft>
+                <a:spcPct val="0"/>
+              </a:spcAft>
+              <a:tabLst>
+                <a:tab pos="1476375" algn="l"/>
+              </a:tabLst>
+              <a:defRPr>
+                <a:solidFill>
+                  <a:schemeClr val="tx1"/>
+                </a:solidFill>
+                <a:latin typeface="Arial" panose="020B0604020202020204" pitchFamily="34" charset="0"/>
+              </a:defRPr>
+            </a:lvl7pPr>
+            <a:lvl8pPr eaLnBrk="0" fontAlgn="base" hangingPunct="0">
+              <a:spcBef>
+                <a:spcPct val="0"/>
+              </a:spcBef>
+              <a:spcAft>
+                <a:spcPct val="0"/>
+              </a:spcAft>
+              <a:tabLst>
+                <a:tab pos="1476375" algn="l"/>
+              </a:tabLst>
+              <a:defRPr>
+                <a:solidFill>
+                  <a:schemeClr val="tx1"/>
+                </a:solidFill>
+                <a:latin typeface="Arial" panose="020B0604020202020204" pitchFamily="34" charset="0"/>
+              </a:defRPr>
+            </a:lvl8pPr>
+            <a:lvl9pPr eaLnBrk="0" fontAlgn="base" hangingPunct="0">
+              <a:spcBef>
+                <a:spcPct val="0"/>
+              </a:spcBef>
+              <a:spcAft>
+                <a:spcPct val="0"/>
+              </a:spcAft>
+              <a:tabLst>
+                <a:tab pos="1476375" algn="l"/>
+              </a:tabLst>
+              <a:defRPr>
+                <a:solidFill>
+                  <a:schemeClr val="tx1"/>
+                </a:solidFill>
+                <a:latin typeface="Arial" panose="020B0604020202020204" pitchFamily="34" charset="0"/>
+              </a:defRPr>
+            </a:lvl9pPr>
+          </a:lstStyle>
+          <a:p>
+            <a:pPr marL="0" marR="0" lvl="0" indent="0" defTabSz="914400" rtl="0" eaLnBrk="0" fontAlgn="base" latinLnBrk="0" hangingPunct="0">
+              <a:lnSpc>
+                <a:spcPct val="100000"/>
+              </a:lnSpc>
+              <a:spcBef>
+                <a:spcPct val="0"/>
+              </a:spcBef>
+              <a:spcAft>
+                <a:spcPct val="0"/>
+              </a:spcAft>
+              <a:buClrTx/>
+              <a:buSzTx/>
+              <a:buFontTx/>
+              <a:buNone/>
+              <a:tabLst>
+                <a:tab pos="1476375" algn="l"/>
+              </a:tabLst>
+            </a:pPr>
+            <a:r>
+              <a:rPr kumimoji="0" lang="en-US" altLang="en-US" b="1" i="0" u="none" strike="noStrike" cap="none" normalizeH="0" baseline="0" dirty="0">
+                <a:ln>
+                  <a:noFill/>
+                </a:ln>
+                <a:solidFill>
+                  <a:schemeClr val="tx1"/>
+                </a:solidFill>
+                <a:effectLst/>
+                <a:latin typeface="Arial" panose="020B0604020202020204" pitchFamily="34" charset="0"/>
+                <a:ea typeface="Times New Roman" panose="02020603050405020304" pitchFamily="18" charset="0"/>
+              </a:rPr>
+              <a:t> (b) FIGURE 5 </a:t>
+            </a:r>
+            <a:r>
+              <a:rPr kumimoji="0" lang="en-US" altLang="en-US" b="0" i="0" u="none" strike="noStrike" cap="none" normalizeH="0" baseline="0" dirty="0">
+                <a:ln>
+                  <a:noFill/>
+                </a:ln>
+                <a:solidFill>
+                  <a:schemeClr val="tx1"/>
+                </a:solidFill>
+                <a:effectLst/>
+                <a:latin typeface="Arial" panose="020B0604020202020204" pitchFamily="34" charset="0"/>
+                <a:ea typeface="Times New Roman" panose="02020603050405020304" pitchFamily="18" charset="0"/>
+              </a:rPr>
+              <a:t>shows a single loop of radius 10 cm with resistance of 0.4 Ω is placed perpendicularly in a uniform magnetic field of 1.6 T.</a:t>
+            </a:r>
+            <a:endParaRPr kumimoji="0" lang="en-US" altLang="en-US" b="0" i="0" u="none" strike="noStrike" cap="none" normalizeH="0" baseline="0" dirty="0">
+              <a:ln>
+                <a:noFill/>
+              </a:ln>
+              <a:solidFill>
+                <a:schemeClr val="tx1"/>
+              </a:solidFill>
+              <a:effectLst/>
+              <a:latin typeface="Arial" panose="020B0604020202020204" pitchFamily="34" charset="0"/>
+            </a:endParaRPr>
+          </a:p>
+          <a:p>
+            <a:pPr marL="0" marR="0" lvl="0" indent="0" defTabSz="914400" rtl="0" eaLnBrk="0" fontAlgn="base" latinLnBrk="0" hangingPunct="0">
+              <a:lnSpc>
+                <a:spcPct val="100000"/>
+              </a:lnSpc>
+              <a:spcBef>
+                <a:spcPct val="0"/>
+              </a:spcBef>
+              <a:spcAft>
+                <a:spcPct val="0"/>
+              </a:spcAft>
+              <a:buClrTx/>
+              <a:buSzTx/>
+              <a:buFontTx/>
+              <a:buNone/>
+              <a:tabLst>
+                <a:tab pos="1476375" algn="l"/>
+              </a:tabLst>
+            </a:pPr>
+            <a:r>
+              <a:rPr kumimoji="0" lang="en-US" altLang="en-US" b="0" i="0" u="none" strike="noStrike" cap="none" normalizeH="0" baseline="0" dirty="0">
+                <a:ln>
+                  <a:noFill/>
+                </a:ln>
+                <a:solidFill>
+                  <a:schemeClr val="tx1"/>
+                </a:solidFill>
+                <a:effectLst/>
+                <a:latin typeface="Arial" panose="020B0604020202020204" pitchFamily="34" charset="0"/>
+                <a:ea typeface="Times New Roman" panose="02020603050405020304" pitchFamily="18" charset="0"/>
+              </a:rPr>
+              <a:t>(</a:t>
+            </a:r>
+            <a:r>
+              <a:rPr kumimoji="0" lang="en-US" altLang="en-US" b="0" i="0" u="none" strike="noStrike" cap="none" normalizeH="0" baseline="0" dirty="0" err="1">
+                <a:ln>
+                  <a:noFill/>
+                </a:ln>
+                <a:solidFill>
+                  <a:schemeClr val="tx1"/>
+                </a:solidFill>
+                <a:effectLst/>
+                <a:latin typeface="Arial" panose="020B0604020202020204" pitchFamily="34" charset="0"/>
+                <a:ea typeface="Times New Roman" panose="02020603050405020304" pitchFamily="18" charset="0"/>
+              </a:rPr>
+              <a:t>i</a:t>
+            </a:r>
+            <a:r>
+              <a:rPr kumimoji="0" lang="en-US" altLang="en-US" b="0" i="0" u="none" strike="noStrike" cap="none" normalizeH="0" baseline="0" dirty="0">
+                <a:ln>
+                  <a:noFill/>
+                </a:ln>
+                <a:solidFill>
+                  <a:schemeClr val="tx1"/>
+                </a:solidFill>
+                <a:effectLst/>
+                <a:latin typeface="Arial" panose="020B0604020202020204" pitchFamily="34" charset="0"/>
+                <a:ea typeface="Times New Roman" panose="02020603050405020304" pitchFamily="18" charset="0"/>
+              </a:rPr>
+              <a:t>) Calculate the time taken for the magnetic field to reduce by 1.2 T if the induced </a:t>
+            </a:r>
+            <a:r>
+              <a:rPr kumimoji="0" lang="en-US" altLang="en-US" b="0" i="0" u="none" strike="noStrike" cap="none" normalizeH="0" baseline="0" dirty="0" err="1">
+                <a:ln>
+                  <a:noFill/>
+                </a:ln>
+                <a:solidFill>
+                  <a:schemeClr val="tx1"/>
+                </a:solidFill>
+                <a:effectLst/>
+                <a:latin typeface="Arial" panose="020B0604020202020204" pitchFamily="34" charset="0"/>
+                <a:ea typeface="Times New Roman" panose="02020603050405020304" pitchFamily="18" charset="0"/>
+              </a:rPr>
+              <a:t>e.m.f</a:t>
+            </a:r>
+            <a:r>
+              <a:rPr kumimoji="0" lang="en-US" altLang="en-US" b="0" i="0" u="none" strike="noStrike" cap="none" normalizeH="0" baseline="0" dirty="0">
+                <a:ln>
+                  <a:noFill/>
+                </a:ln>
+                <a:solidFill>
+                  <a:schemeClr val="tx1"/>
+                </a:solidFill>
+                <a:effectLst/>
+                <a:latin typeface="Arial" panose="020B0604020202020204" pitchFamily="34" charset="0"/>
+                <a:ea typeface="Times New Roman" panose="02020603050405020304" pitchFamily="18" charset="0"/>
+              </a:rPr>
+              <a:t> produced is 0.08 V.</a:t>
+            </a:r>
+            <a:endParaRPr kumimoji="0" lang="en-US" altLang="en-US" b="0" i="0" u="none" strike="noStrike" cap="none" normalizeH="0" baseline="0" dirty="0">
+              <a:ln>
+                <a:noFill/>
+              </a:ln>
+              <a:solidFill>
+                <a:schemeClr val="tx1"/>
+              </a:solidFill>
+              <a:effectLst/>
+              <a:latin typeface="Arial" panose="020B0604020202020204" pitchFamily="34" charset="0"/>
+            </a:endParaRPr>
+          </a:p>
+          <a:p>
+            <a:pPr marL="0" marR="0" lvl="0" indent="0" defTabSz="914400" rtl="0" eaLnBrk="0" fontAlgn="base" latinLnBrk="0" hangingPunct="0">
+              <a:lnSpc>
+                <a:spcPct val="100000"/>
+              </a:lnSpc>
+              <a:spcBef>
+                <a:spcPct val="0"/>
+              </a:spcBef>
+              <a:spcAft>
+                <a:spcPct val="0"/>
+              </a:spcAft>
+              <a:buClrTx/>
+              <a:buSzTx/>
+              <a:buFontTx/>
+              <a:buNone/>
+              <a:tabLst>
+                <a:tab pos="1476375" algn="l"/>
+              </a:tabLst>
+            </a:pPr>
+            <a:r>
+              <a:rPr kumimoji="0" lang="en-US" altLang="en-US" b="0" i="0" u="none" strike="noStrike" cap="none" normalizeH="0" baseline="0" dirty="0">
+                <a:ln>
+                  <a:noFill/>
+                </a:ln>
+                <a:solidFill>
+                  <a:schemeClr val="tx1"/>
+                </a:solidFill>
+                <a:effectLst/>
+                <a:latin typeface="Arial" panose="020B0604020202020204" pitchFamily="34" charset="0"/>
+                <a:ea typeface="Times New Roman" panose="02020603050405020304" pitchFamily="18" charset="0"/>
+              </a:rPr>
+              <a:t>(ii) Calculate the induced current in the loop when the magnetic field decreases.</a:t>
+            </a:r>
+            <a:endParaRPr kumimoji="0" lang="en-US" altLang="en-US" b="0" i="0" u="none" strike="noStrike" cap="none" normalizeH="0" baseline="0" dirty="0">
+              <a:ln>
+                <a:noFill/>
+              </a:ln>
+              <a:solidFill>
+                <a:schemeClr val="tx1"/>
+              </a:solidFill>
+              <a:effectLst/>
+              <a:latin typeface="Arial" panose="020B0604020202020204" pitchFamily="34" charset="0"/>
+            </a:endParaRPr>
+          </a:p>
+          <a:p>
+            <a:pPr marL="0" marR="0" lvl="0" indent="0" defTabSz="914400" rtl="0" eaLnBrk="0" fontAlgn="base" latinLnBrk="0" hangingPunct="0">
+              <a:lnSpc>
+                <a:spcPct val="100000"/>
+              </a:lnSpc>
+              <a:spcBef>
+                <a:spcPct val="0"/>
+              </a:spcBef>
+              <a:spcAft>
+                <a:spcPct val="0"/>
+              </a:spcAft>
+              <a:buClrTx/>
+              <a:buSzTx/>
+              <a:buFontTx/>
+              <a:buNone/>
+              <a:tabLst>
+                <a:tab pos="1476375" algn="l"/>
+              </a:tabLst>
+            </a:pPr>
+            <a:r>
+              <a:rPr kumimoji="0" lang="en-US" altLang="en-US" b="0" i="0" u="none" strike="noStrike" cap="none" normalizeH="0" baseline="0" dirty="0">
+                <a:ln>
+                  <a:noFill/>
+                </a:ln>
+                <a:solidFill>
+                  <a:schemeClr val="tx1"/>
+                </a:solidFill>
+                <a:effectLst/>
+                <a:latin typeface="Arial" panose="020B0604020202020204" pitchFamily="34" charset="0"/>
+                <a:ea typeface="Times New Roman" panose="02020603050405020304" pitchFamily="18" charset="0"/>
+              </a:rPr>
+              <a:t>(iii) By using </a:t>
+            </a:r>
+            <a:r>
+              <a:rPr kumimoji="0" lang="en-US" altLang="en-US" b="0" i="0" u="none" strike="noStrike" cap="none" normalizeH="0" baseline="0" dirty="0" err="1">
+                <a:ln>
+                  <a:noFill/>
+                </a:ln>
+                <a:solidFill>
+                  <a:schemeClr val="tx1"/>
+                </a:solidFill>
+                <a:effectLst/>
+                <a:latin typeface="Arial" panose="020B0604020202020204" pitchFamily="34" charset="0"/>
+                <a:ea typeface="Times New Roman" panose="02020603050405020304" pitchFamily="18" charset="0"/>
+              </a:rPr>
+              <a:t>Len’z</a:t>
+            </a:r>
+            <a:r>
+              <a:rPr kumimoji="0" lang="en-US" altLang="en-US" b="0" i="0" u="none" strike="noStrike" cap="none" normalizeH="0" baseline="0" dirty="0">
+                <a:ln>
+                  <a:noFill/>
+                </a:ln>
+                <a:solidFill>
+                  <a:schemeClr val="tx1"/>
+                </a:solidFill>
+                <a:effectLst/>
+                <a:latin typeface="Arial" panose="020B0604020202020204" pitchFamily="34" charset="0"/>
+                <a:ea typeface="Times New Roman" panose="02020603050405020304" pitchFamily="18" charset="0"/>
+              </a:rPr>
+              <a:t> law, state the direction of induced current in (b) (ii).</a:t>
+            </a:r>
+            <a:endParaRPr kumimoji="0" lang="en-US" altLang="en-US" b="0" i="0" u="none" strike="noStrike" cap="none" normalizeH="0" baseline="0" dirty="0">
+              <a:ln>
+                <a:noFill/>
+              </a:ln>
+              <a:solidFill>
+                <a:schemeClr val="tx1"/>
+              </a:solidFill>
+              <a:effectLst/>
+              <a:latin typeface="Arial" panose="020B0604020202020204" pitchFamily="34" charset="0"/>
+            </a:endParaRPr>
+          </a:p>
+          <a:p>
+            <a:pPr marL="0" marR="0" lvl="0" indent="0" algn="r" defTabSz="914400" rtl="0" eaLnBrk="0" fontAlgn="base" latinLnBrk="0" hangingPunct="0">
+              <a:lnSpc>
+                <a:spcPct val="100000"/>
+              </a:lnSpc>
+              <a:spcBef>
+                <a:spcPct val="0"/>
+              </a:spcBef>
+              <a:spcAft>
+                <a:spcPct val="0"/>
+              </a:spcAft>
+              <a:buClrTx/>
+              <a:buSzTx/>
+              <a:buFontTx/>
+              <a:buNone/>
+              <a:tabLst>
+                <a:tab pos="1476375" algn="l"/>
+              </a:tabLst>
+            </a:pPr>
+            <a:r>
+              <a:rPr kumimoji="0" lang="en-US" altLang="en-US" b="0" i="0" u="none" strike="noStrike" cap="none" normalizeH="0" baseline="0" dirty="0">
+                <a:ln>
+                  <a:noFill/>
+                </a:ln>
+                <a:solidFill>
+                  <a:schemeClr val="tx1"/>
+                </a:solidFill>
+                <a:effectLst/>
+                <a:latin typeface="Arial" panose="020B0604020202020204" pitchFamily="34" charset="0"/>
+                <a:ea typeface="Times New Roman" panose="02020603050405020304" pitchFamily="18" charset="0"/>
+              </a:rPr>
+              <a:t>[5 </a:t>
+            </a:r>
+            <a:r>
+              <a:rPr kumimoji="0" lang="en-US" altLang="en-US" b="0" i="1" u="none" strike="noStrike" cap="none" normalizeH="0" baseline="0" dirty="0">
+                <a:ln>
+                  <a:noFill/>
+                </a:ln>
+                <a:solidFill>
+                  <a:schemeClr val="tx1"/>
+                </a:solidFill>
+                <a:effectLst/>
+                <a:latin typeface="Arial" panose="020B0604020202020204" pitchFamily="34" charset="0"/>
+                <a:ea typeface="Times New Roman" panose="02020603050405020304" pitchFamily="18" charset="0"/>
+              </a:rPr>
+              <a:t>marks</a:t>
+            </a:r>
+            <a:r>
+              <a:rPr kumimoji="0" lang="en-US" altLang="en-US" b="0" i="0" u="none" strike="noStrike" cap="none" normalizeH="0" baseline="0" dirty="0">
+                <a:ln>
+                  <a:noFill/>
+                </a:ln>
+                <a:solidFill>
+                  <a:schemeClr val="tx1"/>
+                </a:solidFill>
+                <a:effectLst/>
+                <a:latin typeface="Arial" panose="020B0604020202020204" pitchFamily="34" charset="0"/>
+                <a:ea typeface="Times New Roman" panose="02020603050405020304" pitchFamily="18" charset="0"/>
+              </a:rPr>
+              <a:t>]</a:t>
+            </a:r>
+            <a:endParaRPr kumimoji="0" lang="en-US" altLang="en-US" b="0" i="0" u="none" strike="noStrike" cap="none" normalizeH="0" baseline="0" dirty="0">
+              <a:ln>
+                <a:noFill/>
+              </a:ln>
+              <a:solidFill>
+                <a:schemeClr val="tx1"/>
+              </a:solidFill>
+              <a:effectLst/>
+              <a:latin typeface="Arial" panose="020B0604020202020204" pitchFamily="34" charset="0"/>
+            </a:endParaRPr>
+          </a:p>
+        </p:txBody>
+      </p:sp>
+      <p:pic>
+        <p:nvPicPr>
+          <p:cNvPr id="8" name="Picture 7">
+            <a:extLst>
+              <a:ext uri="{FF2B5EF4-FFF2-40B4-BE49-F238E27FC236}">
+                <a16:creationId xmlns:a16="http://schemas.microsoft.com/office/drawing/2014/main" id="{1A62621F-579A-D5A3-33E6-1908BD915C59}"/>
+              </a:ext>
+            </a:extLst>
+          </p:cNvPr>
+          <p:cNvPicPr>
+            <a:picLocks noChangeAspect="1"/>
+          </p:cNvPicPr>
+          <p:nvPr/>
+        </p:nvPicPr>
+        <p:blipFill>
+          <a:blip r:embed="rId3"/>
+          <a:stretch>
+            <a:fillRect/>
+          </a:stretch>
+        </p:blipFill>
+        <p:spPr>
+          <a:xfrm>
+            <a:off x="556933" y="5354934"/>
+            <a:ext cx="3105583" cy="1400370"/>
+          </a:xfrm>
+          <a:prstGeom prst="rect">
+            <a:avLst/>
+          </a:prstGeom>
+        </p:spPr>
+      </p:pic>
+    </p:spTree>
+    <p:extLst>
+      <p:ext uri="{BB962C8B-B14F-4D97-AF65-F5344CB8AC3E}">
+        <p14:creationId xmlns:p14="http://schemas.microsoft.com/office/powerpoint/2010/main" val="565739905"/>
+      </p:ext>
+    </p:extLst>
+  </p:cSld>
+  <p:clrMapOvr>
+    <a:masterClrMapping/>
+  </p:clrMapOvr>
+</p:sld>
+</file>
+
+<file path=ppt/slides/slide7.xml><?xml version="1.0" encoding="utf-8"?>
+<p:sld xmlns:a="http://schemas.openxmlformats.org/drawingml/2006/main" xmlns:r="http://schemas.openxmlformats.org/officeDocument/2006/relationships" xmlns:p="http://schemas.openxmlformats.org/presentationml/2006/main">
+  <p:cSld>
+    <p:spTree>
+      <p:nvGrpSpPr>
+        <p:cNvPr id="1" name=""/>
+        <p:cNvGrpSpPr/>
+        <p:nvPr/>
+      </p:nvGrpSpPr>
+      <p:grpSpPr>
+        <a:xfrm>
+          <a:off x="0" y="0"/>
+          <a:ext cx="0" cy="0"/>
+          <a:chOff x="0" y="0"/>
+          <a:chExt cx="0" cy="0"/>
+        </a:xfrm>
+      </p:grpSpPr>
+      <p:pic>
+        <p:nvPicPr>
+          <p:cNvPr id="3" name="Picture 2">
+            <a:extLst>
+              <a:ext uri="{FF2B5EF4-FFF2-40B4-BE49-F238E27FC236}">
+                <a16:creationId xmlns:a16="http://schemas.microsoft.com/office/drawing/2014/main" id="{3D9A8151-C6B4-D001-77A9-42B86A4F9F60}"/>
+              </a:ext>
+            </a:extLst>
+          </p:cNvPr>
+          <p:cNvPicPr>
+            <a:picLocks noChangeAspect="1"/>
+          </p:cNvPicPr>
+          <p:nvPr/>
+        </p:nvPicPr>
+        <p:blipFill>
+          <a:blip r:embed="rId2"/>
+          <a:stretch>
+            <a:fillRect/>
+          </a:stretch>
+        </p:blipFill>
+        <p:spPr>
+          <a:xfrm>
+            <a:off x="0" y="489951"/>
+            <a:ext cx="3250965" cy="1771985"/>
+          </a:xfrm>
+          <a:prstGeom prst="rect">
+            <a:avLst/>
+          </a:prstGeom>
+        </p:spPr>
+      </p:pic>
+      <p:sp>
+        <p:nvSpPr>
+          <p:cNvPr id="5" name="TextBox 4">
+            <a:extLst>
+              <a:ext uri="{FF2B5EF4-FFF2-40B4-BE49-F238E27FC236}">
+                <a16:creationId xmlns:a16="http://schemas.microsoft.com/office/drawing/2014/main" id="{94F513ED-0199-750F-E2DF-194C4351A476}"/>
+              </a:ext>
+            </a:extLst>
+          </p:cNvPr>
+          <p:cNvSpPr txBox="1"/>
+          <p:nvPr/>
+        </p:nvSpPr>
+        <p:spPr>
+          <a:xfrm>
+            <a:off x="3621505" y="260230"/>
+            <a:ext cx="8169442" cy="923330"/>
+          </a:xfrm>
+          <a:prstGeom prst="rect">
+            <a:avLst/>
+          </a:prstGeom>
+          <a:noFill/>
+        </p:spPr>
+        <p:txBody>
+          <a:bodyPr wrap="square">
+            <a:spAutoFit/>
+          </a:bodyPr>
+          <a:lstStyle/>
+          <a:p>
+            <a:r>
+              <a:rPr lang="en-US" b="1" dirty="0">
+                <a:latin typeface="Times New Roman" panose="02020603050405020304" pitchFamily="18" charset="0"/>
+                <a:cs typeface="Times New Roman" panose="02020603050405020304" pitchFamily="18" charset="0"/>
+              </a:rPr>
+              <a:t>4. a) FIGURE 4</a:t>
+            </a:r>
+            <a:r>
+              <a:rPr lang="en-US" dirty="0">
+                <a:latin typeface="Times New Roman" panose="02020603050405020304" pitchFamily="18" charset="0"/>
+                <a:cs typeface="Times New Roman" panose="02020603050405020304" pitchFamily="18" charset="0"/>
+              </a:rPr>
+              <a:t> shows a model box placed in a uniform magnetic field of 0.2 T directed in the +</a:t>
+            </a:r>
+            <a:r>
+              <a:rPr lang="en-US" i="1" dirty="0">
+                <a:latin typeface="Times New Roman" panose="02020603050405020304" pitchFamily="18" charset="0"/>
+                <a:cs typeface="Times New Roman" panose="02020603050405020304" pitchFamily="18" charset="0"/>
+              </a:rPr>
+              <a:t>x</a:t>
+            </a:r>
+            <a:r>
+              <a:rPr lang="en-US" dirty="0">
+                <a:latin typeface="Times New Roman" panose="02020603050405020304" pitchFamily="18" charset="0"/>
+                <a:cs typeface="Times New Roman" panose="02020603050405020304" pitchFamily="18" charset="0"/>
+              </a:rPr>
+              <a:t> axis. Determine the magnetic flux through the shaded surface.</a:t>
+            </a:r>
+          </a:p>
+          <a:p>
+            <a:pPr algn="r"/>
+            <a:r>
+              <a:rPr lang="en-US" dirty="0">
+                <a:latin typeface="Times New Roman" panose="02020603050405020304" pitchFamily="18" charset="0"/>
+                <a:cs typeface="Times New Roman" panose="02020603050405020304" pitchFamily="18" charset="0"/>
+              </a:rPr>
+              <a:t> [3 marks]</a:t>
+            </a:r>
+            <a:endParaRPr lang="en-MY" dirty="0">
+              <a:latin typeface="Times New Roman" panose="02020603050405020304" pitchFamily="18" charset="0"/>
+              <a:cs typeface="Times New Roman" panose="02020603050405020304" pitchFamily="18" charset="0"/>
+            </a:endParaRPr>
+          </a:p>
+        </p:txBody>
+      </p:sp>
+      <p:sp>
+        <p:nvSpPr>
+          <p:cNvPr id="7" name="TextBox 6">
+            <a:extLst>
+              <a:ext uri="{FF2B5EF4-FFF2-40B4-BE49-F238E27FC236}">
+                <a16:creationId xmlns:a16="http://schemas.microsoft.com/office/drawing/2014/main" id="{C047C31E-B776-33F2-5A51-5F7BA74CB530}"/>
+              </a:ext>
+            </a:extLst>
+          </p:cNvPr>
+          <p:cNvSpPr txBox="1"/>
+          <p:nvPr/>
+        </p:nvSpPr>
+        <p:spPr>
+          <a:xfrm>
+            <a:off x="3621505" y="1375943"/>
+            <a:ext cx="8169442" cy="1200329"/>
+          </a:xfrm>
+          <a:prstGeom prst="rect">
+            <a:avLst/>
+          </a:prstGeom>
+          <a:noFill/>
+        </p:spPr>
+        <p:txBody>
+          <a:bodyPr wrap="square">
+            <a:spAutoFit/>
+          </a:bodyPr>
+          <a:lstStyle/>
+          <a:p>
+            <a:r>
+              <a:rPr lang="en-US" b="1" dirty="0">
+                <a:latin typeface="Times New Roman" panose="02020603050405020304" pitchFamily="18" charset="0"/>
+                <a:cs typeface="Times New Roman" panose="02020603050405020304" pitchFamily="18" charset="0"/>
+              </a:rPr>
+              <a:t>b)</a:t>
+            </a:r>
+            <a:r>
+              <a:rPr lang="en-US" dirty="0">
+                <a:latin typeface="Times New Roman" panose="02020603050405020304" pitchFamily="18" charset="0"/>
+                <a:cs typeface="Times New Roman" panose="02020603050405020304" pitchFamily="18" charset="0"/>
+              </a:rPr>
+              <a:t> A single turn coil of radius 10 cm rotates at 20 revolutions per second in a uniform magnetic field of 0.6 T. Calculate the induced emf when the plane of the coil makes an angle of 25° with the magnetic field. </a:t>
+            </a:r>
+          </a:p>
+          <a:p>
+            <a:pPr algn="r"/>
+            <a:r>
+              <a:rPr lang="en-US" dirty="0">
+                <a:latin typeface="Times New Roman" panose="02020603050405020304" pitchFamily="18" charset="0"/>
+                <a:cs typeface="Times New Roman" panose="02020603050405020304" pitchFamily="18" charset="0"/>
+              </a:rPr>
+              <a:t>[3 marks]</a:t>
+            </a:r>
+            <a:endParaRPr lang="en-MY" dirty="0">
+              <a:latin typeface="Times New Roman" panose="02020603050405020304" pitchFamily="18" charset="0"/>
+              <a:cs typeface="Times New Roman" panose="02020603050405020304" pitchFamily="18" charset="0"/>
+            </a:endParaRPr>
+          </a:p>
+        </p:txBody>
+      </p:sp>
+      <p:sp>
+        <p:nvSpPr>
+          <p:cNvPr id="9" name="TextBox 8">
+            <a:extLst>
+              <a:ext uri="{FF2B5EF4-FFF2-40B4-BE49-F238E27FC236}">
+                <a16:creationId xmlns:a16="http://schemas.microsoft.com/office/drawing/2014/main" id="{D7940FEF-3955-645B-62F7-0ED9BD5EF73B}"/>
+              </a:ext>
+            </a:extLst>
+          </p:cNvPr>
+          <p:cNvSpPr txBox="1"/>
+          <p:nvPr/>
+        </p:nvSpPr>
+        <p:spPr>
+          <a:xfrm>
+            <a:off x="3621505" y="2804401"/>
+            <a:ext cx="8169442" cy="1754326"/>
+          </a:xfrm>
+          <a:prstGeom prst="rect">
+            <a:avLst/>
+          </a:prstGeom>
+          <a:noFill/>
+        </p:spPr>
+        <p:txBody>
+          <a:bodyPr wrap="square">
+            <a:spAutoFit/>
+          </a:bodyPr>
+          <a:lstStyle/>
+          <a:p>
+            <a:r>
+              <a:rPr lang="en-US" b="1" dirty="0">
+                <a:latin typeface="Times New Roman" panose="02020603050405020304" pitchFamily="18" charset="0"/>
+                <a:cs typeface="Times New Roman" panose="02020603050405020304" pitchFamily="18" charset="0"/>
+              </a:rPr>
+              <a:t>c)</a:t>
+            </a:r>
+            <a:r>
+              <a:rPr lang="en-US" dirty="0">
+                <a:latin typeface="Times New Roman" panose="02020603050405020304" pitchFamily="18" charset="0"/>
+                <a:cs typeface="Times New Roman" panose="02020603050405020304" pitchFamily="18" charset="0"/>
+              </a:rPr>
+              <a:t> A coil of self-inductance 5.0 H is connected in series with a switch to a 12 V battery. The total resistance in the circuit is 6.0 Ω. Calculate the: </a:t>
+            </a:r>
+          </a:p>
+          <a:p>
+            <a:pPr marL="400050" indent="-400050">
+              <a:buAutoNum type="romanLcParenR"/>
+            </a:pPr>
+            <a:r>
+              <a:rPr lang="en-US" dirty="0">
+                <a:latin typeface="Times New Roman" panose="02020603050405020304" pitchFamily="18" charset="0"/>
+                <a:cs typeface="Times New Roman" panose="02020603050405020304" pitchFamily="18" charset="0"/>
+              </a:rPr>
+              <a:t>rate of current increase at the instant the switch is closed.</a:t>
+            </a:r>
+          </a:p>
+          <a:p>
+            <a:pPr marL="400050" indent="-400050">
+              <a:buAutoNum type="romanLcParenR"/>
+            </a:pPr>
+            <a:r>
+              <a:rPr lang="en-US" dirty="0">
+                <a:latin typeface="Times New Roman" panose="02020603050405020304" pitchFamily="18" charset="0"/>
+                <a:cs typeface="Times New Roman" panose="02020603050405020304" pitchFamily="18" charset="0"/>
+              </a:rPr>
+              <a:t> final value of the current.</a:t>
+            </a:r>
+          </a:p>
+          <a:p>
+            <a:pPr marL="400050" indent="-400050">
+              <a:buAutoNum type="romanLcParenR"/>
+            </a:pPr>
+            <a:r>
+              <a:rPr lang="en-US" dirty="0">
+                <a:latin typeface="Times New Roman" panose="02020603050405020304" pitchFamily="18" charset="0"/>
+                <a:cs typeface="Times New Roman" panose="02020603050405020304" pitchFamily="18" charset="0"/>
+              </a:rPr>
+              <a:t> energy stored in the inductor when the current is maximum. </a:t>
+            </a:r>
+          </a:p>
+          <a:p>
+            <a:pPr algn="r"/>
+            <a:r>
+              <a:rPr lang="en-US" dirty="0">
+                <a:latin typeface="Times New Roman" panose="02020603050405020304" pitchFamily="18" charset="0"/>
+                <a:cs typeface="Times New Roman" panose="02020603050405020304" pitchFamily="18" charset="0"/>
+              </a:rPr>
+              <a:t>[4 marks]</a:t>
+            </a:r>
+            <a:endParaRPr lang="en-MY" dirty="0">
+              <a:latin typeface="Times New Roman" panose="02020603050405020304" pitchFamily="18" charset="0"/>
+              <a:cs typeface="Times New Roman" panose="02020603050405020304" pitchFamily="18" charset="0"/>
+            </a:endParaRPr>
+          </a:p>
+        </p:txBody>
+      </p:sp>
+      <p:pic>
+        <p:nvPicPr>
+          <p:cNvPr id="4" name="Picture 3">
+            <a:extLst>
+              <a:ext uri="{FF2B5EF4-FFF2-40B4-BE49-F238E27FC236}">
+                <a16:creationId xmlns:a16="http://schemas.microsoft.com/office/drawing/2014/main" id="{08D6E90D-D475-B3C9-AAED-61C5AFD55C4E}"/>
+              </a:ext>
+            </a:extLst>
+          </p:cNvPr>
+          <p:cNvPicPr>
+            <a:picLocks noChangeAspect="1"/>
+          </p:cNvPicPr>
+          <p:nvPr/>
+        </p:nvPicPr>
+        <p:blipFill>
+          <a:blip r:embed="rId3"/>
+          <a:stretch>
+            <a:fillRect/>
+          </a:stretch>
+        </p:blipFill>
+        <p:spPr>
+          <a:xfrm>
+            <a:off x="9056160" y="5831142"/>
+            <a:ext cx="3010320" cy="895475"/>
+          </a:xfrm>
+          <a:prstGeom prst="rect">
+            <a:avLst/>
+          </a:prstGeom>
+        </p:spPr>
+      </p:pic>
+    </p:spTree>
+    <p:extLst>
+      <p:ext uri="{BB962C8B-B14F-4D97-AF65-F5344CB8AC3E}">
+        <p14:creationId xmlns:p14="http://schemas.microsoft.com/office/powerpoint/2010/main" val="1971972113"/>
+      </p:ext>
+    </p:extLst>
+  </p:cSld>
+  <p:clrMapOvr>
+    <a:masterClrMapping/>
+  </p:clrMapOvr>
+</p:sld>
+</file>
+
+<file path=ppt/slides/slide8.xml><?xml version="1.0" encoding="utf-8"?>
+<p:sld xmlns:a="http://schemas.openxmlformats.org/drawingml/2006/main" xmlns:r="http://schemas.openxmlformats.org/officeDocument/2006/relationships" xmlns:p="http://schemas.openxmlformats.org/presentationml/2006/main">
+  <p:cSld>
+    <p:spTree>
+      <p:nvGrpSpPr>
+        <p:cNvPr id="1" name="">
+          <a:extLst>
+            <a:ext uri="{FF2B5EF4-FFF2-40B4-BE49-F238E27FC236}">
+              <a16:creationId xmlns:a16="http://schemas.microsoft.com/office/drawing/2014/main" id="{DFBC1F5B-40F0-EB16-B902-464AFEFCA81A}"/>
+            </a:ext>
+          </a:extLst>
+        </p:cNvPr>
+        <p:cNvGrpSpPr/>
+        <p:nvPr/>
+      </p:nvGrpSpPr>
+      <p:grpSpPr>
+        <a:xfrm>
+          <a:off x="0" y="0"/>
+          <a:ext cx="0" cy="0"/>
+          <a:chOff x="0" y="0"/>
+          <a:chExt cx="0" cy="0"/>
+        </a:xfrm>
+      </p:grpSpPr>
+      <p:sp>
+        <p:nvSpPr>
+          <p:cNvPr id="3" name="TextBox 2">
+            <a:extLst>
+              <a:ext uri="{FF2B5EF4-FFF2-40B4-BE49-F238E27FC236}">
+                <a16:creationId xmlns:a16="http://schemas.microsoft.com/office/drawing/2014/main" id="{4D1D8074-A159-39B5-15BC-D7D44FE7BB6B}"/>
+              </a:ext>
+            </a:extLst>
+          </p:cNvPr>
+          <p:cNvSpPr txBox="1"/>
+          <p:nvPr/>
+        </p:nvSpPr>
+        <p:spPr>
+          <a:xfrm>
+            <a:off x="751113" y="763564"/>
+            <a:ext cx="10900955" cy="1477328"/>
+          </a:xfrm>
+          <a:prstGeom prst="rect">
+            <a:avLst/>
+          </a:prstGeom>
+          <a:noFill/>
+        </p:spPr>
+        <p:txBody>
+          <a:bodyPr wrap="square">
+            <a:spAutoFit/>
+          </a:bodyPr>
+          <a:lstStyle/>
+          <a:p>
+            <a:pPr>
+              <a:buNone/>
+            </a:pPr>
+            <a:r>
+              <a:rPr lang="en-US" b="1" dirty="0">
+                <a:latin typeface="Times New Roman" panose="02020603050405020304" pitchFamily="18" charset="0"/>
+                <a:cs typeface="Times New Roman" panose="02020603050405020304" pitchFamily="18" charset="0"/>
+              </a:rPr>
+              <a:t>4. a)</a:t>
+            </a:r>
+            <a:r>
+              <a:rPr lang="en-US" dirty="0">
+                <a:latin typeface="Times New Roman" panose="02020603050405020304" pitchFamily="18" charset="0"/>
+                <a:cs typeface="Times New Roman" panose="02020603050405020304" pitchFamily="18" charset="0"/>
+              </a:rPr>
+              <a:t> A loop of area 0.50 cm² with its plane perpendicular to a uniform magnetic field of 2.0 T is turned through 90° so that its plane is parallel to the magnetic field in 0.15 s. Calculate the:</a:t>
+            </a:r>
+          </a:p>
+          <a:p>
+            <a:pPr>
+              <a:buNone/>
+            </a:pPr>
+            <a:r>
+              <a:rPr lang="en-US" dirty="0">
+                <a:latin typeface="Times New Roman" panose="02020603050405020304" pitchFamily="18" charset="0"/>
+                <a:cs typeface="Times New Roman" panose="02020603050405020304" pitchFamily="18" charset="0"/>
+              </a:rPr>
+              <a:t> </a:t>
+            </a:r>
+            <a:r>
+              <a:rPr lang="en-US" dirty="0" err="1">
+                <a:latin typeface="Times New Roman" panose="02020603050405020304" pitchFamily="18" charset="0"/>
+                <a:cs typeface="Times New Roman" panose="02020603050405020304" pitchFamily="18" charset="0"/>
+              </a:rPr>
+              <a:t>i</a:t>
+            </a:r>
+            <a:r>
+              <a:rPr lang="en-US" dirty="0">
+                <a:latin typeface="Times New Roman" panose="02020603050405020304" pitchFamily="18" charset="0"/>
+                <a:cs typeface="Times New Roman" panose="02020603050405020304" pitchFamily="18" charset="0"/>
+              </a:rPr>
+              <a:t>) change of magnetic flux in the coil. </a:t>
+            </a:r>
+          </a:p>
+          <a:p>
+            <a:pPr>
+              <a:buNone/>
+            </a:pPr>
+            <a:r>
+              <a:rPr lang="en-US" dirty="0">
+                <a:latin typeface="Times New Roman" panose="02020603050405020304" pitchFamily="18" charset="0"/>
+                <a:cs typeface="Times New Roman" panose="02020603050405020304" pitchFamily="18" charset="0"/>
+              </a:rPr>
+              <a:t>ii) induced emf.</a:t>
+            </a:r>
+          </a:p>
+          <a:p>
+            <a:pPr algn="r">
+              <a:buNone/>
+            </a:pPr>
+            <a:r>
+              <a:rPr lang="en-US" dirty="0">
+                <a:latin typeface="Times New Roman" panose="02020603050405020304" pitchFamily="18" charset="0"/>
+                <a:cs typeface="Times New Roman" panose="02020603050405020304" pitchFamily="18" charset="0"/>
+              </a:rPr>
+              <a:t> [4 marks]</a:t>
+            </a:r>
+          </a:p>
+        </p:txBody>
+      </p:sp>
+      <p:sp>
+        <p:nvSpPr>
+          <p:cNvPr id="5" name="TextBox 4">
+            <a:extLst>
+              <a:ext uri="{FF2B5EF4-FFF2-40B4-BE49-F238E27FC236}">
+                <a16:creationId xmlns:a16="http://schemas.microsoft.com/office/drawing/2014/main" id="{7A6EEF67-FD8D-E4AC-87C4-B36C410622C3}"/>
+              </a:ext>
+            </a:extLst>
+          </p:cNvPr>
+          <p:cNvSpPr txBox="1"/>
+          <p:nvPr/>
+        </p:nvSpPr>
+        <p:spPr>
+          <a:xfrm>
+            <a:off x="751113" y="2240892"/>
+            <a:ext cx="10900955" cy="2031325"/>
+          </a:xfrm>
+          <a:prstGeom prst="rect">
+            <a:avLst/>
+          </a:prstGeom>
+          <a:noFill/>
+        </p:spPr>
+        <p:txBody>
+          <a:bodyPr wrap="square">
+            <a:spAutoFit/>
+          </a:bodyPr>
+          <a:lstStyle/>
+          <a:p>
+            <a:pPr>
+              <a:buNone/>
+            </a:pPr>
+            <a:r>
+              <a:rPr lang="en-US" b="1" dirty="0">
+                <a:latin typeface="Times New Roman" panose="02020603050405020304" pitchFamily="18" charset="0"/>
+                <a:cs typeface="Times New Roman" panose="02020603050405020304" pitchFamily="18" charset="0"/>
+              </a:rPr>
+              <a:t>b)</a:t>
+            </a:r>
+            <a:r>
+              <a:rPr lang="en-US" dirty="0">
+                <a:latin typeface="Times New Roman" panose="02020603050405020304" pitchFamily="18" charset="0"/>
+                <a:cs typeface="Times New Roman" panose="02020603050405020304" pitchFamily="18" charset="0"/>
+              </a:rPr>
+              <a:t> A long ideal solenoid is connected in series to a battery of emf 12 V with negligible internal resistance and a resistor of 20 Ω. A coil is tightly wound over the central portion of the solenoid. The solenoid has a diameter of 5.0 cm and 60 turns per cm of length. The coil has 100 turns. Determine the:</a:t>
+            </a:r>
+          </a:p>
+          <a:p>
+            <a:pPr>
+              <a:buNone/>
+            </a:pPr>
+            <a:r>
+              <a:rPr lang="en-US" dirty="0">
+                <a:latin typeface="Times New Roman" panose="02020603050405020304" pitchFamily="18" charset="0"/>
+                <a:cs typeface="Times New Roman" panose="02020603050405020304" pitchFamily="18" charset="0"/>
+              </a:rPr>
+              <a:t> </a:t>
+            </a:r>
+            <a:r>
+              <a:rPr lang="en-US" dirty="0" err="1">
+                <a:latin typeface="Times New Roman" panose="02020603050405020304" pitchFamily="18" charset="0"/>
+                <a:cs typeface="Times New Roman" panose="02020603050405020304" pitchFamily="18" charset="0"/>
+              </a:rPr>
+              <a:t>i</a:t>
+            </a:r>
+            <a:r>
+              <a:rPr lang="en-US" dirty="0">
+                <a:latin typeface="Times New Roman" panose="02020603050405020304" pitchFamily="18" charset="0"/>
+                <a:cs typeface="Times New Roman" panose="02020603050405020304" pitchFamily="18" charset="0"/>
+              </a:rPr>
+              <a:t>) mutual inductance of the combination. </a:t>
+            </a:r>
+          </a:p>
+          <a:p>
+            <a:pPr>
+              <a:buNone/>
+            </a:pPr>
+            <a:r>
+              <a:rPr lang="en-US" dirty="0">
+                <a:latin typeface="Times New Roman" panose="02020603050405020304" pitchFamily="18" charset="0"/>
+                <a:cs typeface="Times New Roman" panose="02020603050405020304" pitchFamily="18" charset="0"/>
+              </a:rPr>
+              <a:t>ii) magnetic flux linkage through the coil. </a:t>
+            </a:r>
+          </a:p>
+          <a:p>
+            <a:pPr>
+              <a:buNone/>
+            </a:pPr>
+            <a:r>
+              <a:rPr lang="en-US" dirty="0">
+                <a:latin typeface="Times New Roman" panose="02020603050405020304" pitchFamily="18" charset="0"/>
+                <a:cs typeface="Times New Roman" panose="02020603050405020304" pitchFamily="18" charset="0"/>
+              </a:rPr>
+              <a:t>iii) average emf induced in the coil when the circuit is switched off and the current drops to zero in 20 </a:t>
+            </a:r>
+            <a:r>
+              <a:rPr lang="en-US" dirty="0" err="1">
+                <a:latin typeface="Times New Roman" panose="02020603050405020304" pitchFamily="18" charset="0"/>
+                <a:cs typeface="Times New Roman" panose="02020603050405020304" pitchFamily="18" charset="0"/>
+              </a:rPr>
+              <a:t>ms.</a:t>
+            </a:r>
+            <a:r>
+              <a:rPr lang="en-US" dirty="0">
+                <a:latin typeface="Times New Roman" panose="02020603050405020304" pitchFamily="18" charset="0"/>
+                <a:cs typeface="Times New Roman" panose="02020603050405020304" pitchFamily="18" charset="0"/>
+              </a:rPr>
+              <a:t> </a:t>
+            </a:r>
+          </a:p>
+          <a:p>
+            <a:pPr algn="r">
+              <a:buNone/>
+            </a:pPr>
+            <a:r>
+              <a:rPr lang="en-US" dirty="0">
+                <a:latin typeface="Times New Roman" panose="02020603050405020304" pitchFamily="18" charset="0"/>
+                <a:cs typeface="Times New Roman" panose="02020603050405020304" pitchFamily="18" charset="0"/>
+              </a:rPr>
+              <a:t>[6 marks]</a:t>
+            </a:r>
+          </a:p>
+        </p:txBody>
+      </p:sp>
+      <p:pic>
+        <p:nvPicPr>
+          <p:cNvPr id="7" name="Picture 6">
+            <a:extLst>
+              <a:ext uri="{FF2B5EF4-FFF2-40B4-BE49-F238E27FC236}">
+                <a16:creationId xmlns:a16="http://schemas.microsoft.com/office/drawing/2014/main" id="{2B04C358-35F1-CE42-7A7C-02F3B6F22CDB}"/>
+              </a:ext>
+            </a:extLst>
+          </p:cNvPr>
+          <p:cNvPicPr>
+            <a:picLocks noChangeAspect="1"/>
+          </p:cNvPicPr>
+          <p:nvPr/>
+        </p:nvPicPr>
+        <p:blipFill>
+          <a:blip r:embed="rId2"/>
+          <a:stretch>
+            <a:fillRect/>
+          </a:stretch>
+        </p:blipFill>
+        <p:spPr>
+          <a:xfrm>
+            <a:off x="7306816" y="4468935"/>
+            <a:ext cx="4887007" cy="1095528"/>
+          </a:xfrm>
+          <a:prstGeom prst="rect">
+            <a:avLst/>
+          </a:prstGeom>
+        </p:spPr>
+      </p:pic>
+    </p:spTree>
+    <p:extLst>
+      <p:ext uri="{BB962C8B-B14F-4D97-AF65-F5344CB8AC3E}">
+        <p14:creationId xmlns:p14="http://schemas.microsoft.com/office/powerpoint/2010/main" val="2753994305"/>
+      </p:ext>
+    </p:extLst>
+  </p:cSld>
+  <p:clrMapOvr>
+    <a:masterClrMapping/>
+  </p:clrMapOvr>
+</p:sld>
+</file>
+
+<file path=ppt/slides/slide9.xml><?xml version="1.0" encoding="utf-8"?>
+<p:sld xmlns:a="http://schemas.openxmlformats.org/drawingml/2006/main" xmlns:r="http://schemas.openxmlformats.org/officeDocument/2006/relationships" xmlns:p="http://schemas.openxmlformats.org/presentationml/2006/main">
+  <p:cSld>
+    <p:spTree>
+      <p:nvGrpSpPr>
+        <p:cNvPr id="1" name="">
+          <a:extLst>
+            <a:ext uri="{FF2B5EF4-FFF2-40B4-BE49-F238E27FC236}">
+              <a16:creationId xmlns:a16="http://schemas.microsoft.com/office/drawing/2014/main" id="{B87C7688-2094-CF4F-ECF6-9E59E5F6888D}"/>
+            </a:ext>
+          </a:extLst>
+        </p:cNvPr>
+        <p:cNvGrpSpPr/>
+        <p:nvPr/>
+      </p:nvGrpSpPr>
+      <p:grpSpPr>
+        <a:xfrm>
+          <a:off x="0" y="0"/>
+          <a:ext cx="0" cy="0"/>
+          <a:chOff x="0" y="0"/>
+          <a:chExt cx="0" cy="0"/>
+        </a:xfrm>
+      </p:grpSpPr>
+      <p:pic>
+        <p:nvPicPr>
+          <p:cNvPr id="3" name="Picture 2">
+            <a:extLst>
+              <a:ext uri="{FF2B5EF4-FFF2-40B4-BE49-F238E27FC236}">
+                <a16:creationId xmlns:a16="http://schemas.microsoft.com/office/drawing/2014/main" id="{48487B2C-FE96-0909-6D7D-690B81DD2074}"/>
+              </a:ext>
+            </a:extLst>
+          </p:cNvPr>
+          <p:cNvPicPr>
+            <a:picLocks noChangeAspect="1"/>
+          </p:cNvPicPr>
+          <p:nvPr/>
+        </p:nvPicPr>
+        <p:blipFill>
+          <a:blip r:embed="rId2"/>
+          <a:stretch>
+            <a:fillRect/>
+          </a:stretch>
+        </p:blipFill>
+        <p:spPr>
+          <a:xfrm>
+            <a:off x="519848" y="2413338"/>
+            <a:ext cx="3726529" cy="2031324"/>
+          </a:xfrm>
+          <a:prstGeom prst="rect">
+            <a:avLst/>
+          </a:prstGeom>
+        </p:spPr>
+      </p:pic>
+      <p:sp>
+        <p:nvSpPr>
+          <p:cNvPr id="5" name="TextBox 4">
+            <a:extLst>
+              <a:ext uri="{FF2B5EF4-FFF2-40B4-BE49-F238E27FC236}">
+                <a16:creationId xmlns:a16="http://schemas.microsoft.com/office/drawing/2014/main" id="{575A9D66-C3BA-3A9F-A115-DC325C4317BE}"/>
+              </a:ext>
+            </a:extLst>
+          </p:cNvPr>
+          <p:cNvSpPr txBox="1"/>
+          <p:nvPr/>
+        </p:nvSpPr>
+        <p:spPr>
+          <a:xfrm>
+            <a:off x="802878" y="349293"/>
+            <a:ext cx="10627121" cy="2031325"/>
+          </a:xfrm>
+          <a:prstGeom prst="rect">
+            <a:avLst/>
+          </a:prstGeom>
+          <a:noFill/>
+        </p:spPr>
+        <p:txBody>
+          <a:bodyPr wrap="square">
+            <a:spAutoFit/>
+          </a:bodyPr>
+          <a:lstStyle/>
+          <a:p>
+            <a:pPr>
+              <a:buNone/>
+            </a:pPr>
+            <a:r>
+              <a:rPr lang="en-US" dirty="0">
+                <a:latin typeface="Times New Roman" panose="02020603050405020304" pitchFamily="18" charset="0"/>
+                <a:cs typeface="Times New Roman" panose="02020603050405020304" pitchFamily="18" charset="0"/>
+              </a:rPr>
+              <a:t>4. a) A rectangular coil of 60 turns, dimensions 0.100 m by 0.200 m, and resistance 10.0 Ω rotates with angular speed 287 rpm about the y-axis in a region where a 1.00 T magnetic field is directed along the x-axis. Calculate the:</a:t>
+            </a:r>
+          </a:p>
+          <a:p>
+            <a:pPr marL="400050" indent="-400050">
+              <a:buAutoNum type="romanLcParenR"/>
+            </a:pPr>
+            <a:r>
+              <a:rPr lang="en-US" dirty="0">
+                <a:latin typeface="Times New Roman" panose="02020603050405020304" pitchFamily="18" charset="0"/>
+                <a:cs typeface="Times New Roman" panose="02020603050405020304" pitchFamily="18" charset="0"/>
+              </a:rPr>
+              <a:t>maximum induced emf in the coil</a:t>
+            </a:r>
+          </a:p>
+          <a:p>
+            <a:pPr marL="400050" indent="-400050">
+              <a:buAutoNum type="romanLcParenR"/>
+            </a:pPr>
+            <a:r>
+              <a:rPr lang="en-US" dirty="0">
+                <a:latin typeface="Times New Roman" panose="02020603050405020304" pitchFamily="18" charset="0"/>
+                <a:cs typeface="Times New Roman" panose="02020603050405020304" pitchFamily="18" charset="0"/>
+              </a:rPr>
+              <a:t>maximum induced current in the coil </a:t>
+            </a:r>
+          </a:p>
+          <a:p>
+            <a:pPr marL="400050" indent="-400050">
+              <a:buAutoNum type="romanLcParenR"/>
+            </a:pPr>
+            <a:r>
+              <a:rPr lang="en-US" dirty="0">
+                <a:latin typeface="Times New Roman" panose="02020603050405020304" pitchFamily="18" charset="0"/>
+                <a:cs typeface="Times New Roman" panose="02020603050405020304" pitchFamily="18" charset="0"/>
+              </a:rPr>
+              <a:t>induced emf at t = 0.05 s</a:t>
+            </a:r>
+          </a:p>
+          <a:p>
+            <a:pPr algn="r"/>
+            <a:r>
+              <a:rPr lang="en-US" dirty="0">
+                <a:latin typeface="Times New Roman" panose="02020603050405020304" pitchFamily="18" charset="0"/>
+                <a:cs typeface="Times New Roman" panose="02020603050405020304" pitchFamily="18" charset="0"/>
+              </a:rPr>
+              <a:t>[7 marks]</a:t>
+            </a:r>
+          </a:p>
+        </p:txBody>
+      </p:sp>
+      <p:sp>
+        <p:nvSpPr>
+          <p:cNvPr id="7" name="TextBox 6">
+            <a:extLst>
+              <a:ext uri="{FF2B5EF4-FFF2-40B4-BE49-F238E27FC236}">
+                <a16:creationId xmlns:a16="http://schemas.microsoft.com/office/drawing/2014/main" id="{3CB0D128-4CF9-D37A-F1B3-79B0B94A69B9}"/>
+              </a:ext>
+            </a:extLst>
+          </p:cNvPr>
+          <p:cNvSpPr txBox="1"/>
+          <p:nvPr/>
+        </p:nvSpPr>
+        <p:spPr>
+          <a:xfrm>
+            <a:off x="4246377" y="2413338"/>
+            <a:ext cx="7183622" cy="1477328"/>
+          </a:xfrm>
+          <a:prstGeom prst="rect">
+            <a:avLst/>
+          </a:prstGeom>
+          <a:noFill/>
+        </p:spPr>
+        <p:txBody>
+          <a:bodyPr wrap="square">
+            <a:spAutoFit/>
+          </a:bodyPr>
+          <a:lstStyle/>
+          <a:p>
+            <a:pPr algn="just">
+              <a:buNone/>
+            </a:pPr>
+            <a:r>
+              <a:rPr lang="en-US" dirty="0">
+                <a:latin typeface="Times New Roman" panose="02020603050405020304" pitchFamily="18" charset="0"/>
+                <a:cs typeface="Times New Roman" panose="02020603050405020304" pitchFamily="18" charset="0"/>
+              </a:rPr>
+              <a:t>b) A 10 cm long solenoid has 150 turns and an area of cross-section of 28 cm² as shown in the FIGURE 4. Coil C consists of 160 turns of insulated wire and is wound tightly around the </a:t>
+            </a:r>
+            <a:r>
+              <a:rPr lang="en-US" dirty="0" err="1">
+                <a:latin typeface="Times New Roman" panose="02020603050405020304" pitchFamily="18" charset="0"/>
+                <a:cs typeface="Times New Roman" panose="02020603050405020304" pitchFamily="18" charset="0"/>
+              </a:rPr>
+              <a:t>centre</a:t>
+            </a:r>
+            <a:r>
+              <a:rPr lang="en-US" dirty="0">
+                <a:latin typeface="Times New Roman" panose="02020603050405020304" pitchFamily="18" charset="0"/>
+                <a:cs typeface="Times New Roman" panose="02020603050405020304" pitchFamily="18" charset="0"/>
+              </a:rPr>
+              <a:t> of the solenoid. Calculate the flux linkage in the coil C for a current of 3.5 A in the solenoid.</a:t>
+            </a:r>
+          </a:p>
+          <a:p>
+            <a:pPr algn="r">
+              <a:buNone/>
+            </a:pPr>
+            <a:r>
+              <a:rPr lang="en-US" dirty="0">
+                <a:latin typeface="Times New Roman" panose="02020603050405020304" pitchFamily="18" charset="0"/>
+                <a:cs typeface="Times New Roman" panose="02020603050405020304" pitchFamily="18" charset="0"/>
+              </a:rPr>
+              <a:t>[3 marks]</a:t>
+            </a:r>
+          </a:p>
+        </p:txBody>
+      </p:sp>
+      <p:pic>
+        <p:nvPicPr>
+          <p:cNvPr id="9" name="Picture 8">
+            <a:extLst>
+              <a:ext uri="{FF2B5EF4-FFF2-40B4-BE49-F238E27FC236}">
+                <a16:creationId xmlns:a16="http://schemas.microsoft.com/office/drawing/2014/main" id="{C471C529-96DA-BC4F-BE0F-074ED82F3AFA}"/>
+              </a:ext>
+            </a:extLst>
+          </p:cNvPr>
+          <p:cNvPicPr>
+            <a:picLocks noChangeAspect="1"/>
+          </p:cNvPicPr>
+          <p:nvPr/>
+        </p:nvPicPr>
+        <p:blipFill>
+          <a:blip r:embed="rId3"/>
+          <a:stretch>
+            <a:fillRect/>
+          </a:stretch>
+        </p:blipFill>
+        <p:spPr>
+          <a:xfrm>
+            <a:off x="7154978" y="5594179"/>
+            <a:ext cx="4848902" cy="914528"/>
+          </a:xfrm>
+          <a:prstGeom prst="rect">
+            <a:avLst/>
+          </a:prstGeom>
+        </p:spPr>
+      </p:pic>
+    </p:spTree>
+    <p:extLst>
+      <p:ext uri="{BB962C8B-B14F-4D97-AF65-F5344CB8AC3E}">
+        <p14:creationId xmlns:p14="http://schemas.microsoft.com/office/powerpoint/2010/main" val="990140486"/>
       </p:ext>
     </p:extLst>
   </p:cSld>
